--- a/Docs/Risk Data Platform Briefing.pptx
+++ b/Docs/Risk Data Platform Briefing.pptx
@@ -5,7 +5,7 @@
     <p:sldMasterId id="2147483648" r:id="rId1"/>
   </p:sldMasterIdLst>
   <p:notesMasterIdLst>
-    <p:notesMasterId r:id="rId13"/>
+    <p:notesMasterId r:id="rId15"/>
   </p:notesMasterIdLst>
   <p:sldIdLst>
     <p:sldId id="256" r:id="rId2"/>
@@ -18,7 +18,9 @@
     <p:sldId id="263" r:id="rId9"/>
     <p:sldId id="264" r:id="rId10"/>
     <p:sldId id="266" r:id="rId11"/>
-    <p:sldId id="265" r:id="rId12"/>
+    <p:sldId id="267" r:id="rId12"/>
+    <p:sldId id="268" r:id="rId13"/>
+    <p:sldId id="269" r:id="rId14"/>
   </p:sldIdLst>
   <p:sldSz cx="12192000" cy="6858000"/>
   <p:notesSz cx="6858000" cy="12192000"/>
@@ -4573,7 +4575,13 @@
   <p:cSld>
     <p:spTree>
       <p:nvGrpSpPr>
-        <p:cNvPr id="1" name=""/>
+        <p:cNvPr id="1" name="">
+          <a:extLst>
+            <a:ext uri="{FF2B5EF4-FFF2-40B4-BE49-F238E27FC236}">
+              <a16:creationId xmlns:a16="http://schemas.microsoft.com/office/drawing/2014/main" id="{82A31706-C77C-7324-E4B3-32C9111A2BFD}"/>
+            </a:ext>
+          </a:extLst>
+        </p:cNvPr>
         <p:cNvGrpSpPr/>
         <p:nvPr/>
       </p:nvGrpSpPr>
@@ -4587,10 +4595,10 @@
       </p:grpSpPr>
       <p:sp>
         <p:nvSpPr>
-          <p:cNvPr id="3" name="Shape 2">
+          <p:cNvPr id="4" name="Shape 2">
             <a:extLst>
               <a:ext uri="{FF2B5EF4-FFF2-40B4-BE49-F238E27FC236}">
-                <a16:creationId xmlns:a16="http://schemas.microsoft.com/office/drawing/2014/main" id="{5DBAE137-BE94-D11E-5202-748CECE4F805}"/>
+                <a16:creationId xmlns:a16="http://schemas.microsoft.com/office/drawing/2014/main" id="{EE934C1F-6886-D222-3381-5CADCEDBE60C}"/>
               </a:ext>
             </a:extLst>
           </p:cNvPr>
@@ -4599,17 +4607,15 @@
         </p:nvSpPr>
         <p:spPr>
           <a:xfrm>
-            <a:off x="4717688" y="1295399"/>
-            <a:ext cx="1641190" cy="2740572"/>
+            <a:off x="380000" y="1269986"/>
+            <a:ext cx="2077370" cy="3776330"/>
           </a:xfrm>
           <a:prstGeom prst="roundRect">
             <a:avLst>
               <a:gd name="adj" fmla="val 1087"/>
             </a:avLst>
           </a:prstGeom>
-          <a:solidFill>
-            <a:srgbClr val="FBFDFB"/>
-          </a:solidFill>
+          <a:noFill/>
           <a:ln w="15240">
             <a:solidFill>
               <a:srgbClr val="1F7A47"/>
@@ -4627,166 +4633,10 @@
       </p:sp>
       <p:sp>
         <p:nvSpPr>
-          <p:cNvPr id="50" name="Shape 2">
-            <a:extLst>
-              <a:ext uri="{FF2B5EF4-FFF2-40B4-BE49-F238E27FC236}">
-                <a16:creationId xmlns:a16="http://schemas.microsoft.com/office/drawing/2014/main" id="{9474F290-F569-5BAF-D537-8DB92CD63046}"/>
-              </a:ext>
-            </a:extLst>
-          </p:cNvPr>
-          <p:cNvSpPr/>
-          <p:nvPr/>
-        </p:nvSpPr>
-        <p:spPr>
-          <a:xfrm>
-            <a:off x="4815317" y="1586170"/>
-            <a:ext cx="1436396" cy="717036"/>
-          </a:xfrm>
-          <a:prstGeom prst="roundRect">
-            <a:avLst>
-              <a:gd name="adj" fmla="val 1087"/>
-            </a:avLst>
-          </a:prstGeom>
-          <a:solidFill>
-            <a:srgbClr val="FBFDFB"/>
-          </a:solidFill>
-          <a:ln w="15240">
-            <a:solidFill>
-              <a:srgbClr val="1F7A47"/>
-            </a:solidFill>
-            <a:prstDash val="solid"/>
-          </a:ln>
-        </p:spPr>
-        <p:txBody>
-          <a:bodyPr/>
-          <a:lstStyle/>
-          <a:p>
-            <a:endParaRPr lang="en-US"/>
-          </a:p>
-        </p:txBody>
-      </p:sp>
-      <p:sp>
-        <p:nvSpPr>
-          <p:cNvPr id="42" name="Shape 2">
-            <a:extLst>
-              <a:ext uri="{FF2B5EF4-FFF2-40B4-BE49-F238E27FC236}">
-                <a16:creationId xmlns:a16="http://schemas.microsoft.com/office/drawing/2014/main" id="{5EA62148-12EF-2B06-5983-EFCAE0030165}"/>
-              </a:ext>
-            </a:extLst>
-          </p:cNvPr>
-          <p:cNvSpPr/>
-          <p:nvPr/>
-        </p:nvSpPr>
-        <p:spPr>
-          <a:xfrm>
-            <a:off x="2977869" y="2896025"/>
-            <a:ext cx="1502692" cy="584775"/>
-          </a:xfrm>
-          <a:prstGeom prst="roundRect">
-            <a:avLst>
-              <a:gd name="adj" fmla="val 1087"/>
-            </a:avLst>
-          </a:prstGeom>
-          <a:solidFill>
-            <a:srgbClr val="FBFDFB"/>
-          </a:solidFill>
-          <a:ln w="15240">
-            <a:solidFill>
-              <a:srgbClr val="1F7A47"/>
-            </a:solidFill>
-            <a:prstDash val="solid"/>
-          </a:ln>
-        </p:spPr>
-        <p:txBody>
-          <a:bodyPr/>
-          <a:lstStyle/>
-          <a:p>
-            <a:endParaRPr lang="en-US"/>
-          </a:p>
-        </p:txBody>
-      </p:sp>
-      <p:sp>
-        <p:nvSpPr>
-          <p:cNvPr id="4" name="Shape 2">
-            <a:extLst>
-              <a:ext uri="{FF2B5EF4-FFF2-40B4-BE49-F238E27FC236}">
-                <a16:creationId xmlns:a16="http://schemas.microsoft.com/office/drawing/2014/main" id="{131A8677-5EDC-53F7-D353-A4BA26DB7AF9}"/>
-              </a:ext>
-            </a:extLst>
-          </p:cNvPr>
-          <p:cNvSpPr/>
-          <p:nvPr/>
-        </p:nvSpPr>
-        <p:spPr>
-          <a:xfrm>
-            <a:off x="655320" y="1295400"/>
-            <a:ext cx="2077370" cy="2740572"/>
-          </a:xfrm>
-          <a:prstGeom prst="roundRect">
-            <a:avLst>
-              <a:gd name="adj" fmla="val 1087"/>
-            </a:avLst>
-          </a:prstGeom>
-          <a:noFill/>
-          <a:ln w="15240">
-            <a:solidFill>
-              <a:srgbClr val="1F7A47"/>
-            </a:solidFill>
-            <a:prstDash val="solid"/>
-          </a:ln>
-        </p:spPr>
-        <p:txBody>
-          <a:bodyPr/>
-          <a:lstStyle/>
-          <a:p>
-            <a:endParaRPr lang="en-US"/>
-          </a:p>
-        </p:txBody>
-      </p:sp>
-      <p:sp>
-        <p:nvSpPr>
-          <p:cNvPr id="7" name="Shape 2">
-            <a:extLst>
-              <a:ext uri="{FF2B5EF4-FFF2-40B4-BE49-F238E27FC236}">
-                <a16:creationId xmlns:a16="http://schemas.microsoft.com/office/drawing/2014/main" id="{935D1F27-B682-7B72-D5B9-E68696482025}"/>
-              </a:ext>
-            </a:extLst>
-          </p:cNvPr>
-          <p:cNvSpPr/>
-          <p:nvPr/>
-        </p:nvSpPr>
-        <p:spPr>
-          <a:xfrm>
-            <a:off x="2890345" y="1295400"/>
-            <a:ext cx="1641190" cy="2740572"/>
-          </a:xfrm>
-          <a:prstGeom prst="roundRect">
-            <a:avLst>
-              <a:gd name="adj" fmla="val 1087"/>
-            </a:avLst>
-          </a:prstGeom>
-          <a:noFill/>
-          <a:ln w="9525">
-            <a:solidFill>
-              <a:srgbClr val="1F7A47"/>
-            </a:solidFill>
-            <a:prstDash val="solid"/>
-          </a:ln>
-        </p:spPr>
-        <p:txBody>
-          <a:bodyPr/>
-          <a:lstStyle/>
-          <a:p>
-            <a:endParaRPr lang="en-US"/>
-          </a:p>
-        </p:txBody>
-      </p:sp>
-      <p:sp>
-        <p:nvSpPr>
           <p:cNvPr id="8" name="TextBox 7">
             <a:extLst>
               <a:ext uri="{FF2B5EF4-FFF2-40B4-BE49-F238E27FC236}">
-                <a16:creationId xmlns:a16="http://schemas.microsoft.com/office/drawing/2014/main" id="{E77B56AA-4F47-0153-996E-B028D284E50E}"/>
+                <a16:creationId xmlns:a16="http://schemas.microsoft.com/office/drawing/2014/main" id="{8235C131-979B-63EA-C65E-0CD6C30F2E2B}"/>
               </a:ext>
             </a:extLst>
           </p:cNvPr>
@@ -4795,7 +4645,7 @@
         </p:nvSpPr>
         <p:spPr>
           <a:xfrm>
-            <a:off x="821729" y="915557"/>
+            <a:off x="546409" y="890143"/>
             <a:ext cx="1308371" cy="276999"/>
           </a:xfrm>
           <a:prstGeom prst="rect">
@@ -4821,7 +4671,7 @@
           <p:cNvPr id="12" name="Group 11">
             <a:extLst>
               <a:ext uri="{FF2B5EF4-FFF2-40B4-BE49-F238E27FC236}">
-                <a16:creationId xmlns:a16="http://schemas.microsoft.com/office/drawing/2014/main" id="{B26AA27F-609F-8CEA-2A24-43F182251B5B}"/>
+                <a16:creationId xmlns:a16="http://schemas.microsoft.com/office/drawing/2014/main" id="{E234312D-D17B-3E1B-9A10-4434D8A72BBE}"/>
               </a:ext>
             </a:extLst>
           </p:cNvPr>
@@ -4830,7 +4680,7 @@
         </p:nvGrpSpPr>
         <p:grpSpPr>
           <a:xfrm>
-            <a:off x="655320" y="1333117"/>
+            <a:off x="380000" y="1307703"/>
             <a:ext cx="1986456" cy="1510783"/>
             <a:chOff x="4120055" y="4733086"/>
             <a:chExt cx="1986456" cy="1510783"/>
@@ -4841,7 +4691,7 @@
             <p:cNvPr id="9" name="Shape 2">
               <a:extLst>
                 <a:ext uri="{FF2B5EF4-FFF2-40B4-BE49-F238E27FC236}">
-                  <a16:creationId xmlns:a16="http://schemas.microsoft.com/office/drawing/2014/main" id="{450DCE4F-6444-BAC3-6630-AE4802BAB226}"/>
+                  <a16:creationId xmlns:a16="http://schemas.microsoft.com/office/drawing/2014/main" id="{2DDDDBF1-46FF-C06E-BA07-9D2D91F12EC0}"/>
                 </a:ext>
               </a:extLst>
             </p:cNvPr>
@@ -4881,7 +4731,7 @@
             <p:cNvPr id="10" name="TextBox 9">
               <a:extLst>
                 <a:ext uri="{FF2B5EF4-FFF2-40B4-BE49-F238E27FC236}">
-                  <a16:creationId xmlns:a16="http://schemas.microsoft.com/office/drawing/2014/main" id="{84B18F38-111D-7634-FECF-60B92DE798C2}"/>
+                  <a16:creationId xmlns:a16="http://schemas.microsoft.com/office/drawing/2014/main" id="{6E66620C-1CBF-3D20-7D56-2E9D4B8815CC}"/>
                 </a:ext>
               </a:extLst>
             </p:cNvPr>
@@ -4979,7 +4829,7 @@
             <p:cNvPr id="11" name="TextBox 10">
               <a:extLst>
                 <a:ext uri="{FF2B5EF4-FFF2-40B4-BE49-F238E27FC236}">
-                  <a16:creationId xmlns:a16="http://schemas.microsoft.com/office/drawing/2014/main" id="{0AD6304A-BDC6-F685-595B-F1B5C8CDE74B}"/>
+                  <a16:creationId xmlns:a16="http://schemas.microsoft.com/office/drawing/2014/main" id="{8CDD86A6-CF59-63C3-0BA0-E2A3C9282084}"/>
                 </a:ext>
               </a:extLst>
             </p:cNvPr>
@@ -5015,7 +4865,7 @@
           <p:cNvPr id="17" name="Group 16">
             <a:extLst>
               <a:ext uri="{FF2B5EF4-FFF2-40B4-BE49-F238E27FC236}">
-                <a16:creationId xmlns:a16="http://schemas.microsoft.com/office/drawing/2014/main" id="{90BDAADE-A9E5-BF56-2CB6-A32FA146968A}"/>
+                <a16:creationId xmlns:a16="http://schemas.microsoft.com/office/drawing/2014/main" id="{79DBA5A2-1DB4-A1B0-0E63-CBE6AF3AF4FE}"/>
               </a:ext>
             </a:extLst>
           </p:cNvPr>
@@ -5024,7 +4874,7 @@
         </p:nvGrpSpPr>
         <p:grpSpPr>
           <a:xfrm>
-            <a:off x="723255" y="3020751"/>
+            <a:off x="420084" y="2883660"/>
             <a:ext cx="1906289" cy="297285"/>
             <a:chOff x="1080972" y="4568687"/>
             <a:chExt cx="1641190" cy="297285"/>
@@ -5035,7 +4885,7 @@
             <p:cNvPr id="13" name="Shape 2">
               <a:extLst>
                 <a:ext uri="{FF2B5EF4-FFF2-40B4-BE49-F238E27FC236}">
-                  <a16:creationId xmlns:a16="http://schemas.microsoft.com/office/drawing/2014/main" id="{C4B3B397-6FBE-F18B-D24F-80D16FE660E8}"/>
+                  <a16:creationId xmlns:a16="http://schemas.microsoft.com/office/drawing/2014/main" id="{215FD1B1-5977-C13C-A42C-D5B29DA1ACE3}"/>
                 </a:ext>
               </a:extLst>
             </p:cNvPr>
@@ -5075,7 +4925,7 @@
             <p:cNvPr id="14" name="TextBox 13">
               <a:extLst>
                 <a:ext uri="{FF2B5EF4-FFF2-40B4-BE49-F238E27FC236}">
-                  <a16:creationId xmlns:a16="http://schemas.microsoft.com/office/drawing/2014/main" id="{046CD38A-A308-69BE-6FE0-A2CBE21AD598}"/>
+                  <a16:creationId xmlns:a16="http://schemas.microsoft.com/office/drawing/2014/main" id="{05584269-6D9A-3E55-C564-3B11DE419035}"/>
                 </a:ext>
               </a:extLst>
             </p:cNvPr>
@@ -5085,7 +4935,7 @@
           <p:spPr>
             <a:xfrm>
               <a:off x="1230256" y="4568687"/>
-              <a:ext cx="806188" cy="276999"/>
+              <a:ext cx="1234179" cy="276999"/>
             </a:xfrm>
             <a:prstGeom prst="rect">
               <a:avLst/>
@@ -5100,7 +4950,7 @@
             <a:p>
               <a:r>
                 <a:rPr lang="en-US" sz="1200" dirty="0"/>
-                <a:t>Surveillance</a:t>
+                <a:t>Transaction Banking</a:t>
               </a:r>
             </a:p>
           </p:txBody>
@@ -5111,7 +4961,7 @@
           <p:cNvPr id="18" name="Group 17">
             <a:extLst>
               <a:ext uri="{FF2B5EF4-FFF2-40B4-BE49-F238E27FC236}">
-                <a16:creationId xmlns:a16="http://schemas.microsoft.com/office/drawing/2014/main" id="{CE01BDAE-C13B-8862-FCBE-6827E15967F5}"/>
+                <a16:creationId xmlns:a16="http://schemas.microsoft.com/office/drawing/2014/main" id="{EE9BEC85-FBED-189D-7A94-664CBAC647C7}"/>
               </a:ext>
             </a:extLst>
           </p:cNvPr>
@@ -5120,7 +4970,7 @@
         </p:nvGrpSpPr>
         <p:grpSpPr>
           <a:xfrm>
-            <a:off x="735484" y="3429000"/>
+            <a:off x="420084" y="3263455"/>
             <a:ext cx="1906289" cy="297285"/>
             <a:chOff x="1091500" y="5196820"/>
             <a:chExt cx="1641190" cy="297285"/>
@@ -5131,7 +4981,7 @@
             <p:cNvPr id="15" name="Shape 2">
               <a:extLst>
                 <a:ext uri="{FF2B5EF4-FFF2-40B4-BE49-F238E27FC236}">
-                  <a16:creationId xmlns:a16="http://schemas.microsoft.com/office/drawing/2014/main" id="{37694884-B3A7-3663-1915-ADEC3E7AEFAA}"/>
+                  <a16:creationId xmlns:a16="http://schemas.microsoft.com/office/drawing/2014/main" id="{E2CB7D62-6325-9CBC-3D13-102398D09647}"/>
                 </a:ext>
               </a:extLst>
             </p:cNvPr>
@@ -5171,7 +5021,7 @@
             <p:cNvPr id="16" name="TextBox 15">
               <a:extLst>
                 <a:ext uri="{FF2B5EF4-FFF2-40B4-BE49-F238E27FC236}">
-                  <a16:creationId xmlns:a16="http://schemas.microsoft.com/office/drawing/2014/main" id="{51A56C2D-F66C-8DF1-107D-731944FA42B5}"/>
+                  <a16:creationId xmlns:a16="http://schemas.microsoft.com/office/drawing/2014/main" id="{AB7F2471-DDA3-DB24-F3AC-3D5880C69D3C}"/>
                 </a:ext>
               </a:extLst>
             </p:cNvPr>
@@ -5181,7 +5031,7 @@
           <p:spPr>
             <a:xfrm>
               <a:off x="1235260" y="5217106"/>
-              <a:ext cx="624184" cy="276999"/>
+              <a:ext cx="1413258" cy="276999"/>
             </a:xfrm>
             <a:prstGeom prst="rect">
               <a:avLst/>
@@ -5200,53 +5050,18 @@
             <a:p>
               <a:r>
                 <a:rPr lang="en-US" sz="1200" dirty="0"/>
-                <a:t>Portfolio</a:t>
+                <a:t>Trade Lifecycle &amp; Oper</a:t>
               </a:r>
             </a:p>
           </p:txBody>
         </p:sp>
       </p:grpSp>
-      <p:sp>
-        <p:nvSpPr>
-          <p:cNvPr id="19" name="TextBox 18">
+      <p:grpSp>
+        <p:nvGrpSpPr>
+          <p:cNvPr id="86" name="Group 85">
             <a:extLst>
               <a:ext uri="{FF2B5EF4-FFF2-40B4-BE49-F238E27FC236}">
-                <a16:creationId xmlns:a16="http://schemas.microsoft.com/office/drawing/2014/main" id="{C7286D05-1628-2838-C695-E65D21F50441}"/>
-              </a:ext>
-            </a:extLst>
-          </p:cNvPr>
-          <p:cNvSpPr txBox="1"/>
-          <p:nvPr/>
-        </p:nvSpPr>
-        <p:spPr>
-          <a:xfrm>
-            <a:off x="2890345" y="915556"/>
-            <a:ext cx="1283108" cy="276999"/>
-          </a:xfrm>
-          <a:prstGeom prst="rect">
-            <a:avLst/>
-          </a:prstGeom>
-          <a:noFill/>
-        </p:spPr>
-        <p:txBody>
-          <a:bodyPr wrap="none" rtlCol="0">
-            <a:spAutoFit/>
-          </a:bodyPr>
-          <a:lstStyle/>
-          <a:p>
-            <a:r>
-              <a:rPr lang="en-US" sz="1200" dirty="0"/>
-              <a:t>Data Architecture</a:t>
-            </a:r>
-          </a:p>
-        </p:txBody>
-      </p:sp>
-      <p:grpSp>
-        <p:nvGrpSpPr>
-          <p:cNvPr id="39" name="Group 38">
-            <a:extLst>
-              <a:ext uri="{FF2B5EF4-FFF2-40B4-BE49-F238E27FC236}">
-                <a16:creationId xmlns:a16="http://schemas.microsoft.com/office/drawing/2014/main" id="{D924462C-8214-20FD-A67B-C1DF33ED8E90}"/>
+                <a16:creationId xmlns:a16="http://schemas.microsoft.com/office/drawing/2014/main" id="{739B040B-A533-FC91-47D3-AFA8A76F5711}"/>
               </a:ext>
             </a:extLst>
           </p:cNvPr>
@@ -5255,18 +5070,18 @@
         </p:nvGrpSpPr>
         <p:grpSpPr>
           <a:xfrm>
-            <a:off x="2890345" y="1401802"/>
-            <a:ext cx="1669688" cy="1421033"/>
-            <a:chOff x="9301655" y="3831021"/>
-            <a:chExt cx="1669688" cy="1421033"/>
+            <a:off x="5933189" y="974522"/>
+            <a:ext cx="1698863" cy="3992364"/>
+            <a:chOff x="4660015" y="944023"/>
+            <a:chExt cx="1698863" cy="3992364"/>
           </a:xfrm>
         </p:grpSpPr>
         <p:sp>
           <p:nvSpPr>
-            <p:cNvPr id="37" name="Shape 2">
+            <p:cNvPr id="3" name="Shape 2">
               <a:extLst>
                 <a:ext uri="{FF2B5EF4-FFF2-40B4-BE49-F238E27FC236}">
-                  <a16:creationId xmlns:a16="http://schemas.microsoft.com/office/drawing/2014/main" id="{349B52F2-A9D4-263A-15D1-F7A6D58FF7E4}"/>
+                  <a16:creationId xmlns:a16="http://schemas.microsoft.com/office/drawing/2014/main" id="{7DB71644-4F71-AC1A-6BA6-1DE265673805}"/>
                 </a:ext>
               </a:extLst>
             </p:cNvPr>
@@ -5275,8 +5090,8 @@
           </p:nvSpPr>
           <p:spPr>
             <a:xfrm>
-              <a:off x="9377209" y="4033826"/>
-              <a:ext cx="1514661" cy="1218228"/>
+              <a:off x="4717688" y="1295399"/>
+              <a:ext cx="1641190" cy="3640988"/>
             </a:xfrm>
             <a:prstGeom prst="roundRect">
               <a:avLst>
@@ -5301,650 +5116,12 @@
             </a:p>
           </p:txBody>
         </p:sp>
-        <p:grpSp>
-          <p:nvGrpSpPr>
-            <p:cNvPr id="33" name="Group 32">
+        <p:sp>
+          <p:nvSpPr>
+            <p:cNvPr id="50" name="Shape 2">
               <a:extLst>
                 <a:ext uri="{FF2B5EF4-FFF2-40B4-BE49-F238E27FC236}">
-                  <a16:creationId xmlns:a16="http://schemas.microsoft.com/office/drawing/2014/main" id="{41C081C8-A95F-4ECA-4D94-2E5831F6A718}"/>
-                </a:ext>
-              </a:extLst>
-            </p:cNvPr>
-            <p:cNvGrpSpPr/>
-            <p:nvPr/>
-          </p:nvGrpSpPr>
-          <p:grpSpPr>
-            <a:xfrm>
-              <a:off x="9418320" y="4077805"/>
-              <a:ext cx="1165860" cy="219456"/>
-              <a:chOff x="4480560" y="4451935"/>
-              <a:chExt cx="1165860" cy="219456"/>
-            </a:xfrm>
-          </p:grpSpPr>
-          <p:sp>
-            <p:nvSpPr>
-              <p:cNvPr id="25" name="Shape 30">
-                <a:extLst>
-                  <a:ext uri="{FF2B5EF4-FFF2-40B4-BE49-F238E27FC236}">
-                    <a16:creationId xmlns:a16="http://schemas.microsoft.com/office/drawing/2014/main" id="{D1C22641-7CB0-A805-7CEC-575DE941C56B}"/>
-                  </a:ext>
-                </a:extLst>
-              </p:cNvPr>
-              <p:cNvSpPr/>
-              <p:nvPr/>
-            </p:nvSpPr>
-            <p:spPr>
-              <a:xfrm>
-                <a:off x="4549140" y="4451935"/>
-                <a:ext cx="1097280" cy="219456"/>
-              </a:xfrm>
-              <a:prstGeom prst="roundRect">
-                <a:avLst>
-                  <a:gd name="adj" fmla="val 16667"/>
-                </a:avLst>
-              </a:prstGeom>
-              <a:solidFill>
-                <a:srgbClr val="1F7A47"/>
-              </a:solidFill>
-              <a:ln/>
-            </p:spPr>
-            <p:txBody>
-              <a:bodyPr/>
-              <a:lstStyle/>
-              <a:p>
-                <a:endParaRPr lang="en-US"/>
-              </a:p>
-            </p:txBody>
-          </p:sp>
-          <p:sp>
-            <p:nvSpPr>
-              <p:cNvPr id="26" name="Text 31">
-                <a:extLst>
-                  <a:ext uri="{FF2B5EF4-FFF2-40B4-BE49-F238E27FC236}">
-                    <a16:creationId xmlns:a16="http://schemas.microsoft.com/office/drawing/2014/main" id="{7A7175EE-809A-1364-DFDF-84BDA5DBEF32}"/>
-                  </a:ext>
-                </a:extLst>
-              </p:cNvPr>
-              <p:cNvSpPr/>
-              <p:nvPr/>
-            </p:nvSpPr>
-            <p:spPr>
-              <a:xfrm>
-                <a:off x="4480560" y="4451935"/>
-                <a:ext cx="1097280" cy="219456"/>
-              </a:xfrm>
-              <a:prstGeom prst="rect">
-                <a:avLst/>
-              </a:prstGeom>
-              <a:noFill/>
-              <a:ln/>
-            </p:spPr>
-            <p:txBody>
-              <a:bodyPr wrap="square" rtlCol="0" anchor="ctr"/>
-              <a:lstStyle/>
-              <a:p>
-                <a:pPr marL="0" indent="0" algn="ctr">
-                  <a:buNone/>
-                </a:pPr>
-                <a:r>
-                  <a:rPr lang="en-US" sz="850" b="1" dirty="0">
-                    <a:solidFill>
-                      <a:srgbClr val="FFFFFF"/>
-                    </a:solidFill>
-                    <a:latin typeface="Calibri" pitchFamily="34" charset="0"/>
-                    <a:ea typeface="Calibri" pitchFamily="34" charset="-122"/>
-                    <a:cs typeface="Calibri" pitchFamily="34" charset="-120"/>
-                  </a:rPr>
-                  <a:t>Valuation</a:t>
-                </a:r>
-                <a:endParaRPr lang="en-US" sz="850" dirty="0"/>
-              </a:p>
-            </p:txBody>
-          </p:sp>
-        </p:grpSp>
-        <p:grpSp>
-          <p:nvGrpSpPr>
-            <p:cNvPr id="36" name="Group 35">
-              <a:extLst>
-                <a:ext uri="{FF2B5EF4-FFF2-40B4-BE49-F238E27FC236}">
-                  <a16:creationId xmlns:a16="http://schemas.microsoft.com/office/drawing/2014/main" id="{B3636EC6-C867-B920-CDB2-F3A18AFB3AD4}"/>
-                </a:ext>
-              </a:extLst>
-            </p:cNvPr>
-            <p:cNvGrpSpPr/>
-            <p:nvPr/>
-          </p:nvGrpSpPr>
-          <p:grpSpPr>
-            <a:xfrm>
-              <a:off x="9486900" y="4352609"/>
-              <a:ext cx="1097280" cy="219456"/>
-              <a:chOff x="5715000" y="4451935"/>
-              <a:chExt cx="1097280" cy="219456"/>
-            </a:xfrm>
-          </p:grpSpPr>
-          <p:sp>
-            <p:nvSpPr>
-              <p:cNvPr id="27" name="Shape 32">
-                <a:extLst>
-                  <a:ext uri="{FF2B5EF4-FFF2-40B4-BE49-F238E27FC236}">
-                    <a16:creationId xmlns:a16="http://schemas.microsoft.com/office/drawing/2014/main" id="{A934C15F-FEEF-1A2C-B4F9-145646690D4A}"/>
-                  </a:ext>
-                </a:extLst>
-              </p:cNvPr>
-              <p:cNvSpPr/>
-              <p:nvPr/>
-            </p:nvSpPr>
-            <p:spPr>
-              <a:xfrm>
-                <a:off x="5715000" y="4451935"/>
-                <a:ext cx="1097280" cy="219456"/>
-              </a:xfrm>
-              <a:prstGeom prst="roundRect">
-                <a:avLst>
-                  <a:gd name="adj" fmla="val 16667"/>
-                </a:avLst>
-              </a:prstGeom>
-              <a:solidFill>
-                <a:srgbClr val="1F7A47"/>
-              </a:solidFill>
-              <a:ln/>
-            </p:spPr>
-            <p:txBody>
-              <a:bodyPr/>
-              <a:lstStyle/>
-              <a:p>
-                <a:endParaRPr lang="en-US"/>
-              </a:p>
-            </p:txBody>
-          </p:sp>
-          <p:sp>
-            <p:nvSpPr>
-              <p:cNvPr id="28" name="Text 33">
-                <a:extLst>
-                  <a:ext uri="{FF2B5EF4-FFF2-40B4-BE49-F238E27FC236}">
-                    <a16:creationId xmlns:a16="http://schemas.microsoft.com/office/drawing/2014/main" id="{90896132-2A40-F2C8-0777-1B18799DDA0C}"/>
-                  </a:ext>
-                </a:extLst>
-              </p:cNvPr>
-              <p:cNvSpPr/>
-              <p:nvPr/>
-            </p:nvSpPr>
-            <p:spPr>
-              <a:xfrm>
-                <a:off x="5715000" y="4451935"/>
-                <a:ext cx="1097280" cy="219456"/>
-              </a:xfrm>
-              <a:prstGeom prst="rect">
-                <a:avLst/>
-              </a:prstGeom>
-              <a:noFill/>
-              <a:ln/>
-            </p:spPr>
-            <p:txBody>
-              <a:bodyPr wrap="square" rtlCol="0" anchor="ctr"/>
-              <a:lstStyle/>
-              <a:p>
-                <a:pPr marL="0" indent="0" algn="ctr">
-                  <a:buNone/>
-                </a:pPr>
-                <a:r>
-                  <a:rPr lang="en-US" sz="850" b="1" dirty="0">
-                    <a:solidFill>
-                      <a:srgbClr val="FFFFFF"/>
-                    </a:solidFill>
-                    <a:latin typeface="Calibri" pitchFamily="34" charset="0"/>
-                    <a:ea typeface="Calibri" pitchFamily="34" charset="-122"/>
-                    <a:cs typeface="Calibri" pitchFamily="34" charset="-120"/>
-                  </a:rPr>
-                  <a:t>Trade</a:t>
-                </a:r>
-                <a:endParaRPr lang="en-US" sz="850" dirty="0"/>
-              </a:p>
-            </p:txBody>
-          </p:sp>
-        </p:grpSp>
-        <p:grpSp>
-          <p:nvGrpSpPr>
-            <p:cNvPr id="34" name="Group 33">
-              <a:extLst>
-                <a:ext uri="{FF2B5EF4-FFF2-40B4-BE49-F238E27FC236}">
-                  <a16:creationId xmlns:a16="http://schemas.microsoft.com/office/drawing/2014/main" id="{AD958A6F-B4E5-B021-610E-B45108FD5F8C}"/>
-                </a:ext>
-              </a:extLst>
-            </p:cNvPr>
-            <p:cNvGrpSpPr/>
-            <p:nvPr/>
-          </p:nvGrpSpPr>
-          <p:grpSpPr>
-            <a:xfrm>
-              <a:off x="9486900" y="4622697"/>
-              <a:ext cx="1097280" cy="219456"/>
-              <a:chOff x="6949440" y="4451935"/>
-              <a:chExt cx="1097280" cy="219456"/>
-            </a:xfrm>
-          </p:grpSpPr>
-          <p:sp>
-            <p:nvSpPr>
-              <p:cNvPr id="29" name="Shape 34">
-                <a:extLst>
-                  <a:ext uri="{FF2B5EF4-FFF2-40B4-BE49-F238E27FC236}">
-                    <a16:creationId xmlns:a16="http://schemas.microsoft.com/office/drawing/2014/main" id="{19616CE9-95FA-C2C1-75FD-12B9CF80C592}"/>
-                  </a:ext>
-                </a:extLst>
-              </p:cNvPr>
-              <p:cNvSpPr/>
-              <p:nvPr/>
-            </p:nvSpPr>
-            <p:spPr>
-              <a:xfrm>
-                <a:off x="6949440" y="4451935"/>
-                <a:ext cx="1097280" cy="219456"/>
-              </a:xfrm>
-              <a:prstGeom prst="roundRect">
-                <a:avLst>
-                  <a:gd name="adj" fmla="val 16667"/>
-                </a:avLst>
-              </a:prstGeom>
-              <a:solidFill>
-                <a:srgbClr val="1F7A47"/>
-              </a:solidFill>
-              <a:ln/>
-            </p:spPr>
-            <p:txBody>
-              <a:bodyPr/>
-              <a:lstStyle/>
-              <a:p>
-                <a:endParaRPr lang="en-US"/>
-              </a:p>
-            </p:txBody>
-          </p:sp>
-          <p:sp>
-            <p:nvSpPr>
-              <p:cNvPr id="30" name="Text 35">
-                <a:extLst>
-                  <a:ext uri="{FF2B5EF4-FFF2-40B4-BE49-F238E27FC236}">
-                    <a16:creationId xmlns:a16="http://schemas.microsoft.com/office/drawing/2014/main" id="{61A13DA3-49FB-E6A9-08D9-38049CE84214}"/>
-                  </a:ext>
-                </a:extLst>
-              </p:cNvPr>
-              <p:cNvSpPr/>
-              <p:nvPr/>
-            </p:nvSpPr>
-            <p:spPr>
-              <a:xfrm>
-                <a:off x="6949440" y="4451935"/>
-                <a:ext cx="1097280" cy="219456"/>
-              </a:xfrm>
-              <a:prstGeom prst="rect">
-                <a:avLst/>
-              </a:prstGeom>
-              <a:noFill/>
-              <a:ln/>
-            </p:spPr>
-            <p:txBody>
-              <a:bodyPr wrap="square" rtlCol="0" anchor="ctr"/>
-              <a:lstStyle/>
-              <a:p>
-                <a:pPr marL="0" indent="0" algn="ctr">
-                  <a:buNone/>
-                </a:pPr>
-                <a:r>
-                  <a:rPr lang="en-US" sz="850" b="1" dirty="0">
-                    <a:solidFill>
-                      <a:srgbClr val="FFFFFF"/>
-                    </a:solidFill>
-                    <a:latin typeface="Calibri" pitchFamily="34" charset="0"/>
-                    <a:ea typeface="Calibri" pitchFamily="34" charset="-122"/>
-                    <a:cs typeface="Calibri" pitchFamily="34" charset="-120"/>
-                  </a:rPr>
-                  <a:t>Collateral</a:t>
-                </a:r>
-                <a:endParaRPr lang="en-US" sz="850" dirty="0"/>
-              </a:p>
-            </p:txBody>
-          </p:sp>
-        </p:grpSp>
-        <p:grpSp>
-          <p:nvGrpSpPr>
-            <p:cNvPr id="35" name="Group 34">
-              <a:extLst>
-                <a:ext uri="{FF2B5EF4-FFF2-40B4-BE49-F238E27FC236}">
-                  <a16:creationId xmlns:a16="http://schemas.microsoft.com/office/drawing/2014/main" id="{ADA4D6FA-882C-2329-0C73-CD534C802B37}"/>
-                </a:ext>
-              </a:extLst>
-            </p:cNvPr>
-            <p:cNvGrpSpPr/>
-            <p:nvPr/>
-          </p:nvGrpSpPr>
-          <p:grpSpPr>
-            <a:xfrm>
-              <a:off x="9486900" y="4902326"/>
-              <a:ext cx="1097280" cy="219456"/>
-              <a:chOff x="8183880" y="4451935"/>
-              <a:chExt cx="1097280" cy="219456"/>
-            </a:xfrm>
-          </p:grpSpPr>
-          <p:sp>
-            <p:nvSpPr>
-              <p:cNvPr id="31" name="Shape 36">
-                <a:extLst>
-                  <a:ext uri="{FF2B5EF4-FFF2-40B4-BE49-F238E27FC236}">
-                    <a16:creationId xmlns:a16="http://schemas.microsoft.com/office/drawing/2014/main" id="{2720AC3E-387F-C87F-8833-BAF6B8465E81}"/>
-                  </a:ext>
-                </a:extLst>
-              </p:cNvPr>
-              <p:cNvSpPr/>
-              <p:nvPr/>
-            </p:nvSpPr>
-            <p:spPr>
-              <a:xfrm>
-                <a:off x="8183880" y="4451935"/>
-                <a:ext cx="1097280" cy="219456"/>
-              </a:xfrm>
-              <a:prstGeom prst="roundRect">
-                <a:avLst>
-                  <a:gd name="adj" fmla="val 16667"/>
-                </a:avLst>
-              </a:prstGeom>
-              <a:solidFill>
-                <a:srgbClr val="1F7A47"/>
-              </a:solidFill>
-              <a:ln/>
-            </p:spPr>
-            <p:txBody>
-              <a:bodyPr/>
-              <a:lstStyle/>
-              <a:p>
-                <a:endParaRPr lang="en-US"/>
-              </a:p>
-            </p:txBody>
-          </p:sp>
-          <p:sp>
-            <p:nvSpPr>
-              <p:cNvPr id="32" name="Text 37">
-                <a:extLst>
-                  <a:ext uri="{FF2B5EF4-FFF2-40B4-BE49-F238E27FC236}">
-                    <a16:creationId xmlns:a16="http://schemas.microsoft.com/office/drawing/2014/main" id="{0CFC9E5D-F316-5175-FF06-2F410ABEED19}"/>
-                  </a:ext>
-                </a:extLst>
-              </p:cNvPr>
-              <p:cNvSpPr/>
-              <p:nvPr/>
-            </p:nvSpPr>
-            <p:spPr>
-              <a:xfrm>
-                <a:off x="8183880" y="4451935"/>
-                <a:ext cx="1097280" cy="219456"/>
-              </a:xfrm>
-              <a:prstGeom prst="rect">
-                <a:avLst/>
-              </a:prstGeom>
-              <a:noFill/>
-              <a:ln/>
-            </p:spPr>
-            <p:txBody>
-              <a:bodyPr wrap="square" rtlCol="0" anchor="ctr"/>
-              <a:lstStyle/>
-              <a:p>
-                <a:pPr marL="0" indent="0" algn="ctr">
-                  <a:buNone/>
-                </a:pPr>
-                <a:r>
-                  <a:rPr lang="en-US" sz="850" b="1" dirty="0">
-                    <a:solidFill>
-                      <a:srgbClr val="FFFFFF"/>
-                    </a:solidFill>
-                    <a:latin typeface="Calibri" pitchFamily="34" charset="0"/>
-                    <a:ea typeface="Calibri" pitchFamily="34" charset="-122"/>
-                    <a:cs typeface="Calibri" pitchFamily="34" charset="-120"/>
-                  </a:rPr>
-                  <a:t>Party</a:t>
-                </a:r>
-                <a:endParaRPr lang="en-US" sz="850" dirty="0"/>
-              </a:p>
-            </p:txBody>
-          </p:sp>
-        </p:grpSp>
-        <p:sp>
-          <p:nvSpPr>
-            <p:cNvPr id="38" name="TextBox 37">
-              <a:extLst>
-                <a:ext uri="{FF2B5EF4-FFF2-40B4-BE49-F238E27FC236}">
-                  <a16:creationId xmlns:a16="http://schemas.microsoft.com/office/drawing/2014/main" id="{099D4637-2615-6CAD-A5BD-3C8B567E9A77}"/>
-                </a:ext>
-              </a:extLst>
-            </p:cNvPr>
-            <p:cNvSpPr txBox="1"/>
-            <p:nvPr/>
-          </p:nvSpPr>
-          <p:spPr>
-            <a:xfrm>
-              <a:off x="9301655" y="3831021"/>
-              <a:ext cx="1669688" cy="276999"/>
-            </a:xfrm>
-            <a:prstGeom prst="rect">
-              <a:avLst/>
-            </a:prstGeom>
-            <a:noFill/>
-          </p:spPr>
-          <p:txBody>
-            <a:bodyPr wrap="none" rtlCol="0">
-              <a:spAutoFit/>
-            </a:bodyPr>
-            <a:lstStyle/>
-            <a:p>
-              <a:r>
-                <a:rPr lang="en-US" sz="1200" dirty="0"/>
-                <a:t>Data Domains/Products</a:t>
-              </a:r>
-            </a:p>
-          </p:txBody>
-        </p:sp>
-      </p:grpSp>
-      <p:sp>
-        <p:nvSpPr>
-          <p:cNvPr id="40" name="TextBox 39">
-            <a:extLst>
-              <a:ext uri="{FF2B5EF4-FFF2-40B4-BE49-F238E27FC236}">
-                <a16:creationId xmlns:a16="http://schemas.microsoft.com/office/drawing/2014/main" id="{E0AC9A00-88FB-62BF-31DC-1C97D0B06DC1}"/>
-              </a:ext>
-            </a:extLst>
-          </p:cNvPr>
-          <p:cNvSpPr txBox="1"/>
-          <p:nvPr/>
-        </p:nvSpPr>
-        <p:spPr>
-          <a:xfrm>
-            <a:off x="2944069" y="2866694"/>
-            <a:ext cx="1316386" cy="584775"/>
-          </a:xfrm>
-          <a:prstGeom prst="rect">
-            <a:avLst/>
-          </a:prstGeom>
-          <a:noFill/>
-        </p:spPr>
-        <p:txBody>
-          <a:bodyPr wrap="none" rtlCol="0">
-            <a:spAutoFit/>
-          </a:bodyPr>
-          <a:lstStyle/>
-          <a:p>
-            <a:r>
-              <a:rPr lang="en-US" sz="1200" dirty="0"/>
-              <a:t>Ontology</a:t>
-            </a:r>
-          </a:p>
-          <a:p>
-            <a:pPr marL="171450" indent="-171450">
-              <a:buFont typeface="Arial" panose="020B0604020202020204" pitchFamily="34" charset="0"/>
-              <a:buChar char="•"/>
-            </a:pPr>
-            <a:r>
-              <a:rPr lang="en-US" sz="1000" dirty="0"/>
-              <a:t>Business Concepts</a:t>
-            </a:r>
-          </a:p>
-          <a:p>
-            <a:pPr marL="171450" indent="-171450">
-              <a:buFont typeface="Arial" panose="020B0604020202020204" pitchFamily="34" charset="0"/>
-              <a:buChar char="•"/>
-            </a:pPr>
-            <a:r>
-              <a:rPr lang="en-US" sz="1000" dirty="0"/>
-              <a:t>Data model</a:t>
-            </a:r>
-          </a:p>
-        </p:txBody>
-      </p:sp>
-      <p:sp>
-        <p:nvSpPr>
-          <p:cNvPr id="43" name="TextBox 42">
-            <a:extLst>
-              <a:ext uri="{FF2B5EF4-FFF2-40B4-BE49-F238E27FC236}">
-                <a16:creationId xmlns:a16="http://schemas.microsoft.com/office/drawing/2014/main" id="{A768CA44-9E00-E07F-0519-E53E7987AA05}"/>
-              </a:ext>
-            </a:extLst>
-          </p:cNvPr>
-          <p:cNvSpPr txBox="1"/>
-          <p:nvPr/>
-        </p:nvSpPr>
-        <p:spPr>
-          <a:xfrm>
-            <a:off x="4843815" y="1595320"/>
-            <a:ext cx="627095" cy="707886"/>
-          </a:xfrm>
-          <a:prstGeom prst="rect">
-            <a:avLst/>
-          </a:prstGeom>
-          <a:noFill/>
-        </p:spPr>
-        <p:txBody>
-          <a:bodyPr wrap="none" rtlCol="0">
-            <a:spAutoFit/>
-          </a:bodyPr>
-          <a:lstStyle/>
-          <a:p>
-            <a:r>
-              <a:rPr lang="en-US" sz="1000" dirty="0"/>
-              <a:t>XVALA</a:t>
-            </a:r>
-          </a:p>
-          <a:p>
-            <a:r>
-              <a:rPr lang="en-US" sz="1000" dirty="0"/>
-              <a:t>SCREAM</a:t>
-            </a:r>
-          </a:p>
-          <a:p>
-            <a:r>
-              <a:rPr lang="en-US" sz="1000" dirty="0"/>
-              <a:t>CMOS</a:t>
-            </a:r>
-          </a:p>
-          <a:p>
-            <a:r>
-              <a:rPr lang="en-US" sz="1000" dirty="0"/>
-              <a:t>RCAPS</a:t>
-            </a:r>
-          </a:p>
-        </p:txBody>
-      </p:sp>
-      <p:sp>
-        <p:nvSpPr>
-          <p:cNvPr id="44" name="TextBox 43">
-            <a:extLst>
-              <a:ext uri="{FF2B5EF4-FFF2-40B4-BE49-F238E27FC236}">
-                <a16:creationId xmlns:a16="http://schemas.microsoft.com/office/drawing/2014/main" id="{F4FEC97C-0545-C7ED-F415-E05DB69BD506}"/>
-              </a:ext>
-            </a:extLst>
-          </p:cNvPr>
-          <p:cNvSpPr txBox="1"/>
-          <p:nvPr/>
-        </p:nvSpPr>
-        <p:spPr>
-          <a:xfrm>
-            <a:off x="4660015" y="944023"/>
-            <a:ext cx="1698863" cy="276999"/>
-          </a:xfrm>
-          <a:prstGeom prst="rect">
-            <a:avLst/>
-          </a:prstGeom>
-          <a:noFill/>
-        </p:spPr>
-        <p:txBody>
-          <a:bodyPr wrap="none" rtlCol="0">
-            <a:spAutoFit/>
-          </a:bodyPr>
-          <a:lstStyle/>
-          <a:p>
-            <a:r>
-              <a:rPr lang="en-US" sz="1200" dirty="0"/>
-              <a:t>Application Architecture</a:t>
-            </a:r>
-          </a:p>
-        </p:txBody>
-      </p:sp>
-      <p:sp>
-        <p:nvSpPr>
-          <p:cNvPr id="52" name="TextBox 51">
-            <a:extLst>
-              <a:ext uri="{FF2B5EF4-FFF2-40B4-BE49-F238E27FC236}">
-                <a16:creationId xmlns:a16="http://schemas.microsoft.com/office/drawing/2014/main" id="{DCD0DF6D-ABD3-1EC0-C63F-A282EB915C7F}"/>
-              </a:ext>
-            </a:extLst>
-          </p:cNvPr>
-          <p:cNvSpPr txBox="1"/>
-          <p:nvPr/>
-        </p:nvSpPr>
-        <p:spPr>
-          <a:xfrm>
-            <a:off x="4711214" y="1321261"/>
-            <a:ext cx="780214" cy="276999"/>
-          </a:xfrm>
-          <a:prstGeom prst="rect">
-            <a:avLst/>
-          </a:prstGeom>
-          <a:noFill/>
-        </p:spPr>
-        <p:txBody>
-          <a:bodyPr wrap="none" rtlCol="0">
-            <a:spAutoFit/>
-          </a:bodyPr>
-          <a:lstStyle/>
-          <a:p>
-            <a:r>
-              <a:rPr lang="en-US" sz="1200" dirty="0"/>
-              <a:t>Risk Apps</a:t>
-            </a:r>
-          </a:p>
-        </p:txBody>
-      </p:sp>
-      <p:grpSp>
-        <p:nvGrpSpPr>
-          <p:cNvPr id="56" name="Group 55">
-            <a:extLst>
-              <a:ext uri="{FF2B5EF4-FFF2-40B4-BE49-F238E27FC236}">
-                <a16:creationId xmlns:a16="http://schemas.microsoft.com/office/drawing/2014/main" id="{83BBC099-3388-7F5F-7659-542523D06768}"/>
-              </a:ext>
-            </a:extLst>
-          </p:cNvPr>
-          <p:cNvGrpSpPr/>
-          <p:nvPr/>
-        </p:nvGrpSpPr>
-        <p:grpSpPr>
-          <a:xfrm>
-            <a:off x="4815317" y="2563210"/>
-            <a:ext cx="1436396" cy="717036"/>
-            <a:chOff x="4804397" y="2431194"/>
-            <a:chExt cx="1436396" cy="717036"/>
-          </a:xfrm>
-        </p:grpSpPr>
-        <p:sp>
-          <p:nvSpPr>
-            <p:cNvPr id="53" name="Shape 2">
-              <a:extLst>
-                <a:ext uri="{FF2B5EF4-FFF2-40B4-BE49-F238E27FC236}">
-                  <a16:creationId xmlns:a16="http://schemas.microsoft.com/office/drawing/2014/main" id="{C973E35A-6EEE-E203-6FEC-C8C09F7B1AB8}"/>
+                  <a16:creationId xmlns:a16="http://schemas.microsoft.com/office/drawing/2014/main" id="{8F2AD3A9-EC60-5480-B94A-AD3D1B70449C}"/>
                 </a:ext>
               </a:extLst>
             </p:cNvPr>
@@ -5953,7 +5130,7 @@
           </p:nvSpPr>
           <p:spPr>
             <a:xfrm>
-              <a:off x="4804397" y="2431194"/>
+              <a:off x="4815317" y="1586170"/>
               <a:ext cx="1436396" cy="717036"/>
             </a:xfrm>
             <a:prstGeom prst="roundRect">
@@ -5981,10 +5158,10 @@
         </p:sp>
         <p:sp>
           <p:nvSpPr>
-            <p:cNvPr id="54" name="TextBox 53">
+            <p:cNvPr id="43" name="TextBox 42">
               <a:extLst>
                 <a:ext uri="{FF2B5EF4-FFF2-40B4-BE49-F238E27FC236}">
-                  <a16:creationId xmlns:a16="http://schemas.microsoft.com/office/drawing/2014/main" id="{01B427AD-0DF1-4533-EB68-EE48A4772BDC}"/>
+                  <a16:creationId xmlns:a16="http://schemas.microsoft.com/office/drawing/2014/main" id="{E469DB44-96F1-3A06-94F3-A0E69CEDCBE9}"/>
                 </a:ext>
               </a:extLst>
             </p:cNvPr>
@@ -5993,8 +5170,8 @@
           </p:nvSpPr>
           <p:spPr>
             <a:xfrm>
-              <a:off x="4878020" y="2481998"/>
-              <a:ext cx="585417" cy="553998"/>
+              <a:off x="4843815" y="1595320"/>
+              <a:ext cx="627095" cy="707886"/>
             </a:xfrm>
             <a:prstGeom prst="rect">
               <a:avLst/>
@@ -6009,129 +5186,35 @@
             <a:p>
               <a:r>
                 <a:rPr lang="en-US" sz="1000" dirty="0"/>
-                <a:t>Murex</a:t>
+                <a:t>XVALA</a:t>
               </a:r>
             </a:p>
             <a:p>
               <a:r>
                 <a:rPr lang="en-US" sz="1000" dirty="0"/>
-                <a:t>Calypso</a:t>
+                <a:t>SCREAM</a:t>
               </a:r>
             </a:p>
             <a:p>
               <a:r>
-                <a:rPr lang="en-US" sz="1000" dirty="0" err="1"/>
-                <a:t>Sophis</a:t>
+                <a:rPr lang="en-US" sz="1000" dirty="0"/>
+                <a:t>CMOS</a:t>
               </a:r>
-              <a:endParaRPr lang="en-US" sz="1000" dirty="0"/>
             </a:p>
-          </p:txBody>
-        </p:sp>
-      </p:grpSp>
-      <p:sp>
-        <p:nvSpPr>
-          <p:cNvPr id="55" name="TextBox 54">
-            <a:extLst>
-              <a:ext uri="{FF2B5EF4-FFF2-40B4-BE49-F238E27FC236}">
-                <a16:creationId xmlns:a16="http://schemas.microsoft.com/office/drawing/2014/main" id="{A407E30F-591F-399F-D880-8D621F1BA16C}"/>
-              </a:ext>
-            </a:extLst>
-          </p:cNvPr>
-          <p:cNvSpPr txBox="1"/>
-          <p:nvPr/>
-        </p:nvSpPr>
-        <p:spPr>
-          <a:xfrm>
-            <a:off x="4723704" y="2316978"/>
-            <a:ext cx="1070486" cy="276999"/>
-          </a:xfrm>
-          <a:prstGeom prst="rect">
-            <a:avLst/>
-          </a:prstGeom>
-          <a:noFill/>
-        </p:spPr>
-        <p:txBody>
-          <a:bodyPr wrap="none" rtlCol="0">
-            <a:spAutoFit/>
-          </a:bodyPr>
-          <a:lstStyle/>
-          <a:p>
-            <a:r>
-              <a:rPr lang="en-US" sz="1200" dirty="0"/>
-              <a:t>Portfolio Apps</a:t>
-            </a:r>
-          </a:p>
-        </p:txBody>
-      </p:sp>
-      <p:grpSp>
-        <p:nvGrpSpPr>
-          <p:cNvPr id="57" name="Group 56">
-            <a:extLst>
-              <a:ext uri="{FF2B5EF4-FFF2-40B4-BE49-F238E27FC236}">
-                <a16:creationId xmlns:a16="http://schemas.microsoft.com/office/drawing/2014/main" id="{D69B8D14-C031-F9DF-49BD-91ADDDCD20AC}"/>
-              </a:ext>
-            </a:extLst>
-          </p:cNvPr>
-          <p:cNvGrpSpPr/>
-          <p:nvPr/>
-        </p:nvGrpSpPr>
-        <p:grpSpPr>
-          <a:xfrm>
-            <a:off x="3412719" y="3429000"/>
-            <a:ext cx="2867492" cy="1507387"/>
-            <a:chOff x="4878020" y="1220832"/>
-            <a:chExt cx="2867492" cy="1507387"/>
-          </a:xfrm>
-        </p:grpSpPr>
-        <p:sp>
-          <p:nvSpPr>
-            <p:cNvPr id="58" name="Shape 2">
-              <a:extLst>
-                <a:ext uri="{FF2B5EF4-FFF2-40B4-BE49-F238E27FC236}">
-                  <a16:creationId xmlns:a16="http://schemas.microsoft.com/office/drawing/2014/main" id="{3663C2E1-6BE8-05AC-FDA8-B71F33AE82DE}"/>
-                </a:ext>
-              </a:extLst>
-            </p:cNvPr>
-            <p:cNvSpPr/>
-            <p:nvPr/>
-          </p:nvSpPr>
-          <p:spPr>
-            <a:xfrm>
-              <a:off x="6309116" y="1220832"/>
-              <a:ext cx="1436396" cy="420011"/>
-            </a:xfrm>
-            <a:prstGeom prst="roundRect">
-              <a:avLst>
-                <a:gd name="adj" fmla="val 1087"/>
-              </a:avLst>
-            </a:prstGeom>
-            <a:solidFill>
-              <a:srgbClr val="FBFDFB"/>
-            </a:solidFill>
-            <a:ln w="15240">
-              <a:solidFill>
-                <a:srgbClr val="1F7A47"/>
-              </a:solidFill>
-              <a:prstDash val="solid"/>
-            </a:ln>
-          </p:spPr>
-          <p:txBody>
-            <a:bodyPr/>
-            <a:lstStyle/>
             <a:p>
               <a:r>
                 <a:rPr lang="en-US" sz="1000" dirty="0"/>
-                <a:t>Other Apps</a:t>
+                <a:t>RCAPS</a:t>
               </a:r>
             </a:p>
           </p:txBody>
         </p:sp>
         <p:sp>
           <p:nvSpPr>
-            <p:cNvPr id="59" name="TextBox 58">
+            <p:cNvPr id="44" name="TextBox 43">
               <a:extLst>
                 <a:ext uri="{FF2B5EF4-FFF2-40B4-BE49-F238E27FC236}">
-                  <a16:creationId xmlns:a16="http://schemas.microsoft.com/office/drawing/2014/main" id="{FA52503B-F938-7807-46B6-596542596208}"/>
+                  <a16:creationId xmlns:a16="http://schemas.microsoft.com/office/drawing/2014/main" id="{5D3C057B-4C76-0674-A0B9-5FE51D803603}"/>
                 </a:ext>
               </a:extLst>
             </p:cNvPr>
@@ -6140,263 +5223,8 @@
           </p:nvSpPr>
           <p:spPr>
             <a:xfrm>
-              <a:off x="4878020" y="2481998"/>
-              <a:ext cx="184731" cy="246221"/>
-            </a:xfrm>
-            <a:prstGeom prst="rect">
-              <a:avLst/>
-            </a:prstGeom>
-            <a:noFill/>
-          </p:spPr>
-          <p:txBody>
-            <a:bodyPr wrap="none" rtlCol="0">
-              <a:spAutoFit/>
-            </a:bodyPr>
-            <a:lstStyle/>
-            <a:p>
-              <a:endParaRPr lang="en-US" sz="1000" dirty="0"/>
-            </a:p>
-          </p:txBody>
-        </p:sp>
-      </p:grpSp>
-      <p:grpSp>
-        <p:nvGrpSpPr>
-          <p:cNvPr id="24" name="Group 23">
-            <a:extLst>
-              <a:ext uri="{FF2B5EF4-FFF2-40B4-BE49-F238E27FC236}">
-                <a16:creationId xmlns:a16="http://schemas.microsoft.com/office/drawing/2014/main" id="{54627B5D-430B-54DE-A897-C1612E33BE3F}"/>
-              </a:ext>
-            </a:extLst>
-          </p:cNvPr>
-          <p:cNvGrpSpPr/>
-          <p:nvPr/>
-        </p:nvGrpSpPr>
-        <p:grpSpPr>
-          <a:xfrm>
-            <a:off x="6605592" y="1269986"/>
-            <a:ext cx="1727213" cy="1846729"/>
-            <a:chOff x="6656204" y="1626498"/>
-            <a:chExt cx="1727213" cy="1846729"/>
-          </a:xfrm>
-        </p:grpSpPr>
-        <p:sp>
-          <p:nvSpPr>
-            <p:cNvPr id="5" name="Shape 2">
-              <a:extLst>
-                <a:ext uri="{FF2B5EF4-FFF2-40B4-BE49-F238E27FC236}">
-                  <a16:creationId xmlns:a16="http://schemas.microsoft.com/office/drawing/2014/main" id="{83961BB5-98CF-37A3-B5D9-A67138AFB29D}"/>
-                </a:ext>
-              </a:extLst>
-            </p:cNvPr>
-            <p:cNvSpPr/>
-            <p:nvPr/>
-          </p:nvSpPr>
-          <p:spPr>
-            <a:xfrm>
-              <a:off x="6742227" y="2186010"/>
-              <a:ext cx="1641190" cy="1287217"/>
-            </a:xfrm>
-            <a:prstGeom prst="roundRect">
-              <a:avLst>
-                <a:gd name="adj" fmla="val 1087"/>
-              </a:avLst>
-            </a:prstGeom>
-            <a:solidFill>
-              <a:srgbClr val="FBFDFB"/>
-            </a:solidFill>
-            <a:ln w="15240">
-              <a:solidFill>
-                <a:srgbClr val="1F7A47"/>
-              </a:solidFill>
-              <a:prstDash val="solid"/>
-            </a:ln>
-          </p:spPr>
-          <p:txBody>
-            <a:bodyPr/>
-            <a:lstStyle/>
-            <a:p>
-              <a:pPr marL="171450" indent="-171450">
-                <a:lnSpc>
-                  <a:spcPts val="850"/>
-                </a:lnSpc>
-                <a:buSzPct val="100000"/>
-                <a:buFont typeface="Arial" panose="020B0604020202020204" pitchFamily="34" charset="0"/>
-                <a:buChar char="•"/>
-              </a:pPr>
-              <a:r>
-                <a:rPr lang="en-US" sz="1000" dirty="0">
-                  <a:solidFill>
-                    <a:srgbClr val="1C2830"/>
-                  </a:solidFill>
-                  <a:latin typeface="Calibri" pitchFamily="34" charset="0"/>
-                  <a:ea typeface="Calibri" pitchFamily="34" charset="-122"/>
-                  <a:cs typeface="Calibri" pitchFamily="34" charset="-120"/>
-                </a:rPr>
-                <a:t>Discover Data</a:t>
-              </a:r>
-              <a:endParaRPr lang="en-US" sz="1000" dirty="0"/>
-            </a:p>
-            <a:p>
-              <a:pPr marL="171450" indent="-171450">
-                <a:lnSpc>
-                  <a:spcPts val="850"/>
-                </a:lnSpc>
-                <a:buSzPct val="100000"/>
-                <a:buFont typeface="Arial" panose="020B0604020202020204" pitchFamily="34" charset="0"/>
-                <a:buChar char="•"/>
-              </a:pPr>
-              <a:r>
-                <a:rPr lang="en-US" sz="1000" dirty="0">
-                  <a:solidFill>
-                    <a:srgbClr val="1C2830"/>
-                  </a:solidFill>
-                  <a:latin typeface="Calibri" pitchFamily="34" charset="0"/>
-                  <a:ea typeface="Calibri" pitchFamily="34" charset="-122"/>
-                  <a:cs typeface="Calibri" pitchFamily="34" charset="-120"/>
-                </a:rPr>
-                <a:t>Explore Data</a:t>
-              </a:r>
-              <a:endParaRPr lang="en-US" sz="1000" dirty="0"/>
-            </a:p>
-            <a:p>
-              <a:pPr marL="171450" indent="-171450">
-                <a:lnSpc>
-                  <a:spcPts val="850"/>
-                </a:lnSpc>
-                <a:buSzPct val="100000"/>
-                <a:buFont typeface="Arial" panose="020B0604020202020204" pitchFamily="34" charset="0"/>
-                <a:buChar char="•"/>
-              </a:pPr>
-              <a:r>
-                <a:rPr lang="en-US" sz="1000" dirty="0">
-                  <a:solidFill>
-                    <a:srgbClr val="1C2830"/>
-                  </a:solidFill>
-                  <a:latin typeface="Calibri" pitchFamily="34" charset="0"/>
-                  <a:ea typeface="Calibri" pitchFamily="34" charset="-122"/>
-                  <a:cs typeface="Calibri" pitchFamily="34" charset="-120"/>
-                </a:rPr>
-                <a:t>Query</a:t>
-              </a:r>
-              <a:endParaRPr lang="en-US" sz="1000" dirty="0"/>
-            </a:p>
-            <a:p>
-              <a:pPr marL="171450" indent="-171450">
-                <a:lnSpc>
-                  <a:spcPts val="850"/>
-                </a:lnSpc>
-                <a:buSzPct val="100000"/>
-                <a:buFont typeface="Arial" panose="020B0604020202020204" pitchFamily="34" charset="0"/>
-                <a:buChar char="•"/>
-              </a:pPr>
-              <a:r>
-                <a:rPr lang="en-US" sz="1000" dirty="0">
-                  <a:solidFill>
-                    <a:srgbClr val="1C2830"/>
-                  </a:solidFill>
-                  <a:latin typeface="Calibri" pitchFamily="34" charset="0"/>
-                  <a:ea typeface="Calibri" pitchFamily="34" charset="-122"/>
-                  <a:cs typeface="Calibri" pitchFamily="34" charset="-120"/>
-                </a:rPr>
-                <a:t>Run / Execute</a:t>
-              </a:r>
-              <a:endParaRPr lang="en-US" sz="1000" dirty="0"/>
-            </a:p>
-            <a:p>
-              <a:pPr marL="171450" indent="-171450">
-                <a:lnSpc>
-                  <a:spcPts val="850"/>
-                </a:lnSpc>
-                <a:buSzPct val="100000"/>
-                <a:buFont typeface="Arial" panose="020B0604020202020204" pitchFamily="34" charset="0"/>
-                <a:buChar char="•"/>
-              </a:pPr>
-              <a:r>
-                <a:rPr lang="en-US" sz="1000" dirty="0">
-                  <a:solidFill>
-                    <a:srgbClr val="1C2830"/>
-                  </a:solidFill>
-                  <a:latin typeface="Calibri" pitchFamily="34" charset="0"/>
-                  <a:ea typeface="Calibri" pitchFamily="34" charset="-122"/>
-                  <a:cs typeface="Calibri" pitchFamily="34" charset="-120"/>
-                </a:rPr>
-                <a:t>Analytics</a:t>
-              </a:r>
-            </a:p>
-            <a:p>
-              <a:pPr>
-                <a:lnSpc>
-                  <a:spcPts val="850"/>
-                </a:lnSpc>
-                <a:buSzPct val="100000"/>
-              </a:pPr>
-              <a:endParaRPr lang="en-US" sz="800" dirty="0">
-                <a:solidFill>
-                  <a:srgbClr val="1C2830"/>
-                </a:solidFill>
-                <a:latin typeface="Calibri" pitchFamily="34" charset="0"/>
-                <a:cs typeface="Calibri" pitchFamily="34" charset="-120"/>
-              </a:endParaRPr>
-            </a:p>
-            <a:p>
-              <a:pPr marL="171450" indent="-171450">
-                <a:lnSpc>
-                  <a:spcPts val="850"/>
-                </a:lnSpc>
-                <a:buSzPct val="100000"/>
-                <a:buFont typeface="Arial" panose="020B0604020202020204" pitchFamily="34" charset="0"/>
-                <a:buChar char="•"/>
-              </a:pPr>
-              <a:r>
-                <a:rPr lang="en-US" sz="1000" dirty="0">
-                  <a:solidFill>
-                    <a:srgbClr val="1C2830"/>
-                  </a:solidFill>
-                  <a:latin typeface="Calibri" pitchFamily="34" charset="0"/>
-                  <a:cs typeface="Calibri" pitchFamily="34" charset="-120"/>
-                </a:rPr>
-                <a:t>ML</a:t>
-              </a:r>
-            </a:p>
-            <a:p>
-              <a:pPr marL="171450" indent="-171450">
-                <a:lnSpc>
-                  <a:spcPts val="850"/>
-                </a:lnSpc>
-                <a:buSzPct val="100000"/>
-                <a:buFont typeface="Arial" panose="020B0604020202020204" pitchFamily="34" charset="0"/>
-                <a:buChar char="•"/>
-              </a:pPr>
-              <a:r>
-                <a:rPr lang="en-US" sz="1000" dirty="0">
-                  <a:solidFill>
-                    <a:srgbClr val="1C2830"/>
-                  </a:solidFill>
-                  <a:latin typeface="Calibri" pitchFamily="34" charset="0"/>
-                  <a:cs typeface="Calibri" pitchFamily="34" charset="-120"/>
-                </a:rPr>
-                <a:t>AI</a:t>
-              </a:r>
-              <a:endParaRPr lang="en-US" sz="1000" dirty="0"/>
-            </a:p>
-          </p:txBody>
-        </p:sp>
-        <p:sp>
-          <p:nvSpPr>
-            <p:cNvPr id="20" name="TextBox 19">
-              <a:extLst>
-                <a:ext uri="{FF2B5EF4-FFF2-40B4-BE49-F238E27FC236}">
-                  <a16:creationId xmlns:a16="http://schemas.microsoft.com/office/drawing/2014/main" id="{523A8673-0B6F-7C07-CF53-A0A09038B220}"/>
-                </a:ext>
-              </a:extLst>
-            </p:cNvPr>
-            <p:cNvSpPr txBox="1"/>
-            <p:nvPr/>
-          </p:nvSpPr>
-          <p:spPr>
-            <a:xfrm>
-              <a:off x="6656204" y="1626498"/>
-              <a:ext cx="1286058" cy="461665"/>
+              <a:off x="4660015" y="944023"/>
+              <a:ext cx="1698863" cy="276999"/>
             </a:xfrm>
             <a:prstGeom prst="rect">
               <a:avLst/>
@@ -6411,24 +5239,272 @@
             <a:p>
               <a:r>
                 <a:rPr lang="en-US" sz="1200" dirty="0"/>
-                <a:t>Business Driver – </a:t>
+                <a:t>Application Architecture</a:t>
               </a:r>
             </a:p>
+          </p:txBody>
+        </p:sp>
+        <p:sp>
+          <p:nvSpPr>
+            <p:cNvPr id="52" name="TextBox 51">
+              <a:extLst>
+                <a:ext uri="{FF2B5EF4-FFF2-40B4-BE49-F238E27FC236}">
+                  <a16:creationId xmlns:a16="http://schemas.microsoft.com/office/drawing/2014/main" id="{4C0BA487-034B-52CA-BB44-6A7B0A151FDA}"/>
+                </a:ext>
+              </a:extLst>
+            </p:cNvPr>
+            <p:cNvSpPr txBox="1"/>
+            <p:nvPr/>
+          </p:nvSpPr>
+          <p:spPr>
+            <a:xfrm>
+              <a:off x="4711214" y="1321261"/>
+              <a:ext cx="780214" cy="276999"/>
+            </a:xfrm>
+            <a:prstGeom prst="rect">
+              <a:avLst/>
+            </a:prstGeom>
+            <a:noFill/>
+          </p:spPr>
+          <p:txBody>
+            <a:bodyPr wrap="none" rtlCol="0">
+              <a:spAutoFit/>
+            </a:bodyPr>
+            <a:lstStyle/>
             <a:p>
               <a:r>
                 <a:rPr lang="en-US" sz="1200" dirty="0"/>
-                <a:t>Consumption</a:t>
+                <a:t>Risk Apps</a:t>
+              </a:r>
+            </a:p>
+          </p:txBody>
+        </p:sp>
+        <p:grpSp>
+          <p:nvGrpSpPr>
+            <p:cNvPr id="56" name="Group 55">
+              <a:extLst>
+                <a:ext uri="{FF2B5EF4-FFF2-40B4-BE49-F238E27FC236}">
+                  <a16:creationId xmlns:a16="http://schemas.microsoft.com/office/drawing/2014/main" id="{D8729756-DDB7-3BAA-57C1-10D989A7A5AB}"/>
+                </a:ext>
+              </a:extLst>
+            </p:cNvPr>
+            <p:cNvGrpSpPr/>
+            <p:nvPr/>
+          </p:nvGrpSpPr>
+          <p:grpSpPr>
+            <a:xfrm>
+              <a:off x="4815317" y="2563210"/>
+              <a:ext cx="1436396" cy="717036"/>
+              <a:chOff x="4804397" y="2431194"/>
+              <a:chExt cx="1436396" cy="717036"/>
+            </a:xfrm>
+          </p:grpSpPr>
+          <p:sp>
+            <p:nvSpPr>
+              <p:cNvPr id="53" name="Shape 2">
+                <a:extLst>
+                  <a:ext uri="{FF2B5EF4-FFF2-40B4-BE49-F238E27FC236}">
+                    <a16:creationId xmlns:a16="http://schemas.microsoft.com/office/drawing/2014/main" id="{58781EC4-4832-255E-A883-CDEC55CE7A89}"/>
+                  </a:ext>
+                </a:extLst>
+              </p:cNvPr>
+              <p:cNvSpPr/>
+              <p:nvPr/>
+            </p:nvSpPr>
+            <p:spPr>
+              <a:xfrm>
+                <a:off x="4804397" y="2431194"/>
+                <a:ext cx="1436396" cy="717036"/>
+              </a:xfrm>
+              <a:prstGeom prst="roundRect">
+                <a:avLst>
+                  <a:gd name="adj" fmla="val 1087"/>
+                </a:avLst>
+              </a:prstGeom>
+              <a:solidFill>
+                <a:srgbClr val="FBFDFB"/>
+              </a:solidFill>
+              <a:ln w="15240">
+                <a:solidFill>
+                  <a:srgbClr val="1F7A47"/>
+                </a:solidFill>
+                <a:prstDash val="solid"/>
+              </a:ln>
+            </p:spPr>
+            <p:txBody>
+              <a:bodyPr/>
+              <a:lstStyle/>
+              <a:p>
+                <a:endParaRPr lang="en-US"/>
+              </a:p>
+            </p:txBody>
+          </p:sp>
+          <p:sp>
+            <p:nvSpPr>
+              <p:cNvPr id="54" name="TextBox 53">
+                <a:extLst>
+                  <a:ext uri="{FF2B5EF4-FFF2-40B4-BE49-F238E27FC236}">
+                    <a16:creationId xmlns:a16="http://schemas.microsoft.com/office/drawing/2014/main" id="{AE3DE2D4-1536-8CA9-899C-A26AC16D5ADE}"/>
+                  </a:ext>
+                </a:extLst>
+              </p:cNvPr>
+              <p:cNvSpPr txBox="1"/>
+              <p:nvPr/>
+            </p:nvSpPr>
+            <p:spPr>
+              <a:xfrm>
+                <a:off x="4878020" y="2481998"/>
+                <a:ext cx="585417" cy="553998"/>
+              </a:xfrm>
+              <a:prstGeom prst="rect">
+                <a:avLst/>
+              </a:prstGeom>
+              <a:noFill/>
+            </p:spPr>
+            <p:txBody>
+              <a:bodyPr wrap="none" rtlCol="0">
+                <a:spAutoFit/>
+              </a:bodyPr>
+              <a:lstStyle/>
+              <a:p>
+                <a:r>
+                  <a:rPr lang="en-US" sz="1000" dirty="0"/>
+                  <a:t>Murex</a:t>
+                </a:r>
+              </a:p>
+              <a:p>
+                <a:r>
+                  <a:rPr lang="en-US" sz="1000" dirty="0"/>
+                  <a:t>Calypso</a:t>
+                </a:r>
+              </a:p>
+              <a:p>
+                <a:r>
+                  <a:rPr lang="en-US" sz="1000" dirty="0" err="1"/>
+                  <a:t>Sophis</a:t>
+                </a:r>
+                <a:endParaRPr lang="en-US" sz="1000" dirty="0"/>
+              </a:p>
+            </p:txBody>
+          </p:sp>
+        </p:grpSp>
+        <p:sp>
+          <p:nvSpPr>
+            <p:cNvPr id="55" name="TextBox 54">
+              <a:extLst>
+                <a:ext uri="{FF2B5EF4-FFF2-40B4-BE49-F238E27FC236}">
+                  <a16:creationId xmlns:a16="http://schemas.microsoft.com/office/drawing/2014/main" id="{C731F57F-F6C1-EB55-4715-6AAE443DA7E9}"/>
+                </a:ext>
+              </a:extLst>
+            </p:cNvPr>
+            <p:cNvSpPr txBox="1"/>
+            <p:nvPr/>
+          </p:nvSpPr>
+          <p:spPr>
+            <a:xfrm>
+              <a:off x="4723704" y="2316978"/>
+              <a:ext cx="876522" cy="276999"/>
+            </a:xfrm>
+            <a:prstGeom prst="rect">
+              <a:avLst/>
+            </a:prstGeom>
+            <a:noFill/>
+          </p:spPr>
+          <p:txBody>
+            <a:bodyPr wrap="none" rtlCol="0">
+              <a:spAutoFit/>
+            </a:bodyPr>
+            <a:lstStyle/>
+            <a:p>
+              <a:r>
+                <a:rPr lang="en-US" sz="1200" dirty="0"/>
+                <a:t>Trade Apps</a:t>
               </a:r>
             </a:p>
           </p:txBody>
         </p:sp>
       </p:grpSp>
+      <p:sp>
+        <p:nvSpPr>
+          <p:cNvPr id="58" name="Shape 2">
+            <a:extLst>
+              <a:ext uri="{FF2B5EF4-FFF2-40B4-BE49-F238E27FC236}">
+                <a16:creationId xmlns:a16="http://schemas.microsoft.com/office/drawing/2014/main" id="{2B54A274-9F69-203F-3AAF-406314667AAF}"/>
+              </a:ext>
+            </a:extLst>
+          </p:cNvPr>
+          <p:cNvSpPr/>
+          <p:nvPr/>
+        </p:nvSpPr>
+        <p:spPr>
+          <a:xfrm>
+            <a:off x="6088491" y="3511123"/>
+            <a:ext cx="1452875" cy="420011"/>
+          </a:xfrm>
+          <a:prstGeom prst="roundRect">
+            <a:avLst>
+              <a:gd name="adj" fmla="val 1087"/>
+            </a:avLst>
+          </a:prstGeom>
+          <a:solidFill>
+            <a:srgbClr val="FBFDFB"/>
+          </a:solidFill>
+          <a:ln w="15240">
+            <a:solidFill>
+              <a:srgbClr val="1F7A47"/>
+            </a:solidFill>
+            <a:prstDash val="solid"/>
+          </a:ln>
+        </p:spPr>
+        <p:txBody>
+          <a:bodyPr anchor="ctr"/>
+          <a:lstStyle/>
+          <a:p>
+            <a:r>
+              <a:rPr lang="en-US" sz="1000" dirty="0"/>
+              <a:t>Other Apps</a:t>
+            </a:r>
+          </a:p>
+        </p:txBody>
+      </p:sp>
+      <p:sp>
+        <p:nvSpPr>
+          <p:cNvPr id="59" name="TextBox 58">
+            <a:extLst>
+              <a:ext uri="{FF2B5EF4-FFF2-40B4-BE49-F238E27FC236}">
+                <a16:creationId xmlns:a16="http://schemas.microsoft.com/office/drawing/2014/main" id="{72D5C1F8-90DE-CB51-8C76-E50CC8A9F875}"/>
+              </a:ext>
+            </a:extLst>
+          </p:cNvPr>
+          <p:cNvSpPr txBox="1"/>
+          <p:nvPr/>
+        </p:nvSpPr>
+        <p:spPr>
+          <a:xfrm>
+            <a:off x="3396633" y="4694649"/>
+            <a:ext cx="186850" cy="246221"/>
+          </a:xfrm>
+          <a:prstGeom prst="rect">
+            <a:avLst/>
+          </a:prstGeom>
+          <a:noFill/>
+        </p:spPr>
+        <p:txBody>
+          <a:bodyPr wrap="square" rtlCol="0">
+            <a:spAutoFit/>
+          </a:bodyPr>
+          <a:lstStyle/>
+          <a:p>
+            <a:endParaRPr lang="en-US" sz="1000" dirty="0"/>
+          </a:p>
+        </p:txBody>
+      </p:sp>
       <p:grpSp>
         <p:nvGrpSpPr>
           <p:cNvPr id="23" name="Group 22">
             <a:extLst>
               <a:ext uri="{FF2B5EF4-FFF2-40B4-BE49-F238E27FC236}">
-                <a16:creationId xmlns:a16="http://schemas.microsoft.com/office/drawing/2014/main" id="{093EDA9D-82E1-2B2B-DFCA-042DF8773CE4}"/>
+                <a16:creationId xmlns:a16="http://schemas.microsoft.com/office/drawing/2014/main" id="{51A8DB7D-A235-A1D6-F3D3-BBCBFF04A586}"/>
               </a:ext>
             </a:extLst>
           </p:cNvPr>
@@ -6438,9 +5514,9 @@
         <p:grpSpPr>
           <a:xfrm>
             <a:off x="8400178" y="1242816"/>
-            <a:ext cx="2279072" cy="2758805"/>
+            <a:ext cx="2279072" cy="3693571"/>
             <a:chOff x="2280961" y="4505500"/>
-            <a:chExt cx="2279072" cy="2758805"/>
+            <a:chExt cx="2279072" cy="3693571"/>
           </a:xfrm>
         </p:grpSpPr>
         <p:sp>
@@ -6448,7 +5524,7 @@
             <p:cNvPr id="51" name="Shape 2">
               <a:extLst>
                 <a:ext uri="{FF2B5EF4-FFF2-40B4-BE49-F238E27FC236}">
-                  <a16:creationId xmlns:a16="http://schemas.microsoft.com/office/drawing/2014/main" id="{DB892F01-C137-4CAB-DB01-AD789560BF3C}"/>
+                  <a16:creationId xmlns:a16="http://schemas.microsoft.com/office/drawing/2014/main" id="{F5FD95F2-5E25-970A-4C2E-6461746953FF}"/>
                 </a:ext>
               </a:extLst>
             </p:cNvPr>
@@ -6458,7 +5534,7 @@
           <p:spPr>
             <a:xfrm>
               <a:off x="2280961" y="4541965"/>
-              <a:ext cx="2250573" cy="2722340"/>
+              <a:ext cx="2250573" cy="3657106"/>
             </a:xfrm>
             <a:prstGeom prst="roundRect">
               <a:avLst>
@@ -6488,7 +5564,7 @@
             <p:cNvPr id="21" name="TextBox 20">
               <a:extLst>
                 <a:ext uri="{FF2B5EF4-FFF2-40B4-BE49-F238E27FC236}">
-                  <a16:creationId xmlns:a16="http://schemas.microsoft.com/office/drawing/2014/main" id="{772195AF-FDFD-B9B7-A64D-64A812091FDD}"/>
+                  <a16:creationId xmlns:a16="http://schemas.microsoft.com/office/drawing/2014/main" id="{5396B71E-8B3C-4365-C470-F3EE34609E5B}"/>
                 </a:ext>
               </a:extLst>
             </p:cNvPr>
@@ -6513,7 +5589,7 @@
             <a:p>
               <a:r>
                 <a:rPr lang="en-US" sz="1200" b="1" dirty="0"/>
-                <a:t>Technology</a:t>
+                <a:t>Data Ports</a:t>
               </a:r>
             </a:p>
             <a:p>
@@ -6548,7 +5624,7 @@
               </a:pPr>
               <a:r>
                 <a:rPr lang="en-US" sz="1000" dirty="0"/>
-                <a:t>SQL Ports</a:t>
+                <a:t>SQL</a:t>
               </a:r>
             </a:p>
             <a:p>
@@ -6601,7 +5677,7 @@
             <p:cNvPr id="22" name="TextBox 21">
               <a:extLst>
                 <a:ext uri="{FF2B5EF4-FFF2-40B4-BE49-F238E27FC236}">
-                  <a16:creationId xmlns:a16="http://schemas.microsoft.com/office/drawing/2014/main" id="{A5EF13B9-EAE6-2770-3F08-DC4E7F74D311}"/>
+                  <a16:creationId xmlns:a16="http://schemas.microsoft.com/office/drawing/2014/main" id="{E0C03901-EDBB-6799-3A09-633134BFE30A}"/>
                 </a:ext>
               </a:extLst>
             </p:cNvPr>
@@ -6668,7 +5744,7 @@
           <p:cNvPr id="41" name="TextBox 40">
             <a:extLst>
               <a:ext uri="{FF2B5EF4-FFF2-40B4-BE49-F238E27FC236}">
-                <a16:creationId xmlns:a16="http://schemas.microsoft.com/office/drawing/2014/main" id="{BE6AE606-530D-F1DD-C1D0-FE951B6FF773}"/>
+                <a16:creationId xmlns:a16="http://schemas.microsoft.com/office/drawing/2014/main" id="{569E8257-D22F-0BE6-B45B-F7A0E2AE640C}"/>
               </a:ext>
             </a:extLst>
           </p:cNvPr>
@@ -6677,8 +5753,8 @@
         </p:nvSpPr>
         <p:spPr>
           <a:xfrm>
-            <a:off x="7886613" y="913673"/>
-            <a:ext cx="1559401" cy="276999"/>
+            <a:off x="8852904" y="940314"/>
+            <a:ext cx="889154" cy="276999"/>
           </a:xfrm>
           <a:prstGeom prst="rect">
             <a:avLst/>
@@ -6693,46 +5769,8 @@
           <a:p>
             <a:r>
               <a:rPr lang="en-US" sz="1200" dirty="0"/>
-              <a:t>Technology / Platform</a:t>
-            </a:r>
-          </a:p>
-        </p:txBody>
-      </p:sp>
-      <p:sp>
-        <p:nvSpPr>
-          <p:cNvPr id="45" name="Shape 2">
-            <a:extLst>
-              <a:ext uri="{FF2B5EF4-FFF2-40B4-BE49-F238E27FC236}">
-                <a16:creationId xmlns:a16="http://schemas.microsoft.com/office/drawing/2014/main" id="{E90E8FDC-3838-4759-5304-580BCA2D4971}"/>
-              </a:ext>
-            </a:extLst>
-          </p:cNvPr>
-          <p:cNvSpPr/>
-          <p:nvPr/>
-        </p:nvSpPr>
-        <p:spPr>
-          <a:xfrm>
-            <a:off x="6642985" y="1261049"/>
-            <a:ext cx="4036265" cy="2774922"/>
-          </a:xfrm>
-          <a:prstGeom prst="roundRect">
-            <a:avLst>
-              <a:gd name="adj" fmla="val 1087"/>
-            </a:avLst>
-          </a:prstGeom>
-          <a:noFill/>
-          <a:ln w="9525">
-            <a:solidFill>
-              <a:srgbClr val="1F7A47"/>
-            </a:solidFill>
-            <a:prstDash val="solid"/>
-          </a:ln>
-        </p:spPr>
-        <p:txBody>
-          <a:bodyPr/>
-          <a:lstStyle/>
-          <a:p>
-            <a:endParaRPr lang="en-US"/>
+              <a:t>Technology</a:t>
+            </a:r>
           </a:p>
         </p:txBody>
       </p:sp>
@@ -6741,7 +5779,7 @@
           <p:cNvPr id="46" name="TextBox 45">
             <a:extLst>
               <a:ext uri="{FF2B5EF4-FFF2-40B4-BE49-F238E27FC236}">
-                <a16:creationId xmlns:a16="http://schemas.microsoft.com/office/drawing/2014/main" id="{C518762E-C399-C091-BF9D-6CD8CB57ACFF}"/>
+                <a16:creationId xmlns:a16="http://schemas.microsoft.com/office/drawing/2014/main" id="{3125EA5A-0FCF-95F5-454A-89788B7B1D35}"/>
               </a:ext>
             </a:extLst>
           </p:cNvPr>
@@ -6750,13 +5788,15 @@
         </p:nvSpPr>
         <p:spPr>
           <a:xfrm>
-            <a:off x="7642064" y="4197723"/>
-            <a:ext cx="1672702" cy="738664"/>
-          </a:xfrm>
-          <a:prstGeom prst="rect">
-            <a:avLst/>
-          </a:prstGeom>
-          <a:noFill/>
+            <a:off x="8508186" y="4052398"/>
+            <a:ext cx="1452642" cy="707886"/>
+          </a:xfrm>
+          <a:prstGeom prst="rect">
+            <a:avLst/>
+          </a:prstGeom>
+          <a:solidFill>
+            <a:srgbClr val="00B050"/>
+          </a:solidFill>
         </p:spPr>
         <p:txBody>
           <a:bodyPr wrap="none" rtlCol="0">
@@ -6765,8 +5805,20 @@
           <a:lstStyle/>
           <a:p>
             <a:r>
-              <a:rPr lang="en-US" sz="1200" dirty="0"/>
-              <a:t>Architecture Principles :</a:t>
+              <a:rPr lang="en-US" sz="1000" b="1" dirty="0">
+                <a:solidFill>
+                  <a:schemeClr val="bg1"/>
+                </a:solidFill>
+              </a:rPr>
+              <a:t>Architecture Principles</a:t>
+            </a:r>
+            <a:r>
+              <a:rPr lang="en-US" sz="1000" dirty="0">
+                <a:solidFill>
+                  <a:schemeClr val="bg1"/>
+                </a:solidFill>
+              </a:rPr>
+              <a:t> </a:t>
             </a:r>
           </a:p>
           <a:p>
@@ -6775,7 +5827,11 @@
               <a:buChar char="•"/>
             </a:pPr>
             <a:r>
-              <a:rPr lang="en-US" sz="1000" dirty="0"/>
+              <a:rPr lang="en-US" sz="1000" dirty="0">
+                <a:solidFill>
+                  <a:schemeClr val="bg1"/>
+                </a:solidFill>
+              </a:rPr>
               <a:t>Domain Driven</a:t>
             </a:r>
           </a:p>
@@ -6785,7 +5841,11 @@
               <a:buChar char="•"/>
             </a:pPr>
             <a:r>
-              <a:rPr lang="en-US" sz="1000" dirty="0"/>
+              <a:rPr lang="en-US" sz="1000" dirty="0">
+                <a:solidFill>
+                  <a:schemeClr val="bg1"/>
+                </a:solidFill>
+              </a:rPr>
               <a:t>Data Mesh</a:t>
             </a:r>
           </a:p>
@@ -6795,18 +5855,1332 @@
               <a:buChar char="•"/>
             </a:pPr>
             <a:r>
-              <a:rPr lang="en-US" sz="1000" dirty="0"/>
+              <a:rPr lang="en-US" sz="1000" dirty="0">
+                <a:solidFill>
+                  <a:schemeClr val="bg1"/>
+                </a:solidFill>
+              </a:rPr>
               <a:t>Data products</a:t>
             </a:r>
           </a:p>
         </p:txBody>
       </p:sp>
-      <p:sp>
-        <p:nvSpPr>
-          <p:cNvPr id="47" name="TextBox 46">
+      <p:grpSp>
+        <p:nvGrpSpPr>
+          <p:cNvPr id="66" name="Group 65">
             <a:extLst>
               <a:ext uri="{FF2B5EF4-FFF2-40B4-BE49-F238E27FC236}">
-                <a16:creationId xmlns:a16="http://schemas.microsoft.com/office/drawing/2014/main" id="{1BFF6D84-03F4-6120-6D09-2C9019609C27}"/>
+                <a16:creationId xmlns:a16="http://schemas.microsoft.com/office/drawing/2014/main" id="{A3024CE0-7C75-C276-E5EE-255F678FF199}"/>
+              </a:ext>
+            </a:extLst>
+          </p:cNvPr>
+          <p:cNvGrpSpPr/>
+          <p:nvPr/>
+        </p:nvGrpSpPr>
+        <p:grpSpPr>
+          <a:xfrm>
+            <a:off x="420084" y="3643250"/>
+            <a:ext cx="1906289" cy="297285"/>
+            <a:chOff x="1091500" y="5196820"/>
+            <a:chExt cx="1641190" cy="297285"/>
+          </a:xfrm>
+        </p:grpSpPr>
+        <p:sp>
+          <p:nvSpPr>
+            <p:cNvPr id="67" name="Shape 2">
+              <a:extLst>
+                <a:ext uri="{FF2B5EF4-FFF2-40B4-BE49-F238E27FC236}">
+                  <a16:creationId xmlns:a16="http://schemas.microsoft.com/office/drawing/2014/main" id="{40F607BA-1553-7D51-66CE-DD1DB0C14B20}"/>
+                </a:ext>
+              </a:extLst>
+            </p:cNvPr>
+            <p:cNvSpPr/>
+            <p:nvPr/>
+          </p:nvSpPr>
+          <p:spPr>
+            <a:xfrm>
+              <a:off x="1091500" y="5196820"/>
+              <a:ext cx="1641190" cy="297285"/>
+            </a:xfrm>
+            <a:prstGeom prst="roundRect">
+              <a:avLst>
+                <a:gd name="adj" fmla="val 1087"/>
+              </a:avLst>
+            </a:prstGeom>
+            <a:solidFill>
+              <a:srgbClr val="FBFDFB"/>
+            </a:solidFill>
+            <a:ln w="15240">
+              <a:solidFill>
+                <a:srgbClr val="1F7A47"/>
+              </a:solidFill>
+              <a:prstDash val="solid"/>
+            </a:ln>
+          </p:spPr>
+          <p:txBody>
+            <a:bodyPr/>
+            <a:lstStyle/>
+            <a:p>
+              <a:endParaRPr lang="en-US"/>
+            </a:p>
+          </p:txBody>
+        </p:sp>
+        <p:sp>
+          <p:nvSpPr>
+            <p:cNvPr id="68" name="TextBox 67">
+              <a:extLst>
+                <a:ext uri="{FF2B5EF4-FFF2-40B4-BE49-F238E27FC236}">
+                  <a16:creationId xmlns:a16="http://schemas.microsoft.com/office/drawing/2014/main" id="{3067D608-DB06-E1EB-4E13-ADFE596719FD}"/>
+                </a:ext>
+              </a:extLst>
+            </p:cNvPr>
+            <p:cNvSpPr txBox="1"/>
+            <p:nvPr/>
+          </p:nvSpPr>
+          <p:spPr>
+            <a:xfrm>
+              <a:off x="1235260" y="5217106"/>
+              <a:ext cx="1293853" cy="276999"/>
+            </a:xfrm>
+            <a:prstGeom prst="rect">
+              <a:avLst/>
+            </a:prstGeom>
+            <a:noFill/>
+          </p:spPr>
+          <p:txBody>
+            <a:bodyPr wrap="none" rtlCol="0">
+              <a:spAutoFit/>
+            </a:bodyPr>
+            <a:lstStyle>
+              <a:lvl1pPr>
+                <a:defRPr sz="1400"/>
+              </a:lvl1pPr>
+            </a:lstStyle>
+            <a:p>
+              <a:r>
+                <a:rPr lang="en-US" sz="1200" dirty="0"/>
+                <a:t>Regulatory Reporting</a:t>
+              </a:r>
+            </a:p>
+          </p:txBody>
+        </p:sp>
+      </p:grpSp>
+      <p:grpSp>
+        <p:nvGrpSpPr>
+          <p:cNvPr id="69" name="Group 68">
+            <a:extLst>
+              <a:ext uri="{FF2B5EF4-FFF2-40B4-BE49-F238E27FC236}">
+                <a16:creationId xmlns:a16="http://schemas.microsoft.com/office/drawing/2014/main" id="{1E7DFA20-3EC4-0DB1-BB1D-44EF99B268D5}"/>
+              </a:ext>
+            </a:extLst>
+          </p:cNvPr>
+          <p:cNvGrpSpPr/>
+          <p:nvPr/>
+        </p:nvGrpSpPr>
+        <p:grpSpPr>
+          <a:xfrm>
+            <a:off x="405355" y="3987255"/>
+            <a:ext cx="1906289" cy="297285"/>
+            <a:chOff x="1091500" y="5196820"/>
+            <a:chExt cx="1641190" cy="297285"/>
+          </a:xfrm>
+        </p:grpSpPr>
+        <p:sp>
+          <p:nvSpPr>
+            <p:cNvPr id="70" name="Shape 2">
+              <a:extLst>
+                <a:ext uri="{FF2B5EF4-FFF2-40B4-BE49-F238E27FC236}">
+                  <a16:creationId xmlns:a16="http://schemas.microsoft.com/office/drawing/2014/main" id="{71FFE9DC-C86B-7995-6BC0-4341659F4904}"/>
+                </a:ext>
+              </a:extLst>
+            </p:cNvPr>
+            <p:cNvSpPr/>
+            <p:nvPr/>
+          </p:nvSpPr>
+          <p:spPr>
+            <a:xfrm>
+              <a:off x="1091500" y="5196820"/>
+              <a:ext cx="1641190" cy="297285"/>
+            </a:xfrm>
+            <a:prstGeom prst="roundRect">
+              <a:avLst>
+                <a:gd name="adj" fmla="val 1087"/>
+              </a:avLst>
+            </a:prstGeom>
+            <a:solidFill>
+              <a:srgbClr val="FBFDFB"/>
+            </a:solidFill>
+            <a:ln w="15240">
+              <a:solidFill>
+                <a:srgbClr val="1F7A47"/>
+              </a:solidFill>
+              <a:prstDash val="solid"/>
+            </a:ln>
+          </p:spPr>
+          <p:txBody>
+            <a:bodyPr/>
+            <a:lstStyle/>
+            <a:p>
+              <a:endParaRPr lang="en-US"/>
+            </a:p>
+          </p:txBody>
+        </p:sp>
+        <p:sp>
+          <p:nvSpPr>
+            <p:cNvPr id="71" name="TextBox 70">
+              <a:extLst>
+                <a:ext uri="{FF2B5EF4-FFF2-40B4-BE49-F238E27FC236}">
+                  <a16:creationId xmlns:a16="http://schemas.microsoft.com/office/drawing/2014/main" id="{8EA539DE-09CC-10F1-B49F-A1DA68C62676}"/>
+                </a:ext>
+              </a:extLst>
+            </p:cNvPr>
+            <p:cNvSpPr txBox="1"/>
+            <p:nvPr/>
+          </p:nvSpPr>
+          <p:spPr>
+            <a:xfrm>
+              <a:off x="1175623" y="5217106"/>
+              <a:ext cx="1332331" cy="276999"/>
+            </a:xfrm>
+            <a:prstGeom prst="rect">
+              <a:avLst/>
+            </a:prstGeom>
+            <a:noFill/>
+          </p:spPr>
+          <p:txBody>
+            <a:bodyPr wrap="none" rtlCol="0">
+              <a:spAutoFit/>
+            </a:bodyPr>
+            <a:lstStyle>
+              <a:lvl1pPr>
+                <a:defRPr sz="1400"/>
+              </a:lvl1pPr>
+            </a:lstStyle>
+            <a:p>
+              <a:pPr algn="ctr"/>
+              <a:r>
+                <a:rPr lang="en-US" sz="1200" dirty="0"/>
+                <a:t>Client &amp; Counterparty</a:t>
+              </a:r>
+            </a:p>
+          </p:txBody>
+        </p:sp>
+      </p:grpSp>
+      <p:grpSp>
+        <p:nvGrpSpPr>
+          <p:cNvPr id="72" name="Group 71">
+            <a:extLst>
+              <a:ext uri="{FF2B5EF4-FFF2-40B4-BE49-F238E27FC236}">
+                <a16:creationId xmlns:a16="http://schemas.microsoft.com/office/drawing/2014/main" id="{34EC3833-124F-BCD8-2E51-8E21E56FA881}"/>
+              </a:ext>
+            </a:extLst>
+          </p:cNvPr>
+          <p:cNvGrpSpPr/>
+          <p:nvPr/>
+        </p:nvGrpSpPr>
+        <p:grpSpPr>
+          <a:xfrm>
+            <a:off x="420084" y="4331260"/>
+            <a:ext cx="1906289" cy="297285"/>
+            <a:chOff x="1091500" y="5196820"/>
+            <a:chExt cx="1641190" cy="297285"/>
+          </a:xfrm>
+        </p:grpSpPr>
+        <p:sp>
+          <p:nvSpPr>
+            <p:cNvPr id="73" name="Shape 2">
+              <a:extLst>
+                <a:ext uri="{FF2B5EF4-FFF2-40B4-BE49-F238E27FC236}">
+                  <a16:creationId xmlns:a16="http://schemas.microsoft.com/office/drawing/2014/main" id="{FD497B51-B30E-2CBC-1732-87CCF9952042}"/>
+                </a:ext>
+              </a:extLst>
+            </p:cNvPr>
+            <p:cNvSpPr/>
+            <p:nvPr/>
+          </p:nvSpPr>
+          <p:spPr>
+            <a:xfrm>
+              <a:off x="1091500" y="5196820"/>
+              <a:ext cx="1641190" cy="297285"/>
+            </a:xfrm>
+            <a:prstGeom prst="roundRect">
+              <a:avLst>
+                <a:gd name="adj" fmla="val 1087"/>
+              </a:avLst>
+            </a:prstGeom>
+            <a:solidFill>
+              <a:srgbClr val="FBFDFB"/>
+            </a:solidFill>
+            <a:ln w="15240">
+              <a:solidFill>
+                <a:srgbClr val="1F7A47"/>
+              </a:solidFill>
+              <a:prstDash val="solid"/>
+            </a:ln>
+          </p:spPr>
+          <p:txBody>
+            <a:bodyPr/>
+            <a:lstStyle/>
+            <a:p>
+              <a:endParaRPr lang="en-US"/>
+            </a:p>
+          </p:txBody>
+        </p:sp>
+        <p:sp>
+          <p:nvSpPr>
+            <p:cNvPr id="74" name="TextBox 73">
+              <a:extLst>
+                <a:ext uri="{FF2B5EF4-FFF2-40B4-BE49-F238E27FC236}">
+                  <a16:creationId xmlns:a16="http://schemas.microsoft.com/office/drawing/2014/main" id="{C30515EA-B2D6-F091-4988-6DD19E911332}"/>
+                </a:ext>
+              </a:extLst>
+            </p:cNvPr>
+            <p:cNvSpPr txBox="1"/>
+            <p:nvPr/>
+          </p:nvSpPr>
+          <p:spPr>
+            <a:xfrm>
+              <a:off x="1235260" y="5217106"/>
+              <a:ext cx="1293853" cy="276999"/>
+            </a:xfrm>
+            <a:prstGeom prst="rect">
+              <a:avLst/>
+            </a:prstGeom>
+            <a:noFill/>
+          </p:spPr>
+          <p:txBody>
+            <a:bodyPr wrap="none" rtlCol="0">
+              <a:spAutoFit/>
+            </a:bodyPr>
+            <a:lstStyle>
+              <a:lvl1pPr>
+                <a:defRPr sz="1400"/>
+              </a:lvl1pPr>
+            </a:lstStyle>
+            <a:p>
+              <a:r>
+                <a:rPr lang="en-US" sz="1200" dirty="0"/>
+                <a:t>Regulatory Reporting</a:t>
+              </a:r>
+            </a:p>
+          </p:txBody>
+        </p:sp>
+      </p:grpSp>
+      <p:grpSp>
+        <p:nvGrpSpPr>
+          <p:cNvPr id="75" name="Group 74">
+            <a:extLst>
+              <a:ext uri="{FF2B5EF4-FFF2-40B4-BE49-F238E27FC236}">
+                <a16:creationId xmlns:a16="http://schemas.microsoft.com/office/drawing/2014/main" id="{A7C11749-3BE6-B10E-C509-56B265C90816}"/>
+              </a:ext>
+            </a:extLst>
+          </p:cNvPr>
+          <p:cNvGrpSpPr/>
+          <p:nvPr/>
+        </p:nvGrpSpPr>
+        <p:grpSpPr>
+          <a:xfrm>
+            <a:off x="420084" y="4669601"/>
+            <a:ext cx="1906289" cy="297285"/>
+            <a:chOff x="1091500" y="5196820"/>
+            <a:chExt cx="1641190" cy="297285"/>
+          </a:xfrm>
+        </p:grpSpPr>
+        <p:sp>
+          <p:nvSpPr>
+            <p:cNvPr id="76" name="Shape 2">
+              <a:extLst>
+                <a:ext uri="{FF2B5EF4-FFF2-40B4-BE49-F238E27FC236}">
+                  <a16:creationId xmlns:a16="http://schemas.microsoft.com/office/drawing/2014/main" id="{0F4F7C33-DFD4-4F43-7003-92B3312F9842}"/>
+                </a:ext>
+              </a:extLst>
+            </p:cNvPr>
+            <p:cNvSpPr/>
+            <p:nvPr/>
+          </p:nvSpPr>
+          <p:spPr>
+            <a:xfrm>
+              <a:off x="1091500" y="5196820"/>
+              <a:ext cx="1641190" cy="297285"/>
+            </a:xfrm>
+            <a:prstGeom prst="roundRect">
+              <a:avLst>
+                <a:gd name="adj" fmla="val 1087"/>
+              </a:avLst>
+            </a:prstGeom>
+            <a:solidFill>
+              <a:srgbClr val="FBFDFB"/>
+            </a:solidFill>
+            <a:ln w="15240">
+              <a:solidFill>
+                <a:srgbClr val="1F7A47"/>
+              </a:solidFill>
+              <a:prstDash val="solid"/>
+            </a:ln>
+          </p:spPr>
+          <p:txBody>
+            <a:bodyPr/>
+            <a:lstStyle/>
+            <a:p>
+              <a:endParaRPr lang="en-US"/>
+            </a:p>
+          </p:txBody>
+        </p:sp>
+        <p:sp>
+          <p:nvSpPr>
+            <p:cNvPr id="77" name="TextBox 76">
+              <a:extLst>
+                <a:ext uri="{FF2B5EF4-FFF2-40B4-BE49-F238E27FC236}">
+                  <a16:creationId xmlns:a16="http://schemas.microsoft.com/office/drawing/2014/main" id="{BD2F642A-B67E-5C8B-F53B-A5EBEDFCAF4B}"/>
+                </a:ext>
+              </a:extLst>
+            </p:cNvPr>
+            <p:cNvSpPr txBox="1"/>
+            <p:nvPr/>
+          </p:nvSpPr>
+          <p:spPr>
+            <a:xfrm>
+              <a:off x="1235260" y="5217106"/>
+              <a:ext cx="913006" cy="276999"/>
+            </a:xfrm>
+            <a:prstGeom prst="rect">
+              <a:avLst/>
+            </a:prstGeom>
+            <a:noFill/>
+          </p:spPr>
+          <p:txBody>
+            <a:bodyPr wrap="none" rtlCol="0">
+              <a:spAutoFit/>
+            </a:bodyPr>
+            <a:lstStyle>
+              <a:lvl1pPr>
+                <a:defRPr sz="1400"/>
+              </a:lvl1pPr>
+            </a:lstStyle>
+            <a:p>
+              <a:r>
+                <a:rPr lang="en-US" sz="1200" dirty="0"/>
+                <a:t>Others ---------</a:t>
+              </a:r>
+            </a:p>
+          </p:txBody>
+        </p:sp>
+      </p:grpSp>
+      <p:grpSp>
+        <p:nvGrpSpPr>
+          <p:cNvPr id="87" name="Group 86">
+            <a:extLst>
+              <a:ext uri="{FF2B5EF4-FFF2-40B4-BE49-F238E27FC236}">
+                <a16:creationId xmlns:a16="http://schemas.microsoft.com/office/drawing/2014/main" id="{992CA59A-BAB6-B5E2-8692-3E712F2BE9A7}"/>
+              </a:ext>
+            </a:extLst>
+          </p:cNvPr>
+          <p:cNvGrpSpPr/>
+          <p:nvPr/>
+        </p:nvGrpSpPr>
+        <p:grpSpPr>
+          <a:xfrm>
+            <a:off x="3495374" y="890143"/>
+            <a:ext cx="1669688" cy="4187620"/>
+            <a:chOff x="2890345" y="915556"/>
+            <a:chExt cx="1669688" cy="4187620"/>
+          </a:xfrm>
+        </p:grpSpPr>
+        <p:sp>
+          <p:nvSpPr>
+            <p:cNvPr id="7" name="Shape 2">
+              <a:extLst>
+                <a:ext uri="{FF2B5EF4-FFF2-40B4-BE49-F238E27FC236}">
+                  <a16:creationId xmlns:a16="http://schemas.microsoft.com/office/drawing/2014/main" id="{3F80B186-DAFE-2DD9-ACB3-0C213C33BBEB}"/>
+                </a:ext>
+              </a:extLst>
+            </p:cNvPr>
+            <p:cNvSpPr/>
+            <p:nvPr/>
+          </p:nvSpPr>
+          <p:spPr>
+            <a:xfrm>
+              <a:off x="2890345" y="1295400"/>
+              <a:ext cx="1641190" cy="3807776"/>
+            </a:xfrm>
+            <a:prstGeom prst="roundRect">
+              <a:avLst>
+                <a:gd name="adj" fmla="val 1087"/>
+              </a:avLst>
+            </a:prstGeom>
+            <a:noFill/>
+            <a:ln w="9525">
+              <a:solidFill>
+                <a:srgbClr val="1F7A47"/>
+              </a:solidFill>
+              <a:prstDash val="solid"/>
+            </a:ln>
+          </p:spPr>
+          <p:txBody>
+            <a:bodyPr/>
+            <a:lstStyle/>
+            <a:p>
+              <a:endParaRPr lang="en-US"/>
+            </a:p>
+          </p:txBody>
+        </p:sp>
+        <p:sp>
+          <p:nvSpPr>
+            <p:cNvPr id="19" name="TextBox 18">
+              <a:extLst>
+                <a:ext uri="{FF2B5EF4-FFF2-40B4-BE49-F238E27FC236}">
+                  <a16:creationId xmlns:a16="http://schemas.microsoft.com/office/drawing/2014/main" id="{15135A38-C8FE-8156-AA28-704DDE36C143}"/>
+                </a:ext>
+              </a:extLst>
+            </p:cNvPr>
+            <p:cNvSpPr txBox="1"/>
+            <p:nvPr/>
+          </p:nvSpPr>
+          <p:spPr>
+            <a:xfrm>
+              <a:off x="2890345" y="915556"/>
+              <a:ext cx="1283108" cy="276999"/>
+            </a:xfrm>
+            <a:prstGeom prst="rect">
+              <a:avLst/>
+            </a:prstGeom>
+            <a:noFill/>
+          </p:spPr>
+          <p:txBody>
+            <a:bodyPr wrap="none" rtlCol="0">
+              <a:spAutoFit/>
+            </a:bodyPr>
+            <a:lstStyle/>
+            <a:p>
+              <a:r>
+                <a:rPr lang="en-US" sz="1200" dirty="0"/>
+                <a:t>Data Architecture</a:t>
+              </a:r>
+            </a:p>
+          </p:txBody>
+        </p:sp>
+        <p:grpSp>
+          <p:nvGrpSpPr>
+            <p:cNvPr id="64" name="Group 63">
+              <a:extLst>
+                <a:ext uri="{FF2B5EF4-FFF2-40B4-BE49-F238E27FC236}">
+                  <a16:creationId xmlns:a16="http://schemas.microsoft.com/office/drawing/2014/main" id="{5E7AC818-0AC4-2262-3FD8-16796716058B}"/>
+                </a:ext>
+              </a:extLst>
+            </p:cNvPr>
+            <p:cNvGrpSpPr/>
+            <p:nvPr/>
+          </p:nvGrpSpPr>
+          <p:grpSpPr>
+            <a:xfrm>
+              <a:off x="2934482" y="3053129"/>
+              <a:ext cx="1536492" cy="614106"/>
+              <a:chOff x="2944069" y="2866694"/>
+              <a:chExt cx="1536492" cy="614106"/>
+            </a:xfrm>
+          </p:grpSpPr>
+          <p:sp>
+            <p:nvSpPr>
+              <p:cNvPr id="42" name="Shape 2">
+                <a:extLst>
+                  <a:ext uri="{FF2B5EF4-FFF2-40B4-BE49-F238E27FC236}">
+                    <a16:creationId xmlns:a16="http://schemas.microsoft.com/office/drawing/2014/main" id="{DEA753D9-B665-2CD9-AA4E-4C3CF38099CA}"/>
+                  </a:ext>
+                </a:extLst>
+              </p:cNvPr>
+              <p:cNvSpPr/>
+              <p:nvPr/>
+            </p:nvSpPr>
+            <p:spPr>
+              <a:xfrm>
+                <a:off x="2977869" y="2896025"/>
+                <a:ext cx="1502692" cy="584775"/>
+              </a:xfrm>
+              <a:prstGeom prst="roundRect">
+                <a:avLst>
+                  <a:gd name="adj" fmla="val 1087"/>
+                </a:avLst>
+              </a:prstGeom>
+              <a:solidFill>
+                <a:srgbClr val="FBFDFB"/>
+              </a:solidFill>
+              <a:ln w="15240">
+                <a:solidFill>
+                  <a:srgbClr val="1F7A47"/>
+                </a:solidFill>
+                <a:prstDash val="solid"/>
+              </a:ln>
+            </p:spPr>
+            <p:txBody>
+              <a:bodyPr/>
+              <a:lstStyle/>
+              <a:p>
+                <a:endParaRPr lang="en-US"/>
+              </a:p>
+            </p:txBody>
+          </p:sp>
+          <p:sp>
+            <p:nvSpPr>
+              <p:cNvPr id="40" name="TextBox 39">
+                <a:extLst>
+                  <a:ext uri="{FF2B5EF4-FFF2-40B4-BE49-F238E27FC236}">
+                    <a16:creationId xmlns:a16="http://schemas.microsoft.com/office/drawing/2014/main" id="{386508BB-28CE-E8F7-C9DC-E5C7DB98513A}"/>
+                  </a:ext>
+                </a:extLst>
+              </p:cNvPr>
+              <p:cNvSpPr txBox="1"/>
+              <p:nvPr/>
+            </p:nvSpPr>
+            <p:spPr>
+              <a:xfrm>
+                <a:off x="2944069" y="2866694"/>
+                <a:ext cx="1316386" cy="584775"/>
+              </a:xfrm>
+              <a:prstGeom prst="rect">
+                <a:avLst/>
+              </a:prstGeom>
+              <a:noFill/>
+            </p:spPr>
+            <p:txBody>
+              <a:bodyPr wrap="none" rtlCol="0">
+                <a:spAutoFit/>
+              </a:bodyPr>
+              <a:lstStyle/>
+              <a:p>
+                <a:r>
+                  <a:rPr lang="en-US" sz="1200" dirty="0"/>
+                  <a:t>Ontology</a:t>
+                </a:r>
+              </a:p>
+              <a:p>
+                <a:pPr marL="171450" indent="-171450">
+                  <a:buFont typeface="Arial" panose="020B0604020202020204" pitchFamily="34" charset="0"/>
+                  <a:buChar char="•"/>
+                </a:pPr>
+                <a:r>
+                  <a:rPr lang="en-US" sz="1000" dirty="0"/>
+                  <a:t>Business Concepts</a:t>
+                </a:r>
+              </a:p>
+              <a:p>
+                <a:pPr marL="171450" indent="-171450">
+                  <a:buFont typeface="Arial" panose="020B0604020202020204" pitchFamily="34" charset="0"/>
+                  <a:buChar char="•"/>
+                </a:pPr>
+                <a:r>
+                  <a:rPr lang="en-US" sz="1000" dirty="0"/>
+                  <a:t>Relationships</a:t>
+                </a:r>
+              </a:p>
+            </p:txBody>
+          </p:sp>
+        </p:grpSp>
+        <p:grpSp>
+          <p:nvGrpSpPr>
+            <p:cNvPr id="65" name="Group 64">
+              <a:extLst>
+                <a:ext uri="{FF2B5EF4-FFF2-40B4-BE49-F238E27FC236}">
+                  <a16:creationId xmlns:a16="http://schemas.microsoft.com/office/drawing/2014/main" id="{17F76861-08F4-B34E-DF9B-746FBEEF1AFF}"/>
+                </a:ext>
+              </a:extLst>
+            </p:cNvPr>
+            <p:cNvGrpSpPr/>
+            <p:nvPr/>
+          </p:nvGrpSpPr>
+          <p:grpSpPr>
+            <a:xfrm>
+              <a:off x="2890345" y="1401802"/>
+              <a:ext cx="1669688" cy="1548482"/>
+              <a:chOff x="2890345" y="1401802"/>
+              <a:chExt cx="1669688" cy="1548482"/>
+            </a:xfrm>
+          </p:grpSpPr>
+          <p:sp>
+            <p:nvSpPr>
+              <p:cNvPr id="37" name="Shape 2">
+                <a:extLst>
+                  <a:ext uri="{FF2B5EF4-FFF2-40B4-BE49-F238E27FC236}">
+                    <a16:creationId xmlns:a16="http://schemas.microsoft.com/office/drawing/2014/main" id="{16F99EFF-8264-81B8-07C0-F2C64BAF836D}"/>
+                  </a:ext>
+                </a:extLst>
+              </p:cNvPr>
+              <p:cNvSpPr/>
+              <p:nvPr/>
+            </p:nvSpPr>
+            <p:spPr>
+              <a:xfrm>
+                <a:off x="2965899" y="1433492"/>
+                <a:ext cx="1514661" cy="1486706"/>
+              </a:xfrm>
+              <a:prstGeom prst="roundRect">
+                <a:avLst>
+                  <a:gd name="adj" fmla="val 1087"/>
+                </a:avLst>
+              </a:prstGeom>
+              <a:solidFill>
+                <a:srgbClr val="FBFDFB"/>
+              </a:solidFill>
+              <a:ln w="15240">
+                <a:solidFill>
+                  <a:srgbClr val="1F7A47"/>
+                </a:solidFill>
+                <a:prstDash val="solid"/>
+              </a:ln>
+            </p:spPr>
+            <p:txBody>
+              <a:bodyPr/>
+              <a:lstStyle/>
+              <a:p>
+                <a:endParaRPr lang="en-US"/>
+              </a:p>
+            </p:txBody>
+          </p:sp>
+          <p:grpSp>
+            <p:nvGrpSpPr>
+              <p:cNvPr id="33" name="Group 32">
+                <a:extLst>
+                  <a:ext uri="{FF2B5EF4-FFF2-40B4-BE49-F238E27FC236}">
+                    <a16:creationId xmlns:a16="http://schemas.microsoft.com/office/drawing/2014/main" id="{D5C69ACD-944A-13B5-F8B7-BD25A5E8E02E}"/>
+                  </a:ext>
+                </a:extLst>
+              </p:cNvPr>
+              <p:cNvGrpSpPr/>
+              <p:nvPr/>
+            </p:nvGrpSpPr>
+            <p:grpSpPr>
+              <a:xfrm>
+                <a:off x="3007010" y="1648586"/>
+                <a:ext cx="1165860" cy="219456"/>
+                <a:chOff x="4480560" y="4451935"/>
+                <a:chExt cx="1165860" cy="219456"/>
+              </a:xfrm>
+            </p:grpSpPr>
+            <p:sp>
+              <p:nvSpPr>
+                <p:cNvPr id="25" name="Shape 30">
+                  <a:extLst>
+                    <a:ext uri="{FF2B5EF4-FFF2-40B4-BE49-F238E27FC236}">
+                      <a16:creationId xmlns:a16="http://schemas.microsoft.com/office/drawing/2014/main" id="{94FDD37D-F378-EA91-1648-CAB7F83CEE2B}"/>
+                    </a:ext>
+                  </a:extLst>
+                </p:cNvPr>
+                <p:cNvSpPr/>
+                <p:nvPr/>
+              </p:nvSpPr>
+              <p:spPr>
+                <a:xfrm>
+                  <a:off x="4549140" y="4451935"/>
+                  <a:ext cx="1097280" cy="219456"/>
+                </a:xfrm>
+                <a:prstGeom prst="roundRect">
+                  <a:avLst>
+                    <a:gd name="adj" fmla="val 16667"/>
+                  </a:avLst>
+                </a:prstGeom>
+                <a:solidFill>
+                  <a:srgbClr val="1F7A47"/>
+                </a:solidFill>
+                <a:ln/>
+              </p:spPr>
+              <p:txBody>
+                <a:bodyPr/>
+                <a:lstStyle/>
+                <a:p>
+                  <a:endParaRPr lang="en-US"/>
+                </a:p>
+              </p:txBody>
+            </p:sp>
+            <p:sp>
+              <p:nvSpPr>
+                <p:cNvPr id="26" name="Text 31">
+                  <a:extLst>
+                    <a:ext uri="{FF2B5EF4-FFF2-40B4-BE49-F238E27FC236}">
+                      <a16:creationId xmlns:a16="http://schemas.microsoft.com/office/drawing/2014/main" id="{486C1A74-401E-221A-ABCB-CDA7172038F2}"/>
+                    </a:ext>
+                  </a:extLst>
+                </p:cNvPr>
+                <p:cNvSpPr/>
+                <p:nvPr/>
+              </p:nvSpPr>
+              <p:spPr>
+                <a:xfrm>
+                  <a:off x="4480560" y="4451935"/>
+                  <a:ext cx="1097280" cy="219456"/>
+                </a:xfrm>
+                <a:prstGeom prst="rect">
+                  <a:avLst/>
+                </a:prstGeom>
+                <a:noFill/>
+                <a:ln/>
+              </p:spPr>
+              <p:txBody>
+                <a:bodyPr wrap="square" rtlCol="0" anchor="ctr"/>
+                <a:lstStyle/>
+                <a:p>
+                  <a:pPr marL="0" indent="0" algn="ctr">
+                    <a:buNone/>
+                  </a:pPr>
+                  <a:r>
+                    <a:rPr lang="en-US" sz="850" b="1" dirty="0">
+                      <a:solidFill>
+                        <a:srgbClr val="FFFFFF"/>
+                      </a:solidFill>
+                      <a:latin typeface="Calibri" pitchFamily="34" charset="0"/>
+                      <a:ea typeface="Calibri" pitchFamily="34" charset="-122"/>
+                      <a:cs typeface="Calibri" pitchFamily="34" charset="-120"/>
+                    </a:rPr>
+                    <a:t>Valuation</a:t>
+                  </a:r>
+                  <a:endParaRPr lang="en-US" sz="850" dirty="0"/>
+                </a:p>
+              </p:txBody>
+            </p:sp>
+          </p:grpSp>
+          <p:grpSp>
+            <p:nvGrpSpPr>
+              <p:cNvPr id="36" name="Group 35">
+                <a:extLst>
+                  <a:ext uri="{FF2B5EF4-FFF2-40B4-BE49-F238E27FC236}">
+                    <a16:creationId xmlns:a16="http://schemas.microsoft.com/office/drawing/2014/main" id="{E313B347-EE44-DCC8-6FF9-9A9205BB9CD9}"/>
+                  </a:ext>
+                </a:extLst>
+              </p:cNvPr>
+              <p:cNvGrpSpPr/>
+              <p:nvPr/>
+            </p:nvGrpSpPr>
+            <p:grpSpPr>
+              <a:xfrm>
+                <a:off x="3075590" y="1923390"/>
+                <a:ext cx="1097280" cy="219456"/>
+                <a:chOff x="5715000" y="4451935"/>
+                <a:chExt cx="1097280" cy="219456"/>
+              </a:xfrm>
+            </p:grpSpPr>
+            <p:sp>
+              <p:nvSpPr>
+                <p:cNvPr id="27" name="Shape 32">
+                  <a:extLst>
+                    <a:ext uri="{FF2B5EF4-FFF2-40B4-BE49-F238E27FC236}">
+                      <a16:creationId xmlns:a16="http://schemas.microsoft.com/office/drawing/2014/main" id="{71AF38C9-E81D-0434-5D17-2C2F279120E7}"/>
+                    </a:ext>
+                  </a:extLst>
+                </p:cNvPr>
+                <p:cNvSpPr/>
+                <p:nvPr/>
+              </p:nvSpPr>
+              <p:spPr>
+                <a:xfrm>
+                  <a:off x="5715000" y="4451935"/>
+                  <a:ext cx="1097280" cy="219456"/>
+                </a:xfrm>
+                <a:prstGeom prst="roundRect">
+                  <a:avLst>
+                    <a:gd name="adj" fmla="val 16667"/>
+                  </a:avLst>
+                </a:prstGeom>
+                <a:solidFill>
+                  <a:srgbClr val="1F7A47"/>
+                </a:solidFill>
+                <a:ln/>
+              </p:spPr>
+              <p:txBody>
+                <a:bodyPr/>
+                <a:lstStyle/>
+                <a:p>
+                  <a:endParaRPr lang="en-US"/>
+                </a:p>
+              </p:txBody>
+            </p:sp>
+            <p:sp>
+              <p:nvSpPr>
+                <p:cNvPr id="28" name="Text 33">
+                  <a:extLst>
+                    <a:ext uri="{FF2B5EF4-FFF2-40B4-BE49-F238E27FC236}">
+                      <a16:creationId xmlns:a16="http://schemas.microsoft.com/office/drawing/2014/main" id="{202A7757-0C2A-9A7B-0B51-7F4164F0740A}"/>
+                    </a:ext>
+                  </a:extLst>
+                </p:cNvPr>
+                <p:cNvSpPr/>
+                <p:nvPr/>
+              </p:nvSpPr>
+              <p:spPr>
+                <a:xfrm>
+                  <a:off x="5715000" y="4451935"/>
+                  <a:ext cx="1097280" cy="219456"/>
+                </a:xfrm>
+                <a:prstGeom prst="rect">
+                  <a:avLst/>
+                </a:prstGeom>
+                <a:noFill/>
+                <a:ln/>
+              </p:spPr>
+              <p:txBody>
+                <a:bodyPr wrap="square" rtlCol="0" anchor="ctr"/>
+                <a:lstStyle/>
+                <a:p>
+                  <a:pPr marL="0" indent="0" algn="ctr">
+                    <a:buNone/>
+                  </a:pPr>
+                  <a:r>
+                    <a:rPr lang="en-US" sz="850" b="1" dirty="0">
+                      <a:solidFill>
+                        <a:srgbClr val="FFFFFF"/>
+                      </a:solidFill>
+                      <a:latin typeface="Calibri" pitchFamily="34" charset="0"/>
+                      <a:ea typeface="Calibri" pitchFamily="34" charset="-122"/>
+                      <a:cs typeface="Calibri" pitchFamily="34" charset="-120"/>
+                    </a:rPr>
+                    <a:t>Trade</a:t>
+                  </a:r>
+                  <a:endParaRPr lang="en-US" sz="850" dirty="0"/>
+                </a:p>
+              </p:txBody>
+            </p:sp>
+          </p:grpSp>
+          <p:grpSp>
+            <p:nvGrpSpPr>
+              <p:cNvPr id="34" name="Group 33">
+                <a:extLst>
+                  <a:ext uri="{FF2B5EF4-FFF2-40B4-BE49-F238E27FC236}">
+                    <a16:creationId xmlns:a16="http://schemas.microsoft.com/office/drawing/2014/main" id="{052BA73D-5CFB-19FF-0B0E-279D8F058B62}"/>
+                  </a:ext>
+                </a:extLst>
+              </p:cNvPr>
+              <p:cNvGrpSpPr/>
+              <p:nvPr/>
+            </p:nvGrpSpPr>
+            <p:grpSpPr>
+              <a:xfrm>
+                <a:off x="3075590" y="2193478"/>
+                <a:ext cx="1097280" cy="219456"/>
+                <a:chOff x="6949440" y="4451935"/>
+                <a:chExt cx="1097280" cy="219456"/>
+              </a:xfrm>
+            </p:grpSpPr>
+            <p:sp>
+              <p:nvSpPr>
+                <p:cNvPr id="29" name="Shape 34">
+                  <a:extLst>
+                    <a:ext uri="{FF2B5EF4-FFF2-40B4-BE49-F238E27FC236}">
+                      <a16:creationId xmlns:a16="http://schemas.microsoft.com/office/drawing/2014/main" id="{486AC819-8A24-B1B6-2C9A-92766F5B9639}"/>
+                    </a:ext>
+                  </a:extLst>
+                </p:cNvPr>
+                <p:cNvSpPr/>
+                <p:nvPr/>
+              </p:nvSpPr>
+              <p:spPr>
+                <a:xfrm>
+                  <a:off x="6949440" y="4451935"/>
+                  <a:ext cx="1097280" cy="219456"/>
+                </a:xfrm>
+                <a:prstGeom prst="roundRect">
+                  <a:avLst>
+                    <a:gd name="adj" fmla="val 16667"/>
+                  </a:avLst>
+                </a:prstGeom>
+                <a:solidFill>
+                  <a:srgbClr val="1F7A47"/>
+                </a:solidFill>
+                <a:ln/>
+              </p:spPr>
+              <p:txBody>
+                <a:bodyPr/>
+                <a:lstStyle/>
+                <a:p>
+                  <a:endParaRPr lang="en-US"/>
+                </a:p>
+              </p:txBody>
+            </p:sp>
+            <p:sp>
+              <p:nvSpPr>
+                <p:cNvPr id="30" name="Text 35">
+                  <a:extLst>
+                    <a:ext uri="{FF2B5EF4-FFF2-40B4-BE49-F238E27FC236}">
+                      <a16:creationId xmlns:a16="http://schemas.microsoft.com/office/drawing/2014/main" id="{1DFB2760-FA04-543C-CDCB-FBDF4AC7E29B}"/>
+                    </a:ext>
+                  </a:extLst>
+                </p:cNvPr>
+                <p:cNvSpPr/>
+                <p:nvPr/>
+              </p:nvSpPr>
+              <p:spPr>
+                <a:xfrm>
+                  <a:off x="6949440" y="4451935"/>
+                  <a:ext cx="1097280" cy="219456"/>
+                </a:xfrm>
+                <a:prstGeom prst="rect">
+                  <a:avLst/>
+                </a:prstGeom>
+                <a:noFill/>
+                <a:ln/>
+              </p:spPr>
+              <p:txBody>
+                <a:bodyPr wrap="square" rtlCol="0" anchor="ctr"/>
+                <a:lstStyle/>
+                <a:p>
+                  <a:pPr marL="0" indent="0" algn="ctr">
+                    <a:buNone/>
+                  </a:pPr>
+                  <a:r>
+                    <a:rPr lang="en-US" sz="850" b="1" dirty="0">
+                      <a:solidFill>
+                        <a:srgbClr val="FFFFFF"/>
+                      </a:solidFill>
+                      <a:latin typeface="Calibri" pitchFamily="34" charset="0"/>
+                      <a:ea typeface="Calibri" pitchFamily="34" charset="-122"/>
+                      <a:cs typeface="Calibri" pitchFamily="34" charset="-120"/>
+                    </a:rPr>
+                    <a:t>Collateral</a:t>
+                  </a:r>
+                  <a:endParaRPr lang="en-US" sz="850" dirty="0"/>
+                </a:p>
+              </p:txBody>
+            </p:sp>
+          </p:grpSp>
+          <p:grpSp>
+            <p:nvGrpSpPr>
+              <p:cNvPr id="35" name="Group 34">
+                <a:extLst>
+                  <a:ext uri="{FF2B5EF4-FFF2-40B4-BE49-F238E27FC236}">
+                    <a16:creationId xmlns:a16="http://schemas.microsoft.com/office/drawing/2014/main" id="{598C2461-8B2E-9A1E-FF63-3D1E70FC540C}"/>
+                  </a:ext>
+                </a:extLst>
+              </p:cNvPr>
+              <p:cNvGrpSpPr/>
+              <p:nvPr/>
+            </p:nvGrpSpPr>
+            <p:grpSpPr>
+              <a:xfrm>
+                <a:off x="3075590" y="2473107"/>
+                <a:ext cx="1097280" cy="219456"/>
+                <a:chOff x="8183880" y="4451935"/>
+                <a:chExt cx="1097280" cy="219456"/>
+              </a:xfrm>
+            </p:grpSpPr>
+            <p:sp>
+              <p:nvSpPr>
+                <p:cNvPr id="31" name="Shape 36">
+                  <a:extLst>
+                    <a:ext uri="{FF2B5EF4-FFF2-40B4-BE49-F238E27FC236}">
+                      <a16:creationId xmlns:a16="http://schemas.microsoft.com/office/drawing/2014/main" id="{3A44E7F0-3A2D-F660-4FEF-6D56E64411F6}"/>
+                    </a:ext>
+                  </a:extLst>
+                </p:cNvPr>
+                <p:cNvSpPr/>
+                <p:nvPr/>
+              </p:nvSpPr>
+              <p:spPr>
+                <a:xfrm>
+                  <a:off x="8183880" y="4451935"/>
+                  <a:ext cx="1097280" cy="219456"/>
+                </a:xfrm>
+                <a:prstGeom prst="roundRect">
+                  <a:avLst>
+                    <a:gd name="adj" fmla="val 16667"/>
+                  </a:avLst>
+                </a:prstGeom>
+                <a:solidFill>
+                  <a:srgbClr val="1F7A47"/>
+                </a:solidFill>
+                <a:ln/>
+              </p:spPr>
+              <p:txBody>
+                <a:bodyPr/>
+                <a:lstStyle/>
+                <a:p>
+                  <a:endParaRPr lang="en-US"/>
+                </a:p>
+              </p:txBody>
+            </p:sp>
+            <p:sp>
+              <p:nvSpPr>
+                <p:cNvPr id="32" name="Text 37">
+                  <a:extLst>
+                    <a:ext uri="{FF2B5EF4-FFF2-40B4-BE49-F238E27FC236}">
+                      <a16:creationId xmlns:a16="http://schemas.microsoft.com/office/drawing/2014/main" id="{B301906B-6385-A8FA-F76D-47D1168B4DA6}"/>
+                    </a:ext>
+                  </a:extLst>
+                </p:cNvPr>
+                <p:cNvSpPr/>
+                <p:nvPr/>
+              </p:nvSpPr>
+              <p:spPr>
+                <a:xfrm>
+                  <a:off x="8183880" y="4451935"/>
+                  <a:ext cx="1097280" cy="219456"/>
+                </a:xfrm>
+                <a:prstGeom prst="rect">
+                  <a:avLst/>
+                </a:prstGeom>
+                <a:noFill/>
+                <a:ln/>
+              </p:spPr>
+              <p:txBody>
+                <a:bodyPr wrap="square" rtlCol="0" anchor="ctr"/>
+                <a:lstStyle/>
+                <a:p>
+                  <a:pPr marL="0" indent="0" algn="ctr">
+                    <a:buNone/>
+                  </a:pPr>
+                  <a:r>
+                    <a:rPr lang="en-US" sz="850" b="1" dirty="0">
+                      <a:solidFill>
+                        <a:srgbClr val="FFFFFF"/>
+                      </a:solidFill>
+                      <a:latin typeface="Calibri" pitchFamily="34" charset="0"/>
+                      <a:ea typeface="Calibri" pitchFamily="34" charset="-122"/>
+                      <a:cs typeface="Calibri" pitchFamily="34" charset="-120"/>
+                    </a:rPr>
+                    <a:t>Party</a:t>
+                  </a:r>
+                  <a:endParaRPr lang="en-US" sz="850" dirty="0"/>
+                </a:p>
+              </p:txBody>
+            </p:sp>
+          </p:grpSp>
+          <p:sp>
+            <p:nvSpPr>
+              <p:cNvPr id="38" name="TextBox 37">
+                <a:extLst>
+                  <a:ext uri="{FF2B5EF4-FFF2-40B4-BE49-F238E27FC236}">
+                    <a16:creationId xmlns:a16="http://schemas.microsoft.com/office/drawing/2014/main" id="{9908F9AB-BD08-810F-3E0F-D7E8EA4DE59C}"/>
+                  </a:ext>
+                </a:extLst>
+              </p:cNvPr>
+              <p:cNvSpPr txBox="1"/>
+              <p:nvPr/>
+            </p:nvSpPr>
+            <p:spPr>
+              <a:xfrm>
+                <a:off x="2890345" y="1401802"/>
+                <a:ext cx="1669688" cy="276999"/>
+              </a:xfrm>
+              <a:prstGeom prst="rect">
+                <a:avLst/>
+              </a:prstGeom>
+              <a:noFill/>
+            </p:spPr>
+            <p:txBody>
+              <a:bodyPr wrap="none" rtlCol="0">
+                <a:spAutoFit/>
+              </a:bodyPr>
+              <a:lstStyle/>
+              <a:p>
+                <a:r>
+                  <a:rPr lang="en-US" sz="1200" dirty="0"/>
+                  <a:t>Data Domains/Products</a:t>
+                </a:r>
+              </a:p>
+            </p:txBody>
+          </p:sp>
+          <p:sp>
+            <p:nvSpPr>
+              <p:cNvPr id="63" name="Shape 36">
+                <a:extLst>
+                  <a:ext uri="{FF2B5EF4-FFF2-40B4-BE49-F238E27FC236}">
+                    <a16:creationId xmlns:a16="http://schemas.microsoft.com/office/drawing/2014/main" id="{41C0050D-FEB5-A5D3-2D4C-0F5AFA5DC005}"/>
+                  </a:ext>
+                </a:extLst>
+              </p:cNvPr>
+              <p:cNvSpPr/>
+              <p:nvPr/>
+            </p:nvSpPr>
+            <p:spPr>
+              <a:xfrm>
+                <a:off x="3095843" y="2730828"/>
+                <a:ext cx="1097280" cy="219456"/>
+              </a:xfrm>
+              <a:prstGeom prst="roundRect">
+                <a:avLst>
+                  <a:gd name="adj" fmla="val 16667"/>
+                </a:avLst>
+              </a:prstGeom>
+              <a:solidFill>
+                <a:srgbClr val="1F7A47"/>
+              </a:solidFill>
+              <a:ln/>
+            </p:spPr>
+            <p:txBody>
+              <a:bodyPr/>
+              <a:lstStyle/>
+              <a:p>
+                <a:pPr algn="ctr"/>
+                <a:r>
+                  <a:rPr lang="en-US" sz="1000" dirty="0">
+                    <a:solidFill>
+                      <a:schemeClr val="bg1"/>
+                    </a:solidFill>
+                  </a:rPr>
+                  <a:t>Others</a:t>
+                </a:r>
+              </a:p>
+            </p:txBody>
+          </p:sp>
+        </p:grpSp>
+        <p:grpSp>
+          <p:nvGrpSpPr>
+            <p:cNvPr id="82" name="Group 81">
+              <a:extLst>
+                <a:ext uri="{FF2B5EF4-FFF2-40B4-BE49-F238E27FC236}">
+                  <a16:creationId xmlns:a16="http://schemas.microsoft.com/office/drawing/2014/main" id="{BD113338-A32D-16F6-0D1C-DF584028780F}"/>
+                </a:ext>
+              </a:extLst>
+            </p:cNvPr>
+            <p:cNvGrpSpPr/>
+            <p:nvPr/>
+          </p:nvGrpSpPr>
+          <p:grpSpPr>
+            <a:xfrm>
+              <a:off x="2934482" y="3715494"/>
+              <a:ext cx="1518351" cy="1200329"/>
+              <a:chOff x="2541843" y="4948458"/>
+              <a:chExt cx="1518351" cy="1200329"/>
+            </a:xfrm>
+          </p:grpSpPr>
+          <p:sp>
+            <p:nvSpPr>
+              <p:cNvPr id="79" name="Shape 2">
+                <a:extLst>
+                  <a:ext uri="{FF2B5EF4-FFF2-40B4-BE49-F238E27FC236}">
+                    <a16:creationId xmlns:a16="http://schemas.microsoft.com/office/drawing/2014/main" id="{7410B990-25FF-65C0-CD49-F02ADB02F57E}"/>
+                  </a:ext>
+                </a:extLst>
+              </p:cNvPr>
+              <p:cNvSpPr/>
+              <p:nvPr/>
+            </p:nvSpPr>
+            <p:spPr>
+              <a:xfrm>
+                <a:off x="2557502" y="5025610"/>
+                <a:ext cx="1502692" cy="1123177"/>
+              </a:xfrm>
+              <a:prstGeom prst="roundRect">
+                <a:avLst>
+                  <a:gd name="adj" fmla="val 1087"/>
+                </a:avLst>
+              </a:prstGeom>
+              <a:solidFill>
+                <a:srgbClr val="FBFDFB"/>
+              </a:solidFill>
+              <a:ln w="15240">
+                <a:solidFill>
+                  <a:srgbClr val="1F7A47"/>
+                </a:solidFill>
+                <a:prstDash val="solid"/>
+              </a:ln>
+            </p:spPr>
+            <p:txBody>
+              <a:bodyPr/>
+              <a:lstStyle/>
+              <a:p>
+                <a:endParaRPr lang="en-US"/>
+              </a:p>
+            </p:txBody>
+          </p:sp>
+          <p:sp>
+            <p:nvSpPr>
+              <p:cNvPr id="81" name="TextBox 80">
+                <a:extLst>
+                  <a:ext uri="{FF2B5EF4-FFF2-40B4-BE49-F238E27FC236}">
+                    <a16:creationId xmlns:a16="http://schemas.microsoft.com/office/drawing/2014/main" id="{8DAD72C7-E6DC-67CB-8E8B-A1F8D457B68D}"/>
+                  </a:ext>
+                </a:extLst>
+              </p:cNvPr>
+              <p:cNvSpPr txBox="1"/>
+              <p:nvPr/>
+            </p:nvSpPr>
+            <p:spPr>
+              <a:xfrm>
+                <a:off x="2541843" y="4948458"/>
+                <a:ext cx="1359668" cy="1200329"/>
+              </a:xfrm>
+              <a:prstGeom prst="rect">
+                <a:avLst/>
+              </a:prstGeom>
+              <a:noFill/>
+            </p:spPr>
+            <p:txBody>
+              <a:bodyPr wrap="none" rtlCol="0">
+                <a:spAutoFit/>
+              </a:bodyPr>
+              <a:lstStyle/>
+              <a:p>
+                <a:r>
+                  <a:rPr lang="en-US" sz="1200" dirty="0"/>
+                  <a:t>Governance</a:t>
+                </a:r>
+              </a:p>
+              <a:p>
+                <a:pPr marL="285750" indent="-285750">
+                  <a:buFont typeface="Arial" panose="020B0604020202020204" pitchFamily="34" charset="0"/>
+                  <a:buChar char="•"/>
+                </a:pPr>
+                <a:r>
+                  <a:rPr lang="en-US" sz="1000" dirty="0"/>
+                  <a:t>Data Contract</a:t>
+                </a:r>
+              </a:p>
+              <a:p>
+                <a:pPr marL="285750" indent="-285750">
+                  <a:buFont typeface="Arial" panose="020B0604020202020204" pitchFamily="34" charset="0"/>
+                  <a:buChar char="•"/>
+                </a:pPr>
+                <a:r>
+                  <a:rPr lang="en-US" sz="1000" dirty="0"/>
+                  <a:t>Data Quality</a:t>
+                </a:r>
+              </a:p>
+              <a:p>
+                <a:pPr marL="285750" indent="-285750">
+                  <a:buFont typeface="Arial" panose="020B0604020202020204" pitchFamily="34" charset="0"/>
+                  <a:buChar char="•"/>
+                </a:pPr>
+                <a:r>
+                  <a:rPr lang="en-US" sz="1000" dirty="0"/>
+                  <a:t>Data Provenance</a:t>
+                </a:r>
+              </a:p>
+              <a:p>
+                <a:pPr marL="285750" indent="-285750">
+                  <a:buFont typeface="Arial" panose="020B0604020202020204" pitchFamily="34" charset="0"/>
+                  <a:buChar char="•"/>
+                </a:pPr>
+                <a:r>
+                  <a:rPr lang="en-US" sz="1000" dirty="0"/>
+                  <a:t>Data Lineage</a:t>
+                </a:r>
+              </a:p>
+              <a:p>
+                <a:pPr marL="285750" indent="-285750">
+                  <a:buFont typeface="Arial" panose="020B0604020202020204" pitchFamily="34" charset="0"/>
+                  <a:buChar char="•"/>
+                </a:pPr>
+                <a:r>
+                  <a:rPr lang="en-US" sz="1000" dirty="0"/>
+                  <a:t>Data Security</a:t>
+                </a:r>
+              </a:p>
+              <a:p>
+                <a:pPr marL="285750" indent="-285750">
+                  <a:buFont typeface="Arial" panose="020B0604020202020204" pitchFamily="34" charset="0"/>
+                  <a:buChar char="•"/>
+                </a:pPr>
+                <a:r>
+                  <a:rPr lang="en-US" sz="1000" dirty="0"/>
+                  <a:t>Data Ownership</a:t>
+                </a:r>
+              </a:p>
+            </p:txBody>
+          </p:sp>
+        </p:grpSp>
+      </p:grpSp>
+      <p:sp>
+        <p:nvSpPr>
+          <p:cNvPr id="2" name="TextBox 1">
+            <a:extLst>
+              <a:ext uri="{FF2B5EF4-FFF2-40B4-BE49-F238E27FC236}">
+                <a16:creationId xmlns:a16="http://schemas.microsoft.com/office/drawing/2014/main" id="{3F37852F-C4A5-3A4F-A441-51BC0954C3A1}"/>
               </a:ext>
             </a:extLst>
           </p:cNvPr>
@@ -6815,8 +7189,8 @@
         </p:nvSpPr>
         <p:spPr>
           <a:xfrm>
-            <a:off x="4723689" y="4181570"/>
-            <a:ext cx="1435008" cy="707886"/>
+            <a:off x="8508186" y="3074935"/>
+            <a:ext cx="904415" cy="400110"/>
           </a:xfrm>
           <a:prstGeom prst="rect">
             <a:avLst/>
@@ -6829,53 +7203,29 @@
           </a:bodyPr>
           <a:lstStyle/>
           <a:p>
-            <a:pPr marL="285750" indent="-285750">
+            <a:r>
+              <a:rPr lang="en-US" sz="1000" dirty="0"/>
+              <a:t>Data Lake</a:t>
+            </a:r>
+          </a:p>
+          <a:p>
+            <a:pPr marL="171450" indent="-171450">
               <a:buFont typeface="Arial" panose="020B0604020202020204" pitchFamily="34" charset="0"/>
               <a:buChar char="•"/>
             </a:pPr>
             <a:r>
               <a:rPr lang="en-US" sz="1000" dirty="0"/>
-              <a:t>Data identification</a:t>
-            </a:r>
-          </a:p>
-          <a:p>
-            <a:pPr marL="285750" indent="-285750">
-              <a:buFont typeface="Arial" panose="020B0604020202020204" pitchFamily="34" charset="0"/>
-              <a:buChar char="•"/>
-            </a:pPr>
-            <a:r>
-              <a:rPr lang="en-US" sz="1000" dirty="0"/>
-              <a:t>Data consumption</a:t>
-            </a:r>
-          </a:p>
-          <a:p>
-            <a:pPr marL="285750" indent="-285750">
-              <a:buFont typeface="Arial" panose="020B0604020202020204" pitchFamily="34" charset="0"/>
-              <a:buChar char="•"/>
-            </a:pPr>
-            <a:r>
-              <a:rPr lang="en-US" sz="1000" dirty="0"/>
-              <a:t>Data Shaping</a:t>
-            </a:r>
-          </a:p>
-          <a:p>
-            <a:pPr marL="285750" indent="-285750">
-              <a:buFont typeface="Arial" panose="020B0604020202020204" pitchFamily="34" charset="0"/>
-              <a:buChar char="•"/>
-            </a:pPr>
-            <a:r>
-              <a:rPr lang="en-US" sz="1000" dirty="0"/>
-              <a:t>Data Processing</a:t>
-            </a:r>
-          </a:p>
-        </p:txBody>
-      </p:sp>
-      <p:sp>
-        <p:nvSpPr>
-          <p:cNvPr id="48" name="TextBox 47">
+              <a:t>Databricks</a:t>
+            </a:r>
+          </a:p>
+        </p:txBody>
+      </p:sp>
+      <p:sp>
+        <p:nvSpPr>
+          <p:cNvPr id="6" name="TextBox 5">
             <a:extLst>
               <a:ext uri="{FF2B5EF4-FFF2-40B4-BE49-F238E27FC236}">
-                <a16:creationId xmlns:a16="http://schemas.microsoft.com/office/drawing/2014/main" id="{0B6EA0B9-1BB6-FD5B-7DA1-E39BD88B60FD}"/>
+                <a16:creationId xmlns:a16="http://schemas.microsoft.com/office/drawing/2014/main" id="{03B12AC5-9F9D-EA1B-8E1D-8EC095F9A7E6}"/>
               </a:ext>
             </a:extLst>
           </p:cNvPr>
@@ -6884,8 +7234,8 @@
         </p:nvSpPr>
         <p:spPr>
           <a:xfrm>
-            <a:off x="4717688" y="5161765"/>
-            <a:ext cx="1128835" cy="246221"/>
+            <a:off x="8484197" y="2717445"/>
+            <a:ext cx="1072730" cy="246221"/>
           </a:xfrm>
           <a:prstGeom prst="rect">
             <a:avLst/>
@@ -6898,35 +7248,246 @@
           </a:bodyPr>
           <a:lstStyle/>
           <a:p>
-            <a:pPr marL="171450" indent="-171450">
-              <a:buFont typeface="Arial" panose="020B0604020202020204" pitchFamily="34" charset="0"/>
-              <a:buChar char="•"/>
-            </a:pPr>
             <a:r>
               <a:rPr lang="en-US" sz="1000" dirty="0"/>
-              <a:t>Produced Data</a:t>
-            </a:r>
+              <a:t>Data Distribution</a:t>
+            </a:r>
+          </a:p>
+        </p:txBody>
+      </p:sp>
+      <p:sp>
+        <p:nvSpPr>
+          <p:cNvPr id="39" name="TextBox 38">
+            <a:extLst>
+              <a:ext uri="{FF2B5EF4-FFF2-40B4-BE49-F238E27FC236}">
+                <a16:creationId xmlns:a16="http://schemas.microsoft.com/office/drawing/2014/main" id="{1CCEB652-2818-E072-DED4-92C3403159FC}"/>
+              </a:ext>
+            </a:extLst>
+          </p:cNvPr>
+          <p:cNvSpPr txBox="1"/>
+          <p:nvPr/>
+        </p:nvSpPr>
+        <p:spPr>
+          <a:xfrm>
+            <a:off x="8486693" y="2563210"/>
+            <a:ext cx="974947" cy="246221"/>
+          </a:xfrm>
+          <a:prstGeom prst="rect">
+            <a:avLst/>
+          </a:prstGeom>
+          <a:noFill/>
+        </p:spPr>
+        <p:txBody>
+          <a:bodyPr wrap="none" rtlCol="0">
+            <a:spAutoFit/>
+          </a:bodyPr>
+          <a:lstStyle/>
+          <a:p>
+            <a:r>
+              <a:rPr lang="en-US" sz="1000" dirty="0"/>
+              <a:t>Data Packaging</a:t>
+            </a:r>
+          </a:p>
+        </p:txBody>
+      </p:sp>
+      <p:sp>
+        <p:nvSpPr>
+          <p:cNvPr id="49" name="TextBox 48">
+            <a:extLst>
+              <a:ext uri="{FF2B5EF4-FFF2-40B4-BE49-F238E27FC236}">
+                <a16:creationId xmlns:a16="http://schemas.microsoft.com/office/drawing/2014/main" id="{D3C00910-A57D-D566-2F3A-EB9D945CE26E}"/>
+              </a:ext>
+            </a:extLst>
+          </p:cNvPr>
+          <p:cNvSpPr txBox="1"/>
+          <p:nvPr/>
+        </p:nvSpPr>
+        <p:spPr>
+          <a:xfrm>
+            <a:off x="8494616" y="2902111"/>
+            <a:ext cx="960519" cy="553998"/>
+          </a:xfrm>
+          <a:prstGeom prst="rect">
+            <a:avLst/>
+          </a:prstGeom>
+          <a:noFill/>
+        </p:spPr>
+        <p:txBody>
+          <a:bodyPr wrap="none" rtlCol="0">
+            <a:spAutoFit/>
+          </a:bodyPr>
+          <a:lstStyle/>
+          <a:p>
+            <a:r>
+              <a:rPr lang="en-US" sz="1000" dirty="0"/>
+              <a:t>Data Discovery</a:t>
+            </a:r>
+          </a:p>
+          <a:p>
+            <a:endParaRPr lang="en-US" sz="1000" dirty="0"/>
+          </a:p>
+          <a:p>
+            <a:endParaRPr lang="en-US" sz="1000" dirty="0"/>
           </a:p>
         </p:txBody>
       </p:sp>
       <p:cxnSp>
         <p:nvCxnSpPr>
-          <p:cNvPr id="60" name="Straight Arrow Connector 59">
+          <p:cNvPr id="78" name="Elbow Connector 77">
             <a:extLst>
               <a:ext uri="{FF2B5EF4-FFF2-40B4-BE49-F238E27FC236}">
-                <a16:creationId xmlns:a16="http://schemas.microsoft.com/office/drawing/2014/main" id="{A37F68F9-8E72-3263-C496-3C80EE071247}"/>
+                <a16:creationId xmlns:a16="http://schemas.microsoft.com/office/drawing/2014/main" id="{79097C5E-F530-BABB-CD28-073C02C18998}"/>
               </a:ext>
             </a:extLst>
           </p:cNvPr>
           <p:cNvCxnSpPr>
-            <a:stCxn id="47" idx="2"/>
+            <a:cxnSpLocks/>
+            <a:stCxn id="7" idx="2"/>
           </p:cNvCxnSpPr>
           <p:nvPr/>
         </p:nvCxnSpPr>
         <p:spPr>
-          <a:xfrm>
-            <a:off x="5441193" y="4889456"/>
-            <a:ext cx="0" cy="272309"/>
+          <a:xfrm rot="5400000" flipH="1" flipV="1">
+            <a:off x="6713697" y="2525316"/>
+            <a:ext cx="154719" cy="4950176"/>
+          </a:xfrm>
+          <a:prstGeom prst="bentConnector4">
+            <a:avLst>
+              <a:gd name="adj1" fmla="val -147752"/>
+              <a:gd name="adj2" fmla="val 58289"/>
+            </a:avLst>
+          </a:prstGeom>
+          <a:ln>
+            <a:tailEnd type="triangle"/>
+          </a:ln>
+        </p:spPr>
+        <p:style>
+          <a:lnRef idx="1">
+            <a:schemeClr val="accent1"/>
+          </a:lnRef>
+          <a:fillRef idx="0">
+            <a:schemeClr val="accent1"/>
+          </a:fillRef>
+          <a:effectRef idx="0">
+            <a:schemeClr val="accent1"/>
+          </a:effectRef>
+          <a:fontRef idx="minor">
+            <a:schemeClr val="tx1"/>
+          </a:fontRef>
+        </p:style>
+      </p:cxnSp>
+      <p:sp>
+        <p:nvSpPr>
+          <p:cNvPr id="84" name="TextBox 83">
+            <a:extLst>
+              <a:ext uri="{FF2B5EF4-FFF2-40B4-BE49-F238E27FC236}">
+                <a16:creationId xmlns:a16="http://schemas.microsoft.com/office/drawing/2014/main" id="{42622CF4-DD20-AB91-0F65-4D6C72CCD45C}"/>
+              </a:ext>
+            </a:extLst>
+          </p:cNvPr>
+          <p:cNvSpPr txBox="1"/>
+          <p:nvPr/>
+        </p:nvSpPr>
+        <p:spPr>
+          <a:xfrm>
+            <a:off x="5091563" y="5188352"/>
+            <a:ext cx="537327" cy="246221"/>
+          </a:xfrm>
+          <a:prstGeom prst="rect">
+            <a:avLst/>
+          </a:prstGeom>
+          <a:solidFill>
+            <a:schemeClr val="bg1"/>
+          </a:solidFill>
+        </p:spPr>
+        <p:txBody>
+          <a:bodyPr wrap="square" rtlCol="0">
+            <a:spAutoFit/>
+          </a:bodyPr>
+          <a:lstStyle/>
+          <a:p>
+            <a:r>
+              <a:rPr lang="en-US" sz="1000" dirty="0"/>
+              <a:t>enable</a:t>
+            </a:r>
+          </a:p>
+        </p:txBody>
+      </p:sp>
+      <p:sp>
+        <p:nvSpPr>
+          <p:cNvPr id="89" name="TextBox 88">
+            <a:extLst>
+              <a:ext uri="{FF2B5EF4-FFF2-40B4-BE49-F238E27FC236}">
+                <a16:creationId xmlns:a16="http://schemas.microsoft.com/office/drawing/2014/main" id="{A70A7FA4-3214-D9A0-81D7-C1594B5F1BFF}"/>
+              </a:ext>
+            </a:extLst>
+          </p:cNvPr>
+          <p:cNvSpPr txBox="1"/>
+          <p:nvPr/>
+        </p:nvSpPr>
+        <p:spPr>
+          <a:xfrm>
+            <a:off x="1454795" y="5177383"/>
+            <a:ext cx="2869862" cy="861774"/>
+          </a:xfrm>
+          <a:prstGeom prst="rect">
+            <a:avLst/>
+          </a:prstGeom>
+          <a:noFill/>
+        </p:spPr>
+        <p:txBody>
+          <a:bodyPr wrap="square" rtlCol="0">
+            <a:spAutoFit/>
+          </a:bodyPr>
+          <a:lstStyle/>
+          <a:p>
+            <a:pPr marL="171450" indent="-171450">
+              <a:buFont typeface="Arial" panose="020B0604020202020204" pitchFamily="34" charset="0"/>
+              <a:buChar char="•"/>
+            </a:pPr>
+            <a:r>
+              <a:rPr lang="en-US" sz="1000" dirty="0"/>
+              <a:t>Multiple Business Domain capabilities map to Data Domain Products</a:t>
+            </a:r>
+          </a:p>
+          <a:p>
+            <a:pPr marL="171450" indent="-171450">
+              <a:buFont typeface="Arial" panose="020B0604020202020204" pitchFamily="34" charset="0"/>
+              <a:buChar char="•"/>
+            </a:pPr>
+            <a:r>
+              <a:rPr lang="en-US" sz="1000" dirty="0"/>
+              <a:t>Ontology defined by Business / Data Architect- Conflict resolution (CDO)</a:t>
+            </a:r>
+          </a:p>
+          <a:p>
+            <a:pPr marL="171450" indent="-171450">
+              <a:buFont typeface="Arial" panose="020B0604020202020204" pitchFamily="34" charset="0"/>
+              <a:buChar char="•"/>
+            </a:pPr>
+            <a:r>
+              <a:rPr lang="en-US" sz="1000" dirty="0"/>
+              <a:t>Checks &amp; Balances ( CDO)</a:t>
+            </a:r>
+          </a:p>
+        </p:txBody>
+      </p:sp>
+      <p:cxnSp>
+        <p:nvCxnSpPr>
+          <p:cNvPr id="94" name="Straight Arrow Connector 93">
+            <a:extLst>
+              <a:ext uri="{FF2B5EF4-FFF2-40B4-BE49-F238E27FC236}">
+                <a16:creationId xmlns:a16="http://schemas.microsoft.com/office/drawing/2014/main" id="{BC2B1ACA-12D0-4775-EFC1-DAC69FE0B583}"/>
+              </a:ext>
+            </a:extLst>
+          </p:cNvPr>
+          <p:cNvCxnSpPr/>
+          <p:nvPr/>
+        </p:nvCxnSpPr>
+        <p:spPr>
+          <a:xfrm>
+            <a:off x="2647507" y="2168065"/>
+            <a:ext cx="659219" cy="0"/>
           </a:xfrm>
           <a:prstGeom prst="straightConnector1">
             <a:avLst/>
@@ -6952,28 +7513,148 @@
       </p:cxnSp>
       <p:cxnSp>
         <p:nvCxnSpPr>
-          <p:cNvPr id="62" name="Elbow Connector 61">
+          <p:cNvPr id="95" name="Straight Arrow Connector 94">
             <a:extLst>
               <a:ext uri="{FF2B5EF4-FFF2-40B4-BE49-F238E27FC236}">
-                <a16:creationId xmlns:a16="http://schemas.microsoft.com/office/drawing/2014/main" id="{7514F68A-21A9-88BD-BA14-E3091B271031}"/>
+                <a16:creationId xmlns:a16="http://schemas.microsoft.com/office/drawing/2014/main" id="{F30FCBC1-FA5B-8741-3448-3DB69C52BF18}"/>
               </a:ext>
             </a:extLst>
           </p:cNvPr>
           <p:cNvCxnSpPr>
-            <a:stCxn id="48" idx="3"/>
-            <a:endCxn id="21" idx="3"/>
+            <a:cxnSpLocks/>
           </p:cNvCxnSpPr>
           <p:nvPr/>
         </p:nvCxnSpPr>
         <p:spPr>
-          <a:xfrm flipV="1">
-            <a:off x="5846523" y="2104590"/>
-            <a:ext cx="4832727" cy="3180286"/>
-          </a:xfrm>
-          <a:prstGeom prst="bentConnector3">
-            <a:avLst>
-              <a:gd name="adj1" fmla="val 104730"/>
-            </a:avLst>
+          <a:xfrm flipH="1">
+            <a:off x="2624351" y="3408380"/>
+            <a:ext cx="594671" cy="13860"/>
+          </a:xfrm>
+          <a:prstGeom prst="straightConnector1">
+            <a:avLst/>
+          </a:prstGeom>
+          <a:ln>
+            <a:tailEnd type="triangle"/>
+          </a:ln>
+        </p:spPr>
+        <p:style>
+          <a:lnRef idx="1">
+            <a:schemeClr val="accent1"/>
+          </a:lnRef>
+          <a:fillRef idx="0">
+            <a:schemeClr val="accent1"/>
+          </a:fillRef>
+          <a:effectRef idx="0">
+            <a:schemeClr val="accent1"/>
+          </a:effectRef>
+          <a:fontRef idx="minor">
+            <a:schemeClr val="tx1"/>
+          </a:fontRef>
+        </p:style>
+      </p:cxnSp>
+      <p:cxnSp>
+        <p:nvCxnSpPr>
+          <p:cNvPr id="99" name="Straight Arrow Connector 98">
+            <a:extLst>
+              <a:ext uri="{FF2B5EF4-FFF2-40B4-BE49-F238E27FC236}">
+                <a16:creationId xmlns:a16="http://schemas.microsoft.com/office/drawing/2014/main" id="{DD93444D-C790-DE54-D1C4-2C4AE271A6AB}"/>
+              </a:ext>
+            </a:extLst>
+          </p:cNvPr>
+          <p:cNvCxnSpPr>
+            <a:cxnSpLocks/>
+          </p:cNvCxnSpPr>
+          <p:nvPr/>
+        </p:nvCxnSpPr>
+        <p:spPr>
+          <a:xfrm flipH="1">
+            <a:off x="2663318" y="4426439"/>
+            <a:ext cx="594671" cy="13860"/>
+          </a:xfrm>
+          <a:prstGeom prst="straightConnector1">
+            <a:avLst/>
+          </a:prstGeom>
+          <a:ln>
+            <a:tailEnd type="triangle"/>
+          </a:ln>
+        </p:spPr>
+        <p:style>
+          <a:lnRef idx="1">
+            <a:schemeClr val="accent1"/>
+          </a:lnRef>
+          <a:fillRef idx="0">
+            <a:schemeClr val="accent1"/>
+          </a:fillRef>
+          <a:effectRef idx="0">
+            <a:schemeClr val="accent1"/>
+          </a:effectRef>
+          <a:fontRef idx="minor">
+            <a:schemeClr val="tx1"/>
+          </a:fontRef>
+        </p:style>
+      </p:cxnSp>
+      <p:cxnSp>
+        <p:nvCxnSpPr>
+          <p:cNvPr id="100" name="Straight Arrow Connector 99">
+            <a:extLst>
+              <a:ext uri="{FF2B5EF4-FFF2-40B4-BE49-F238E27FC236}">
+                <a16:creationId xmlns:a16="http://schemas.microsoft.com/office/drawing/2014/main" id="{CE968558-9FD3-3AB1-419C-2B6DB6EF2AA7}"/>
+              </a:ext>
+            </a:extLst>
+          </p:cNvPr>
+          <p:cNvCxnSpPr>
+            <a:cxnSpLocks/>
+          </p:cNvCxnSpPr>
+          <p:nvPr/>
+        </p:nvCxnSpPr>
+        <p:spPr>
+          <a:xfrm>
+            <a:off x="5283653" y="3038796"/>
+            <a:ext cx="516684" cy="0"/>
+          </a:xfrm>
+          <a:prstGeom prst="straightConnector1">
+            <a:avLst/>
+          </a:prstGeom>
+          <a:ln>
+            <a:tailEnd type="triangle"/>
+          </a:ln>
+        </p:spPr>
+        <p:style>
+          <a:lnRef idx="1">
+            <a:schemeClr val="accent1"/>
+          </a:lnRef>
+          <a:fillRef idx="0">
+            <a:schemeClr val="accent1"/>
+          </a:fillRef>
+          <a:effectRef idx="0">
+            <a:schemeClr val="accent1"/>
+          </a:effectRef>
+          <a:fontRef idx="minor">
+            <a:schemeClr val="tx1"/>
+          </a:fontRef>
+        </p:style>
+      </p:cxnSp>
+      <p:cxnSp>
+        <p:nvCxnSpPr>
+          <p:cNvPr id="102" name="Straight Arrow Connector 101">
+            <a:extLst>
+              <a:ext uri="{FF2B5EF4-FFF2-40B4-BE49-F238E27FC236}">
+                <a16:creationId xmlns:a16="http://schemas.microsoft.com/office/drawing/2014/main" id="{40D674D1-CF38-7053-459E-5F0E2EFD4EBD}"/>
+              </a:ext>
+            </a:extLst>
+          </p:cNvPr>
+          <p:cNvCxnSpPr>
+            <a:cxnSpLocks/>
+          </p:cNvCxnSpPr>
+          <p:nvPr/>
+        </p:nvCxnSpPr>
+        <p:spPr>
+          <a:xfrm>
+            <a:off x="7785849" y="2807251"/>
+            <a:ext cx="516684" cy="0"/>
+          </a:xfrm>
+          <a:prstGeom prst="straightConnector1">
+            <a:avLst/>
           </a:prstGeom>
           <a:ln>
             <a:tailEnd type="triangle"/>
@@ -6997,7 +7678,2706 @@
     </p:spTree>
     <p:extLst>
       <p:ext uri="{BB962C8B-B14F-4D97-AF65-F5344CB8AC3E}">
-        <p14:creationId xmlns:p14="http://schemas.microsoft.com/office/powerpoint/2010/main" val="644304852"/>
+        <p14:creationId xmlns:p14="http://schemas.microsoft.com/office/powerpoint/2010/main" val="1387433062"/>
+      </p:ext>
+    </p:extLst>
+  </p:cSld>
+  <p:clrMapOvr>
+    <a:masterClrMapping/>
+  </p:clrMapOvr>
+</p:sld>
+</file>
+
+<file path=ppt/slides/slide12.xml><?xml version="1.0" encoding="utf-8"?>
+<p:sld xmlns:a="http://schemas.openxmlformats.org/drawingml/2006/main" xmlns:r="http://schemas.openxmlformats.org/officeDocument/2006/relationships" xmlns:p="http://schemas.openxmlformats.org/presentationml/2006/main">
+  <p:cSld>
+    <p:spTree>
+      <p:nvGrpSpPr>
+        <p:cNvPr id="1" name=""/>
+        <p:cNvGrpSpPr/>
+        <p:nvPr/>
+      </p:nvGrpSpPr>
+      <p:grpSpPr>
+        <a:xfrm>
+          <a:off x="0" y="0"/>
+          <a:ext cx="0" cy="0"/>
+          <a:chOff x="0" y="0"/>
+          <a:chExt cx="0" cy="0"/>
+        </a:xfrm>
+      </p:grpSpPr>
+      <p:sp>
+        <p:nvSpPr>
+          <p:cNvPr id="57" name="Rectangle 56">
+            <a:extLst>
+              <a:ext uri="{FF2B5EF4-FFF2-40B4-BE49-F238E27FC236}">
+                <a16:creationId xmlns:a16="http://schemas.microsoft.com/office/drawing/2014/main" id="{AB49D89B-7DA1-C22C-0458-586F1CE66E4D}"/>
+              </a:ext>
+            </a:extLst>
+          </p:cNvPr>
+          <p:cNvSpPr/>
+          <p:nvPr/>
+        </p:nvSpPr>
+        <p:spPr>
+          <a:xfrm>
+            <a:off x="8600116" y="1461501"/>
+            <a:ext cx="2275367" cy="2825758"/>
+          </a:xfrm>
+          <a:prstGeom prst="rect">
+            <a:avLst/>
+          </a:prstGeom>
+          <a:solidFill>
+            <a:schemeClr val="bg1"/>
+          </a:solidFill>
+          <a:ln w="19050">
+            <a:solidFill>
+              <a:srgbClr val="00B050"/>
+            </a:solidFill>
+          </a:ln>
+        </p:spPr>
+        <p:style>
+          <a:lnRef idx="2">
+            <a:schemeClr val="accent1">
+              <a:shade val="15000"/>
+            </a:schemeClr>
+          </a:lnRef>
+          <a:fillRef idx="1">
+            <a:schemeClr val="accent1"/>
+          </a:fillRef>
+          <a:effectRef idx="0">
+            <a:schemeClr val="accent1"/>
+          </a:effectRef>
+          <a:fontRef idx="minor">
+            <a:schemeClr val="lt1"/>
+          </a:fontRef>
+        </p:style>
+        <p:txBody>
+          <a:bodyPr rtlCol="0" anchor="ctr"/>
+          <a:lstStyle/>
+          <a:p>
+            <a:pPr algn="ctr"/>
+            <a:endParaRPr lang="en-US"/>
+          </a:p>
+        </p:txBody>
+      </p:sp>
+      <p:sp>
+        <p:nvSpPr>
+          <p:cNvPr id="107" name="Rectangle 106">
+            <a:extLst>
+              <a:ext uri="{FF2B5EF4-FFF2-40B4-BE49-F238E27FC236}">
+                <a16:creationId xmlns:a16="http://schemas.microsoft.com/office/drawing/2014/main" id="{B6EE123E-CE7E-347E-8984-73E941DE5052}"/>
+              </a:ext>
+            </a:extLst>
+          </p:cNvPr>
+          <p:cNvSpPr/>
+          <p:nvPr/>
+        </p:nvSpPr>
+        <p:spPr>
+          <a:xfrm>
+            <a:off x="2160926" y="1461501"/>
+            <a:ext cx="5350357" cy="3001862"/>
+          </a:xfrm>
+          <a:prstGeom prst="rect">
+            <a:avLst/>
+          </a:prstGeom>
+          <a:solidFill>
+            <a:schemeClr val="bg1"/>
+          </a:solidFill>
+          <a:ln w="9525">
+            <a:solidFill>
+              <a:schemeClr val="bg1">
+                <a:lumMod val="50000"/>
+              </a:schemeClr>
+            </a:solidFill>
+          </a:ln>
+        </p:spPr>
+        <p:style>
+          <a:lnRef idx="2">
+            <a:schemeClr val="accent1">
+              <a:shade val="15000"/>
+            </a:schemeClr>
+          </a:lnRef>
+          <a:fillRef idx="1">
+            <a:schemeClr val="accent1"/>
+          </a:fillRef>
+          <a:effectRef idx="0">
+            <a:schemeClr val="accent1"/>
+          </a:effectRef>
+          <a:fontRef idx="minor">
+            <a:schemeClr val="lt1"/>
+          </a:fontRef>
+        </p:style>
+        <p:txBody>
+          <a:bodyPr rtlCol="0" anchor="ctr"/>
+          <a:lstStyle/>
+          <a:p>
+            <a:pPr algn="ctr"/>
+            <a:endParaRPr lang="en-US" sz="1000" dirty="0">
+              <a:solidFill>
+                <a:schemeClr val="tx1"/>
+              </a:solidFill>
+            </a:endParaRPr>
+          </a:p>
+        </p:txBody>
+      </p:sp>
+      <p:sp>
+        <p:nvSpPr>
+          <p:cNvPr id="78" name="Rectangle 77">
+            <a:extLst>
+              <a:ext uri="{FF2B5EF4-FFF2-40B4-BE49-F238E27FC236}">
+                <a16:creationId xmlns:a16="http://schemas.microsoft.com/office/drawing/2014/main" id="{A9543EC5-A58D-4F41-2806-1572871C9C04}"/>
+              </a:ext>
+            </a:extLst>
+          </p:cNvPr>
+          <p:cNvSpPr/>
+          <p:nvPr/>
+        </p:nvSpPr>
+        <p:spPr>
+          <a:xfrm>
+            <a:off x="4040734" y="1638535"/>
+            <a:ext cx="1714204" cy="2739336"/>
+          </a:xfrm>
+          <a:prstGeom prst="rect">
+            <a:avLst/>
+          </a:prstGeom>
+          <a:solidFill>
+            <a:schemeClr val="bg1"/>
+          </a:solidFill>
+          <a:ln w="3175">
+            <a:solidFill>
+              <a:srgbClr val="00B050"/>
+            </a:solidFill>
+          </a:ln>
+        </p:spPr>
+        <p:style>
+          <a:lnRef idx="2">
+            <a:schemeClr val="accent1">
+              <a:shade val="15000"/>
+            </a:schemeClr>
+          </a:lnRef>
+          <a:fillRef idx="1">
+            <a:schemeClr val="accent1"/>
+          </a:fillRef>
+          <a:effectRef idx="0">
+            <a:schemeClr val="accent1"/>
+          </a:effectRef>
+          <a:fontRef idx="minor">
+            <a:schemeClr val="lt1"/>
+          </a:fontRef>
+        </p:style>
+        <p:txBody>
+          <a:bodyPr rtlCol="0" anchor="ctr"/>
+          <a:lstStyle/>
+          <a:p>
+            <a:pPr algn="ctr"/>
+            <a:endParaRPr lang="en-US" sz="1200" dirty="0">
+              <a:solidFill>
+                <a:schemeClr val="tx1"/>
+              </a:solidFill>
+            </a:endParaRPr>
+          </a:p>
+        </p:txBody>
+      </p:sp>
+      <p:sp>
+        <p:nvSpPr>
+          <p:cNvPr id="2" name="TextBox 1">
+            <a:extLst>
+              <a:ext uri="{FF2B5EF4-FFF2-40B4-BE49-F238E27FC236}">
+                <a16:creationId xmlns:a16="http://schemas.microsoft.com/office/drawing/2014/main" id="{E05C4EE9-97B0-6EA4-ACA1-920D6F36712E}"/>
+              </a:ext>
+            </a:extLst>
+          </p:cNvPr>
+          <p:cNvSpPr txBox="1"/>
+          <p:nvPr/>
+        </p:nvSpPr>
+        <p:spPr>
+          <a:xfrm>
+            <a:off x="3957401" y="95693"/>
+            <a:ext cx="2138599" cy="369332"/>
+          </a:xfrm>
+          <a:prstGeom prst="rect">
+            <a:avLst/>
+          </a:prstGeom>
+          <a:noFill/>
+        </p:spPr>
+        <p:txBody>
+          <a:bodyPr wrap="none" rtlCol="0">
+            <a:spAutoFit/>
+          </a:bodyPr>
+          <a:lstStyle/>
+          <a:p>
+            <a:r>
+              <a:rPr lang="en-US" dirty="0"/>
+              <a:t>What is next for RISK</a:t>
+            </a:r>
+          </a:p>
+        </p:txBody>
+      </p:sp>
+      <p:sp>
+        <p:nvSpPr>
+          <p:cNvPr id="3" name="Rectangle 2">
+            <a:extLst>
+              <a:ext uri="{FF2B5EF4-FFF2-40B4-BE49-F238E27FC236}">
+                <a16:creationId xmlns:a16="http://schemas.microsoft.com/office/drawing/2014/main" id="{543406EC-8653-5085-1826-80EF694B99A0}"/>
+              </a:ext>
+            </a:extLst>
+          </p:cNvPr>
+          <p:cNvSpPr/>
+          <p:nvPr/>
+        </p:nvSpPr>
+        <p:spPr>
+          <a:xfrm>
+            <a:off x="4163905" y="3160337"/>
+            <a:ext cx="1256604" cy="603586"/>
+          </a:xfrm>
+          <a:prstGeom prst="rect">
+            <a:avLst/>
+          </a:prstGeom>
+          <a:solidFill>
+            <a:schemeClr val="bg1"/>
+          </a:solidFill>
+          <a:ln w="19050">
+            <a:solidFill>
+              <a:srgbClr val="00B050"/>
+            </a:solidFill>
+          </a:ln>
+        </p:spPr>
+        <p:style>
+          <a:lnRef idx="2">
+            <a:schemeClr val="accent1">
+              <a:shade val="15000"/>
+            </a:schemeClr>
+          </a:lnRef>
+          <a:fillRef idx="1">
+            <a:schemeClr val="accent1"/>
+          </a:fillRef>
+          <a:effectRef idx="0">
+            <a:schemeClr val="accent1"/>
+          </a:effectRef>
+          <a:fontRef idx="minor">
+            <a:schemeClr val="lt1"/>
+          </a:fontRef>
+        </p:style>
+        <p:txBody>
+          <a:bodyPr rtlCol="0" anchor="ctr"/>
+          <a:lstStyle/>
+          <a:p>
+            <a:pPr algn="ctr"/>
+            <a:r>
+              <a:rPr lang="en-US" sz="1200" dirty="0">
+                <a:solidFill>
+                  <a:schemeClr val="tx1"/>
+                </a:solidFill>
+              </a:rPr>
+              <a:t>Risk </a:t>
+            </a:r>
+            <a:r>
+              <a:rPr lang="en-US" sz="1200" dirty="0" err="1">
+                <a:solidFill>
+                  <a:schemeClr val="tx1"/>
+                </a:solidFill>
+              </a:rPr>
+              <a:t>Apps</a:t>
+            </a:r>
+            <a:r>
+              <a:rPr lang="en-US" sz="1200" dirty="0" err="1"/>
+              <a:t>is</a:t>
+            </a:r>
+            <a:endParaRPr lang="en-US" sz="1200" dirty="0"/>
+          </a:p>
+        </p:txBody>
+      </p:sp>
+      <p:sp>
+        <p:nvSpPr>
+          <p:cNvPr id="4" name="Rectangle 3">
+            <a:extLst>
+              <a:ext uri="{FF2B5EF4-FFF2-40B4-BE49-F238E27FC236}">
+                <a16:creationId xmlns:a16="http://schemas.microsoft.com/office/drawing/2014/main" id="{DD2385E2-06D6-377D-7604-D3DDC5E3F537}"/>
+              </a:ext>
+            </a:extLst>
+          </p:cNvPr>
+          <p:cNvSpPr/>
+          <p:nvPr/>
+        </p:nvSpPr>
+        <p:spPr>
+          <a:xfrm>
+            <a:off x="1004777" y="2995575"/>
+            <a:ext cx="988828" cy="768348"/>
+          </a:xfrm>
+          <a:prstGeom prst="rect">
+            <a:avLst/>
+          </a:prstGeom>
+          <a:solidFill>
+            <a:schemeClr val="bg1"/>
+          </a:solidFill>
+          <a:ln w="19050">
+            <a:solidFill>
+              <a:srgbClr val="00B050"/>
+            </a:solidFill>
+          </a:ln>
+        </p:spPr>
+        <p:style>
+          <a:lnRef idx="2">
+            <a:schemeClr val="accent1">
+              <a:shade val="15000"/>
+            </a:schemeClr>
+          </a:lnRef>
+          <a:fillRef idx="1">
+            <a:schemeClr val="accent1"/>
+          </a:fillRef>
+          <a:effectRef idx="0">
+            <a:schemeClr val="accent1"/>
+          </a:effectRef>
+          <a:fontRef idx="minor">
+            <a:schemeClr val="lt1"/>
+          </a:fontRef>
+        </p:style>
+        <p:txBody>
+          <a:bodyPr rtlCol="0" anchor="ctr"/>
+          <a:lstStyle/>
+          <a:p>
+            <a:pPr algn="ctr"/>
+            <a:r>
+              <a:rPr lang="en-US" sz="800" dirty="0">
+                <a:solidFill>
+                  <a:schemeClr val="tx1"/>
+                </a:solidFill>
+              </a:rPr>
+              <a:t>Data Sources</a:t>
+            </a:r>
+          </a:p>
+        </p:txBody>
+      </p:sp>
+      <p:sp>
+        <p:nvSpPr>
+          <p:cNvPr id="5" name="TextBox 4">
+            <a:extLst>
+              <a:ext uri="{FF2B5EF4-FFF2-40B4-BE49-F238E27FC236}">
+                <a16:creationId xmlns:a16="http://schemas.microsoft.com/office/drawing/2014/main" id="{83A7944A-D68A-F745-032D-D3689E14D3A8}"/>
+              </a:ext>
+            </a:extLst>
+          </p:cNvPr>
+          <p:cNvSpPr txBox="1"/>
+          <p:nvPr/>
+        </p:nvSpPr>
+        <p:spPr>
+          <a:xfrm>
+            <a:off x="98940" y="2606381"/>
+            <a:ext cx="705771" cy="276999"/>
+          </a:xfrm>
+          <a:prstGeom prst="rect">
+            <a:avLst/>
+          </a:prstGeom>
+          <a:noFill/>
+        </p:spPr>
+        <p:txBody>
+          <a:bodyPr wrap="none" rtlCol="0">
+            <a:spAutoFit/>
+          </a:bodyPr>
+          <a:lstStyle/>
+          <a:p>
+            <a:r>
+              <a:rPr lang="en-US" sz="1200" dirty="0"/>
+              <a:t>Internal </a:t>
+            </a:r>
+          </a:p>
+        </p:txBody>
+      </p:sp>
+      <p:sp>
+        <p:nvSpPr>
+          <p:cNvPr id="6" name="TextBox 5">
+            <a:extLst>
+              <a:ext uri="{FF2B5EF4-FFF2-40B4-BE49-F238E27FC236}">
+                <a16:creationId xmlns:a16="http://schemas.microsoft.com/office/drawing/2014/main" id="{56ABA2BF-467A-D1D8-089D-C29D92D4242E}"/>
+              </a:ext>
+            </a:extLst>
+          </p:cNvPr>
+          <p:cNvSpPr txBox="1"/>
+          <p:nvPr/>
+        </p:nvSpPr>
+        <p:spPr>
+          <a:xfrm>
+            <a:off x="116958" y="3847582"/>
+            <a:ext cx="696409" cy="276999"/>
+          </a:xfrm>
+          <a:prstGeom prst="rect">
+            <a:avLst/>
+          </a:prstGeom>
+          <a:noFill/>
+        </p:spPr>
+        <p:txBody>
+          <a:bodyPr wrap="none" rtlCol="0">
+            <a:spAutoFit/>
+          </a:bodyPr>
+          <a:lstStyle/>
+          <a:p>
+            <a:r>
+              <a:rPr lang="en-US" sz="1200" dirty="0"/>
+              <a:t>External</a:t>
+            </a:r>
+          </a:p>
+        </p:txBody>
+      </p:sp>
+      <p:cxnSp>
+        <p:nvCxnSpPr>
+          <p:cNvPr id="8" name="Elbow Connector 7">
+            <a:extLst>
+              <a:ext uri="{FF2B5EF4-FFF2-40B4-BE49-F238E27FC236}">
+                <a16:creationId xmlns:a16="http://schemas.microsoft.com/office/drawing/2014/main" id="{D6F85A52-0C89-F4F7-42E8-00422B75BF2F}"/>
+              </a:ext>
+            </a:extLst>
+          </p:cNvPr>
+          <p:cNvCxnSpPr>
+            <a:cxnSpLocks/>
+            <a:stCxn id="5" idx="2"/>
+            <a:endCxn id="4" idx="1"/>
+          </p:cNvCxnSpPr>
+          <p:nvPr/>
+        </p:nvCxnSpPr>
+        <p:spPr>
+          <a:xfrm rot="16200000" flipH="1">
+            <a:off x="480117" y="2855088"/>
+            <a:ext cx="496369" cy="552951"/>
+          </a:xfrm>
+          <a:prstGeom prst="bentConnector2">
+            <a:avLst/>
+          </a:prstGeom>
+          <a:ln>
+            <a:tailEnd type="triangle"/>
+          </a:ln>
+        </p:spPr>
+        <p:style>
+          <a:lnRef idx="1">
+            <a:schemeClr val="accent1"/>
+          </a:lnRef>
+          <a:fillRef idx="0">
+            <a:schemeClr val="accent1"/>
+          </a:fillRef>
+          <a:effectRef idx="0">
+            <a:schemeClr val="accent1"/>
+          </a:effectRef>
+          <a:fontRef idx="minor">
+            <a:schemeClr val="tx1"/>
+          </a:fontRef>
+        </p:style>
+      </p:cxnSp>
+      <p:cxnSp>
+        <p:nvCxnSpPr>
+          <p:cNvPr id="9" name="Elbow Connector 8">
+            <a:extLst>
+              <a:ext uri="{FF2B5EF4-FFF2-40B4-BE49-F238E27FC236}">
+                <a16:creationId xmlns:a16="http://schemas.microsoft.com/office/drawing/2014/main" id="{6D5A5891-F2A9-7553-044E-804BC1A98099}"/>
+              </a:ext>
+            </a:extLst>
+          </p:cNvPr>
+          <p:cNvCxnSpPr>
+            <a:cxnSpLocks/>
+            <a:stCxn id="6" idx="0"/>
+          </p:cNvCxnSpPr>
+          <p:nvPr/>
+        </p:nvCxnSpPr>
+        <p:spPr>
+          <a:xfrm rot="5400000" flipH="1" flipV="1">
+            <a:off x="557152" y="3399957"/>
+            <a:ext cx="355637" cy="539615"/>
+          </a:xfrm>
+          <a:prstGeom prst="bentConnector2">
+            <a:avLst/>
+          </a:prstGeom>
+          <a:ln>
+            <a:tailEnd type="triangle"/>
+          </a:ln>
+        </p:spPr>
+        <p:style>
+          <a:lnRef idx="1">
+            <a:schemeClr val="accent1"/>
+          </a:lnRef>
+          <a:fillRef idx="0">
+            <a:schemeClr val="accent1"/>
+          </a:fillRef>
+          <a:effectRef idx="0">
+            <a:schemeClr val="accent1"/>
+          </a:effectRef>
+          <a:fontRef idx="minor">
+            <a:schemeClr val="tx1"/>
+          </a:fontRef>
+        </p:style>
+      </p:cxnSp>
+      <p:sp>
+        <p:nvSpPr>
+          <p:cNvPr id="17" name="Rectangle 16">
+            <a:extLst>
+              <a:ext uri="{FF2B5EF4-FFF2-40B4-BE49-F238E27FC236}">
+                <a16:creationId xmlns:a16="http://schemas.microsoft.com/office/drawing/2014/main" id="{B5FF9A27-5533-260B-A355-CFDD8FFE084F}"/>
+              </a:ext>
+            </a:extLst>
+          </p:cNvPr>
+          <p:cNvSpPr/>
+          <p:nvPr/>
+        </p:nvSpPr>
+        <p:spPr>
+          <a:xfrm>
+            <a:off x="2516973" y="3506012"/>
+            <a:ext cx="1256604" cy="871859"/>
+          </a:xfrm>
+          <a:prstGeom prst="rect">
+            <a:avLst/>
+          </a:prstGeom>
+          <a:solidFill>
+            <a:schemeClr val="bg1"/>
+          </a:solidFill>
+          <a:ln w="19050">
+            <a:solidFill>
+              <a:srgbClr val="00B050"/>
+            </a:solidFill>
+          </a:ln>
+        </p:spPr>
+        <p:style>
+          <a:lnRef idx="2">
+            <a:schemeClr val="accent1">
+              <a:shade val="15000"/>
+            </a:schemeClr>
+          </a:lnRef>
+          <a:fillRef idx="1">
+            <a:schemeClr val="accent1"/>
+          </a:fillRef>
+          <a:effectRef idx="0">
+            <a:schemeClr val="accent1"/>
+          </a:effectRef>
+          <a:fontRef idx="minor">
+            <a:schemeClr val="lt1"/>
+          </a:fontRef>
+        </p:style>
+        <p:txBody>
+          <a:bodyPr rtlCol="0" anchor="ctr"/>
+          <a:lstStyle/>
+          <a:p>
+            <a:pPr algn="ctr"/>
+            <a:r>
+              <a:rPr lang="en-US" sz="800" dirty="0">
+                <a:solidFill>
+                  <a:schemeClr val="tx1"/>
+                </a:solidFill>
+              </a:rPr>
+              <a:t>Data Distribution(Central)</a:t>
+            </a:r>
+          </a:p>
+          <a:p>
+            <a:pPr marL="171450" indent="-171450">
+              <a:buFont typeface="Arial" panose="020B0604020202020204" pitchFamily="34" charset="0"/>
+              <a:buChar char="•"/>
+            </a:pPr>
+            <a:r>
+              <a:rPr lang="en-US" sz="800" dirty="0">
+                <a:solidFill>
+                  <a:schemeClr val="tx1"/>
+                </a:solidFill>
+              </a:rPr>
+              <a:t>Veritas</a:t>
+            </a:r>
+          </a:p>
+          <a:p>
+            <a:pPr marL="171450" indent="-171450">
+              <a:buFont typeface="Arial" panose="020B0604020202020204" pitchFamily="34" charset="0"/>
+              <a:buChar char="•"/>
+            </a:pPr>
+            <a:r>
+              <a:rPr lang="en-US" sz="800" dirty="0" err="1">
+                <a:solidFill>
+                  <a:schemeClr val="tx1"/>
+                </a:solidFill>
+              </a:rPr>
+              <a:t>InfoP</a:t>
+            </a:r>
+            <a:endParaRPr lang="en-US" sz="800" dirty="0">
+              <a:solidFill>
+                <a:schemeClr val="tx1"/>
+              </a:solidFill>
+            </a:endParaRPr>
+          </a:p>
+          <a:p>
+            <a:pPr marL="171450" indent="-171450">
+              <a:buFont typeface="Arial" panose="020B0604020202020204" pitchFamily="34" charset="0"/>
+              <a:buChar char="•"/>
+            </a:pPr>
+            <a:r>
+              <a:rPr lang="en-US" sz="800" dirty="0" err="1">
+                <a:solidFill>
+                  <a:schemeClr val="tx1"/>
+                </a:solidFill>
+              </a:rPr>
+              <a:t>Dremio</a:t>
+            </a:r>
+            <a:endParaRPr lang="en-US" sz="800" dirty="0">
+              <a:solidFill>
+                <a:schemeClr val="tx1"/>
+              </a:solidFill>
+            </a:endParaRPr>
+          </a:p>
+          <a:p>
+            <a:pPr marL="171450" indent="-171450">
+              <a:buFont typeface="Arial" panose="020B0604020202020204" pitchFamily="34" charset="0"/>
+              <a:buChar char="•"/>
+            </a:pPr>
+            <a:r>
+              <a:rPr lang="en-US" sz="800" dirty="0">
+                <a:solidFill>
+                  <a:schemeClr val="tx1"/>
+                </a:solidFill>
+              </a:rPr>
+              <a:t>RDS</a:t>
+            </a:r>
+          </a:p>
+          <a:p>
+            <a:pPr marL="171450" indent="-171450">
+              <a:buFont typeface="Arial" panose="020B0604020202020204" pitchFamily="34" charset="0"/>
+              <a:buChar char="•"/>
+            </a:pPr>
+            <a:r>
+              <a:rPr lang="en-US" sz="800" dirty="0">
+                <a:solidFill>
+                  <a:schemeClr val="tx1"/>
+                </a:solidFill>
+              </a:rPr>
+              <a:t>CDS</a:t>
+            </a:r>
+          </a:p>
+        </p:txBody>
+      </p:sp>
+      <p:sp>
+        <p:nvSpPr>
+          <p:cNvPr id="20" name="Rectangle 19">
+            <a:extLst>
+              <a:ext uri="{FF2B5EF4-FFF2-40B4-BE49-F238E27FC236}">
+                <a16:creationId xmlns:a16="http://schemas.microsoft.com/office/drawing/2014/main" id="{80C2EE93-C803-2EEC-CA82-FF7097C4F5E3}"/>
+              </a:ext>
+            </a:extLst>
+          </p:cNvPr>
+          <p:cNvSpPr/>
+          <p:nvPr/>
+        </p:nvSpPr>
+        <p:spPr>
+          <a:xfrm>
+            <a:off x="2534741" y="2791004"/>
+            <a:ext cx="1221068" cy="369332"/>
+          </a:xfrm>
+          <a:prstGeom prst="rect">
+            <a:avLst/>
+          </a:prstGeom>
+          <a:solidFill>
+            <a:schemeClr val="bg1"/>
+          </a:solidFill>
+          <a:ln w="19050">
+            <a:solidFill>
+              <a:srgbClr val="00B050"/>
+            </a:solidFill>
+          </a:ln>
+        </p:spPr>
+        <p:style>
+          <a:lnRef idx="2">
+            <a:schemeClr val="accent1">
+              <a:shade val="15000"/>
+            </a:schemeClr>
+          </a:lnRef>
+          <a:fillRef idx="1">
+            <a:schemeClr val="accent1"/>
+          </a:fillRef>
+          <a:effectRef idx="0">
+            <a:schemeClr val="accent1"/>
+          </a:effectRef>
+          <a:fontRef idx="minor">
+            <a:schemeClr val="lt1"/>
+          </a:fontRef>
+        </p:style>
+        <p:txBody>
+          <a:bodyPr rtlCol="0" anchor="ctr"/>
+          <a:lstStyle/>
+          <a:p>
+            <a:pPr algn="ctr"/>
+            <a:r>
+              <a:rPr lang="en-US" sz="800" dirty="0">
+                <a:solidFill>
+                  <a:schemeClr val="tx1"/>
+                </a:solidFill>
+              </a:rPr>
+              <a:t>Direct Access</a:t>
+            </a:r>
+          </a:p>
+        </p:txBody>
+      </p:sp>
+      <p:cxnSp>
+        <p:nvCxnSpPr>
+          <p:cNvPr id="24" name="Elbow Connector 23">
+            <a:extLst>
+              <a:ext uri="{FF2B5EF4-FFF2-40B4-BE49-F238E27FC236}">
+                <a16:creationId xmlns:a16="http://schemas.microsoft.com/office/drawing/2014/main" id="{B66923CC-ACAC-F3A5-E066-ECDF4FA14F14}"/>
+              </a:ext>
+            </a:extLst>
+          </p:cNvPr>
+          <p:cNvCxnSpPr>
+            <a:stCxn id="4" idx="3"/>
+            <a:endCxn id="20" idx="1"/>
+          </p:cNvCxnSpPr>
+          <p:nvPr/>
+        </p:nvCxnSpPr>
+        <p:spPr>
+          <a:xfrm flipV="1">
+            <a:off x="1993605" y="2975670"/>
+            <a:ext cx="541136" cy="404079"/>
+          </a:xfrm>
+          <a:prstGeom prst="bentConnector3">
+            <a:avLst/>
+          </a:prstGeom>
+          <a:ln>
+            <a:tailEnd type="triangle"/>
+          </a:ln>
+        </p:spPr>
+        <p:style>
+          <a:lnRef idx="1">
+            <a:schemeClr val="accent1"/>
+          </a:lnRef>
+          <a:fillRef idx="0">
+            <a:schemeClr val="accent1"/>
+          </a:fillRef>
+          <a:effectRef idx="0">
+            <a:schemeClr val="accent1"/>
+          </a:effectRef>
+          <a:fontRef idx="minor">
+            <a:schemeClr val="tx1"/>
+          </a:fontRef>
+        </p:style>
+      </p:cxnSp>
+      <p:cxnSp>
+        <p:nvCxnSpPr>
+          <p:cNvPr id="25" name="Elbow Connector 24">
+            <a:extLst>
+              <a:ext uri="{FF2B5EF4-FFF2-40B4-BE49-F238E27FC236}">
+                <a16:creationId xmlns:a16="http://schemas.microsoft.com/office/drawing/2014/main" id="{3AC25AFD-7B7E-76F5-5183-A63B814A4E15}"/>
+              </a:ext>
+            </a:extLst>
+          </p:cNvPr>
+          <p:cNvCxnSpPr>
+            <a:cxnSpLocks/>
+            <a:stCxn id="4" idx="3"/>
+            <a:endCxn id="17" idx="1"/>
+          </p:cNvCxnSpPr>
+          <p:nvPr/>
+        </p:nvCxnSpPr>
+        <p:spPr>
+          <a:xfrm>
+            <a:off x="1993605" y="3379749"/>
+            <a:ext cx="523368" cy="562193"/>
+          </a:xfrm>
+          <a:prstGeom prst="bentConnector3">
+            <a:avLst/>
+          </a:prstGeom>
+          <a:ln>
+            <a:tailEnd type="triangle"/>
+          </a:ln>
+        </p:spPr>
+        <p:style>
+          <a:lnRef idx="1">
+            <a:schemeClr val="accent1"/>
+          </a:lnRef>
+          <a:fillRef idx="0">
+            <a:schemeClr val="accent1"/>
+          </a:fillRef>
+          <a:effectRef idx="0">
+            <a:schemeClr val="accent1"/>
+          </a:effectRef>
+          <a:fontRef idx="minor">
+            <a:schemeClr val="tx1"/>
+          </a:fontRef>
+        </p:style>
+      </p:cxnSp>
+      <p:sp>
+        <p:nvSpPr>
+          <p:cNvPr id="34" name="TextBox 33">
+            <a:extLst>
+              <a:ext uri="{FF2B5EF4-FFF2-40B4-BE49-F238E27FC236}">
+                <a16:creationId xmlns:a16="http://schemas.microsoft.com/office/drawing/2014/main" id="{69E9BCBB-5767-EACE-6726-B00A73021ABA}"/>
+              </a:ext>
+            </a:extLst>
+          </p:cNvPr>
+          <p:cNvSpPr txBox="1"/>
+          <p:nvPr/>
+        </p:nvSpPr>
+        <p:spPr>
+          <a:xfrm>
+            <a:off x="2498741" y="4787345"/>
+            <a:ext cx="1141659" cy="1046440"/>
+          </a:xfrm>
+          <a:prstGeom prst="rect">
+            <a:avLst/>
+          </a:prstGeom>
+          <a:noFill/>
+        </p:spPr>
+        <p:txBody>
+          <a:bodyPr wrap="none" rtlCol="0">
+            <a:spAutoFit/>
+          </a:bodyPr>
+          <a:lstStyle/>
+          <a:p>
+            <a:r>
+              <a:rPr lang="en-US" sz="1200" dirty="0"/>
+              <a:t>Mode</a:t>
+            </a:r>
+          </a:p>
+          <a:p>
+            <a:pPr marL="171450" indent="-171450">
+              <a:buFont typeface="Arial" panose="020B0604020202020204" pitchFamily="34" charset="0"/>
+              <a:buChar char="•"/>
+            </a:pPr>
+            <a:r>
+              <a:rPr lang="en-US" sz="1000" dirty="0"/>
+              <a:t>API (Rest)</a:t>
+            </a:r>
+          </a:p>
+          <a:p>
+            <a:pPr marL="171450" indent="-171450">
+              <a:buFont typeface="Arial" panose="020B0604020202020204" pitchFamily="34" charset="0"/>
+              <a:buChar char="•"/>
+            </a:pPr>
+            <a:r>
+              <a:rPr lang="en-US" sz="1000" dirty="0"/>
+              <a:t>Batch (files)</a:t>
+            </a:r>
+          </a:p>
+          <a:p>
+            <a:pPr marL="171450" indent="-171450">
+              <a:buFont typeface="Arial" panose="020B0604020202020204" pitchFamily="34" charset="0"/>
+              <a:buChar char="•"/>
+            </a:pPr>
+            <a:r>
+              <a:rPr lang="en-US" sz="1000" dirty="0" err="1"/>
+              <a:t>Dremio</a:t>
+            </a:r>
+            <a:r>
+              <a:rPr lang="en-US" sz="1000" dirty="0"/>
+              <a:t>(Query)</a:t>
+            </a:r>
+          </a:p>
+          <a:p>
+            <a:pPr marL="171450" indent="-171450">
+              <a:buFont typeface="Arial" panose="020B0604020202020204" pitchFamily="34" charset="0"/>
+              <a:buChar char="•"/>
+            </a:pPr>
+            <a:r>
+              <a:rPr lang="en-US" sz="1000" dirty="0"/>
+              <a:t>Streaming</a:t>
+            </a:r>
+          </a:p>
+          <a:p>
+            <a:pPr marL="171450" indent="-171450">
+              <a:buFont typeface="Arial" panose="020B0604020202020204" pitchFamily="34" charset="0"/>
+              <a:buChar char="•"/>
+            </a:pPr>
+            <a:r>
+              <a:rPr lang="en-US" sz="1000" dirty="0" err="1"/>
+              <a:t>websocket</a:t>
+            </a:r>
+            <a:endParaRPr lang="en-US" sz="1000" dirty="0"/>
+          </a:p>
+        </p:txBody>
+      </p:sp>
+      <p:cxnSp>
+        <p:nvCxnSpPr>
+          <p:cNvPr id="36" name="Elbow Connector 35">
+            <a:extLst>
+              <a:ext uri="{FF2B5EF4-FFF2-40B4-BE49-F238E27FC236}">
+                <a16:creationId xmlns:a16="http://schemas.microsoft.com/office/drawing/2014/main" id="{5C2000E9-1C3F-49C3-62B9-AA4A44FF7659}"/>
+              </a:ext>
+            </a:extLst>
+          </p:cNvPr>
+          <p:cNvCxnSpPr>
+            <a:cxnSpLocks/>
+            <a:stCxn id="20" idx="3"/>
+            <a:endCxn id="3" idx="1"/>
+          </p:cNvCxnSpPr>
+          <p:nvPr/>
+        </p:nvCxnSpPr>
+        <p:spPr>
+          <a:xfrm>
+            <a:off x="3755809" y="2975670"/>
+            <a:ext cx="408096" cy="486460"/>
+          </a:xfrm>
+          <a:prstGeom prst="bentConnector3">
+            <a:avLst/>
+          </a:prstGeom>
+          <a:ln>
+            <a:tailEnd type="triangle"/>
+          </a:ln>
+        </p:spPr>
+        <p:style>
+          <a:lnRef idx="1">
+            <a:schemeClr val="accent1"/>
+          </a:lnRef>
+          <a:fillRef idx="0">
+            <a:schemeClr val="accent1"/>
+          </a:fillRef>
+          <a:effectRef idx="0">
+            <a:schemeClr val="accent1"/>
+          </a:effectRef>
+          <a:fontRef idx="minor">
+            <a:schemeClr val="tx1"/>
+          </a:fontRef>
+        </p:style>
+      </p:cxnSp>
+      <p:cxnSp>
+        <p:nvCxnSpPr>
+          <p:cNvPr id="37" name="Elbow Connector 36">
+            <a:extLst>
+              <a:ext uri="{FF2B5EF4-FFF2-40B4-BE49-F238E27FC236}">
+                <a16:creationId xmlns:a16="http://schemas.microsoft.com/office/drawing/2014/main" id="{B90D0460-6812-14EE-98D5-B33066D903EE}"/>
+              </a:ext>
+            </a:extLst>
+          </p:cNvPr>
+          <p:cNvCxnSpPr>
+            <a:cxnSpLocks/>
+            <a:stCxn id="17" idx="3"/>
+          </p:cNvCxnSpPr>
+          <p:nvPr/>
+        </p:nvCxnSpPr>
+        <p:spPr>
+          <a:xfrm flipV="1">
+            <a:off x="3773577" y="3596271"/>
+            <a:ext cx="390327" cy="345671"/>
+          </a:xfrm>
+          <a:prstGeom prst="bentConnector3">
+            <a:avLst/>
+          </a:prstGeom>
+          <a:ln>
+            <a:tailEnd type="triangle"/>
+          </a:ln>
+        </p:spPr>
+        <p:style>
+          <a:lnRef idx="1">
+            <a:schemeClr val="accent1"/>
+          </a:lnRef>
+          <a:fillRef idx="0">
+            <a:schemeClr val="accent1"/>
+          </a:fillRef>
+          <a:effectRef idx="0">
+            <a:schemeClr val="accent1"/>
+          </a:effectRef>
+          <a:fontRef idx="minor">
+            <a:schemeClr val="tx1"/>
+          </a:fontRef>
+        </p:style>
+      </p:cxnSp>
+      <p:sp>
+        <p:nvSpPr>
+          <p:cNvPr id="40" name="TextBox 39">
+            <a:extLst>
+              <a:ext uri="{FF2B5EF4-FFF2-40B4-BE49-F238E27FC236}">
+                <a16:creationId xmlns:a16="http://schemas.microsoft.com/office/drawing/2014/main" id="{86DC0681-BAFE-FD6B-7A98-50AFF85EDB73}"/>
+              </a:ext>
+            </a:extLst>
+          </p:cNvPr>
+          <p:cNvSpPr txBox="1"/>
+          <p:nvPr/>
+        </p:nvSpPr>
+        <p:spPr>
+          <a:xfrm>
+            <a:off x="4203790" y="4746575"/>
+            <a:ext cx="1446230" cy="1046440"/>
+          </a:xfrm>
+          <a:prstGeom prst="rect">
+            <a:avLst/>
+          </a:prstGeom>
+          <a:noFill/>
+        </p:spPr>
+        <p:txBody>
+          <a:bodyPr wrap="none" rtlCol="0">
+            <a:spAutoFit/>
+          </a:bodyPr>
+          <a:lstStyle/>
+          <a:p>
+            <a:r>
+              <a:rPr lang="en-US" sz="1200" dirty="0"/>
+              <a:t>Apps</a:t>
+            </a:r>
+          </a:p>
+          <a:p>
+            <a:pPr marL="171450" indent="-171450">
+              <a:buFont typeface="Arial" panose="020B0604020202020204" pitchFamily="34" charset="0"/>
+              <a:buChar char="•"/>
+            </a:pPr>
+            <a:r>
+              <a:rPr lang="en-US" sz="1000" dirty="0"/>
+              <a:t>Consume Data</a:t>
+            </a:r>
+          </a:p>
+          <a:p>
+            <a:pPr marL="171450" indent="-171450">
+              <a:buFont typeface="Arial" panose="020B0604020202020204" pitchFamily="34" charset="0"/>
+              <a:buChar char="•"/>
+            </a:pPr>
+            <a:r>
+              <a:rPr lang="en-US" sz="1000" dirty="0"/>
+              <a:t>Shape Data</a:t>
+            </a:r>
+          </a:p>
+          <a:p>
+            <a:pPr marL="171450" indent="-171450">
+              <a:buFont typeface="Arial" panose="020B0604020202020204" pitchFamily="34" charset="0"/>
+              <a:buChar char="•"/>
+            </a:pPr>
+            <a:r>
+              <a:rPr lang="en-US" sz="1000" dirty="0"/>
+              <a:t>DQ Checks</a:t>
+            </a:r>
+          </a:p>
+          <a:p>
+            <a:pPr marL="171450" indent="-171450">
+              <a:buFont typeface="Arial" panose="020B0604020202020204" pitchFamily="34" charset="0"/>
+              <a:buChar char="•"/>
+            </a:pPr>
+            <a:r>
+              <a:rPr lang="en-US" sz="1000" dirty="0"/>
+              <a:t>Process/Calculate</a:t>
+            </a:r>
+          </a:p>
+          <a:p>
+            <a:pPr marL="171450" indent="-171450">
+              <a:buFont typeface="Arial" panose="020B0604020202020204" pitchFamily="34" charset="0"/>
+              <a:buChar char="•"/>
+            </a:pPr>
+            <a:r>
+              <a:rPr lang="en-US" sz="1000" dirty="0"/>
+              <a:t>Produce Risk Metrics</a:t>
+            </a:r>
+          </a:p>
+        </p:txBody>
+      </p:sp>
+      <p:sp>
+        <p:nvSpPr>
+          <p:cNvPr id="42" name="Rectangle 41">
+            <a:extLst>
+              <a:ext uri="{FF2B5EF4-FFF2-40B4-BE49-F238E27FC236}">
+                <a16:creationId xmlns:a16="http://schemas.microsoft.com/office/drawing/2014/main" id="{3D7B0D09-F971-07EF-4291-51CA3DD504DC}"/>
+              </a:ext>
+            </a:extLst>
+          </p:cNvPr>
+          <p:cNvSpPr/>
+          <p:nvPr/>
+        </p:nvSpPr>
+        <p:spPr>
+          <a:xfrm>
+            <a:off x="6290430" y="2556011"/>
+            <a:ext cx="1555281" cy="570482"/>
+          </a:xfrm>
+          <a:prstGeom prst="rect">
+            <a:avLst/>
+          </a:prstGeom>
+          <a:solidFill>
+            <a:schemeClr val="bg1"/>
+          </a:solidFill>
+          <a:ln w="19050">
+            <a:solidFill>
+              <a:srgbClr val="00B050"/>
+            </a:solidFill>
+          </a:ln>
+        </p:spPr>
+        <p:style>
+          <a:lnRef idx="2">
+            <a:schemeClr val="accent1">
+              <a:shade val="15000"/>
+            </a:schemeClr>
+          </a:lnRef>
+          <a:fillRef idx="1">
+            <a:schemeClr val="accent1"/>
+          </a:fillRef>
+          <a:effectRef idx="0">
+            <a:schemeClr val="accent1"/>
+          </a:effectRef>
+          <a:fontRef idx="minor">
+            <a:schemeClr val="lt1"/>
+          </a:fontRef>
+        </p:style>
+        <p:txBody>
+          <a:bodyPr rtlCol="0" anchor="ctr"/>
+          <a:lstStyle/>
+          <a:p>
+            <a:pPr algn="ctr"/>
+            <a:r>
+              <a:rPr lang="en-US" sz="1200" dirty="0">
+                <a:solidFill>
+                  <a:schemeClr val="tx1"/>
+                </a:solidFill>
+              </a:rPr>
+              <a:t>Business</a:t>
+            </a:r>
+          </a:p>
+          <a:p>
+            <a:pPr algn="ctr"/>
+            <a:r>
+              <a:rPr lang="en-US" sz="1200" dirty="0">
+                <a:solidFill>
+                  <a:schemeClr val="tx1"/>
+                </a:solidFill>
+              </a:rPr>
+              <a:t>(Consumer)</a:t>
+            </a:r>
+          </a:p>
+        </p:txBody>
+      </p:sp>
+      <p:sp>
+        <p:nvSpPr>
+          <p:cNvPr id="43" name="TextBox 42">
+            <a:extLst>
+              <a:ext uri="{FF2B5EF4-FFF2-40B4-BE49-F238E27FC236}">
+                <a16:creationId xmlns:a16="http://schemas.microsoft.com/office/drawing/2014/main" id="{F85B225A-C1EB-8C3B-FD51-01057303A466}"/>
+              </a:ext>
+            </a:extLst>
+          </p:cNvPr>
+          <p:cNvSpPr txBox="1"/>
+          <p:nvPr/>
+        </p:nvSpPr>
+        <p:spPr>
+          <a:xfrm>
+            <a:off x="6239390" y="4733632"/>
+            <a:ext cx="1879041" cy="1015663"/>
+          </a:xfrm>
+          <a:prstGeom prst="rect">
+            <a:avLst/>
+          </a:prstGeom>
+          <a:noFill/>
+        </p:spPr>
+        <p:txBody>
+          <a:bodyPr wrap="none" rtlCol="0">
+            <a:spAutoFit/>
+          </a:bodyPr>
+          <a:lstStyle/>
+          <a:p>
+            <a:pPr marL="171450" indent="-171450">
+              <a:buFont typeface="Arial" panose="020B0604020202020204" pitchFamily="34" charset="0"/>
+              <a:buChar char="•"/>
+            </a:pPr>
+            <a:r>
+              <a:rPr lang="en-US" sz="1000" dirty="0"/>
+              <a:t>Business</a:t>
+            </a:r>
+          </a:p>
+          <a:p>
+            <a:pPr marL="171450" indent="-171450">
+              <a:buFont typeface="Arial" panose="020B0604020202020204" pitchFamily="34" charset="0"/>
+              <a:buChar char="•"/>
+            </a:pPr>
+            <a:r>
+              <a:rPr lang="en-US" sz="1000" dirty="0"/>
+              <a:t>Upstream/Downstream Apps</a:t>
+            </a:r>
+          </a:p>
+          <a:p>
+            <a:pPr marL="171450" indent="-171450">
+              <a:buFont typeface="Arial" panose="020B0604020202020204" pitchFamily="34" charset="0"/>
+              <a:buChar char="•"/>
+            </a:pPr>
+            <a:r>
+              <a:rPr lang="en-US" sz="1000" dirty="0"/>
+              <a:t>Published </a:t>
+            </a:r>
+          </a:p>
+          <a:p>
+            <a:pPr marL="628650" lvl="1" indent="-171450">
+              <a:buFont typeface="Arial" panose="020B0604020202020204" pitchFamily="34" charset="0"/>
+              <a:buChar char="•"/>
+            </a:pPr>
+            <a:r>
+              <a:rPr lang="en-US" sz="1000" dirty="0"/>
+              <a:t>CSV</a:t>
+            </a:r>
+          </a:p>
+          <a:p>
+            <a:pPr marL="628650" lvl="1" indent="-171450">
+              <a:buFont typeface="Arial" panose="020B0604020202020204" pitchFamily="34" charset="0"/>
+              <a:buChar char="•"/>
+            </a:pPr>
+            <a:r>
+              <a:rPr lang="en-US" sz="1000" dirty="0"/>
+              <a:t>Services</a:t>
+            </a:r>
+          </a:p>
+          <a:p>
+            <a:pPr marL="628650" lvl="1" indent="-171450">
+              <a:buFont typeface="Arial" panose="020B0604020202020204" pitchFamily="34" charset="0"/>
+              <a:buChar char="•"/>
+            </a:pPr>
+            <a:r>
+              <a:rPr lang="en-US" sz="1000" dirty="0"/>
+              <a:t>SQL Database</a:t>
+            </a:r>
+          </a:p>
+        </p:txBody>
+      </p:sp>
+      <p:sp>
+        <p:nvSpPr>
+          <p:cNvPr id="44" name="Rectangle 43">
+            <a:extLst>
+              <a:ext uri="{FF2B5EF4-FFF2-40B4-BE49-F238E27FC236}">
+                <a16:creationId xmlns:a16="http://schemas.microsoft.com/office/drawing/2014/main" id="{46C7B511-2A0B-259E-F1A2-58E1BA32DFFC}"/>
+              </a:ext>
+            </a:extLst>
+          </p:cNvPr>
+          <p:cNvSpPr/>
+          <p:nvPr/>
+        </p:nvSpPr>
+        <p:spPr>
+          <a:xfrm>
+            <a:off x="4163905" y="2090159"/>
+            <a:ext cx="1256604" cy="793178"/>
+          </a:xfrm>
+          <a:prstGeom prst="rect">
+            <a:avLst/>
+          </a:prstGeom>
+          <a:solidFill>
+            <a:srgbClr val="00B050"/>
+          </a:solidFill>
+          <a:ln w="19050">
+            <a:solidFill>
+              <a:srgbClr val="00B050"/>
+            </a:solidFill>
+          </a:ln>
+        </p:spPr>
+        <p:style>
+          <a:lnRef idx="2">
+            <a:schemeClr val="accent1">
+              <a:shade val="15000"/>
+            </a:schemeClr>
+          </a:lnRef>
+          <a:fillRef idx="1">
+            <a:schemeClr val="accent1"/>
+          </a:fillRef>
+          <a:effectRef idx="0">
+            <a:schemeClr val="accent1"/>
+          </a:effectRef>
+          <a:fontRef idx="minor">
+            <a:schemeClr val="lt1"/>
+          </a:fontRef>
+        </p:style>
+        <p:txBody>
+          <a:bodyPr rtlCol="0" anchor="ctr"/>
+          <a:lstStyle/>
+          <a:p>
+            <a:pPr algn="ctr"/>
+            <a:r>
+              <a:rPr lang="en-US" sz="1200" dirty="0">
+                <a:solidFill>
+                  <a:schemeClr val="bg1"/>
+                </a:solidFill>
+              </a:rPr>
+              <a:t>Storage</a:t>
+            </a:r>
+          </a:p>
+          <a:p>
+            <a:pPr algn="ctr"/>
+            <a:r>
+              <a:rPr lang="en-US" sz="1000" dirty="0">
+                <a:solidFill>
+                  <a:schemeClr val="bg1"/>
+                </a:solidFill>
+              </a:rPr>
+              <a:t>(risk produced Data)</a:t>
+            </a:r>
+          </a:p>
+        </p:txBody>
+      </p:sp>
+      <p:grpSp>
+        <p:nvGrpSpPr>
+          <p:cNvPr id="52" name="Group 51">
+            <a:extLst>
+              <a:ext uri="{FF2B5EF4-FFF2-40B4-BE49-F238E27FC236}">
+                <a16:creationId xmlns:a16="http://schemas.microsoft.com/office/drawing/2014/main" id="{4DF0D96D-C409-6BCF-6FBC-BA2DE0F4858E}"/>
+              </a:ext>
+            </a:extLst>
+          </p:cNvPr>
+          <p:cNvGrpSpPr/>
+          <p:nvPr/>
+        </p:nvGrpSpPr>
+        <p:grpSpPr>
+          <a:xfrm>
+            <a:off x="3971464" y="1644763"/>
+            <a:ext cx="1902970" cy="401514"/>
+            <a:chOff x="8313545" y="710114"/>
+            <a:chExt cx="1902970" cy="401514"/>
+          </a:xfrm>
+        </p:grpSpPr>
+        <p:sp>
+          <p:nvSpPr>
+            <p:cNvPr id="47" name="TextBox 46">
+              <a:extLst>
+                <a:ext uri="{FF2B5EF4-FFF2-40B4-BE49-F238E27FC236}">
+                  <a16:creationId xmlns:a16="http://schemas.microsoft.com/office/drawing/2014/main" id="{3100F3D1-0EC3-6616-4CE6-551E2361E539}"/>
+                </a:ext>
+              </a:extLst>
+            </p:cNvPr>
+            <p:cNvSpPr txBox="1"/>
+            <p:nvPr/>
+          </p:nvSpPr>
+          <p:spPr>
+            <a:xfrm>
+              <a:off x="8313545" y="711518"/>
+              <a:ext cx="1059906" cy="400110"/>
+            </a:xfrm>
+            <a:prstGeom prst="rect">
+              <a:avLst/>
+            </a:prstGeom>
+            <a:noFill/>
+          </p:spPr>
+          <p:txBody>
+            <a:bodyPr wrap="none" rtlCol="0">
+              <a:spAutoFit/>
+            </a:bodyPr>
+            <a:lstStyle/>
+            <a:p>
+              <a:pPr marL="285750" indent="-285750">
+                <a:buFont typeface="Arial" panose="020B0604020202020204" pitchFamily="34" charset="0"/>
+                <a:buChar char="•"/>
+              </a:pPr>
+              <a:r>
+                <a:rPr lang="en-US" sz="1000" dirty="0"/>
+                <a:t>File System</a:t>
+              </a:r>
+            </a:p>
+            <a:p>
+              <a:pPr marL="285750" indent="-285750">
+                <a:buFont typeface="Arial" panose="020B0604020202020204" pitchFamily="34" charset="0"/>
+                <a:buChar char="•"/>
+              </a:pPr>
+              <a:r>
+                <a:rPr lang="en-US" sz="1000" dirty="0"/>
+                <a:t>SQL DB</a:t>
+              </a:r>
+            </a:p>
+          </p:txBody>
+        </p:sp>
+        <p:sp>
+          <p:nvSpPr>
+            <p:cNvPr id="51" name="TextBox 50">
+              <a:extLst>
+                <a:ext uri="{FF2B5EF4-FFF2-40B4-BE49-F238E27FC236}">
+                  <a16:creationId xmlns:a16="http://schemas.microsoft.com/office/drawing/2014/main" id="{E252AF94-64FC-D20D-E3FC-22D618416295}"/>
+                </a:ext>
+              </a:extLst>
+            </p:cNvPr>
+            <p:cNvSpPr txBox="1"/>
+            <p:nvPr/>
+          </p:nvSpPr>
+          <p:spPr>
+            <a:xfrm>
+              <a:off x="9328130" y="710114"/>
+              <a:ext cx="888385" cy="400110"/>
+            </a:xfrm>
+            <a:prstGeom prst="rect">
+              <a:avLst/>
+            </a:prstGeom>
+            <a:noFill/>
+          </p:spPr>
+          <p:txBody>
+            <a:bodyPr wrap="none" rtlCol="0">
+              <a:spAutoFit/>
+            </a:bodyPr>
+            <a:lstStyle/>
+            <a:p>
+              <a:pPr marL="171450" indent="-171450">
+                <a:buFont typeface="Arial" panose="020B0604020202020204" pitchFamily="34" charset="0"/>
+                <a:buChar char="•"/>
+              </a:pPr>
+              <a:r>
+                <a:rPr lang="en-US" sz="1000" dirty="0" err="1"/>
+                <a:t>Hbase</a:t>
+              </a:r>
+              <a:endParaRPr lang="en-US" sz="1000" dirty="0"/>
+            </a:p>
+            <a:p>
+              <a:pPr marL="171450" indent="-171450">
+                <a:buFont typeface="Arial" panose="020B0604020202020204" pitchFamily="34" charset="0"/>
+                <a:buChar char="•"/>
+              </a:pPr>
+              <a:r>
+                <a:rPr lang="en-US" sz="1000" dirty="0"/>
+                <a:t>Cassandra</a:t>
+              </a:r>
+            </a:p>
+          </p:txBody>
+        </p:sp>
+      </p:grpSp>
+      <p:cxnSp>
+        <p:nvCxnSpPr>
+          <p:cNvPr id="54" name="Straight Arrow Connector 53">
+            <a:extLst>
+              <a:ext uri="{FF2B5EF4-FFF2-40B4-BE49-F238E27FC236}">
+                <a16:creationId xmlns:a16="http://schemas.microsoft.com/office/drawing/2014/main" id="{3A1A3D1C-1F60-A596-3563-E476CB6BEA9E}"/>
+              </a:ext>
+            </a:extLst>
+          </p:cNvPr>
+          <p:cNvCxnSpPr>
+            <a:cxnSpLocks/>
+            <a:stCxn id="3" idx="0"/>
+            <a:endCxn id="44" idx="2"/>
+          </p:cNvCxnSpPr>
+          <p:nvPr/>
+        </p:nvCxnSpPr>
+        <p:spPr>
+          <a:xfrm flipV="1">
+            <a:off x="4792207" y="2883337"/>
+            <a:ext cx="0" cy="277000"/>
+          </a:xfrm>
+          <a:prstGeom prst="straightConnector1">
+            <a:avLst/>
+          </a:prstGeom>
+          <a:ln>
+            <a:tailEnd type="triangle"/>
+          </a:ln>
+        </p:spPr>
+        <p:style>
+          <a:lnRef idx="1">
+            <a:schemeClr val="accent1"/>
+          </a:lnRef>
+          <a:fillRef idx="0">
+            <a:schemeClr val="accent1"/>
+          </a:fillRef>
+          <a:effectRef idx="0">
+            <a:schemeClr val="accent1"/>
+          </a:effectRef>
+          <a:fontRef idx="minor">
+            <a:schemeClr val="tx1"/>
+          </a:fontRef>
+        </p:style>
+      </p:cxnSp>
+      <p:sp>
+        <p:nvSpPr>
+          <p:cNvPr id="55" name="TextBox 54">
+            <a:extLst>
+              <a:ext uri="{FF2B5EF4-FFF2-40B4-BE49-F238E27FC236}">
+                <a16:creationId xmlns:a16="http://schemas.microsoft.com/office/drawing/2014/main" id="{A0FA32FD-1527-B967-CA4B-1D4A0AC3903A}"/>
+              </a:ext>
+            </a:extLst>
+          </p:cNvPr>
+          <p:cNvSpPr txBox="1"/>
+          <p:nvPr/>
+        </p:nvSpPr>
+        <p:spPr>
+          <a:xfrm>
+            <a:off x="9373354" y="1519644"/>
+            <a:ext cx="838819" cy="276999"/>
+          </a:xfrm>
+          <a:prstGeom prst="rect">
+            <a:avLst/>
+          </a:prstGeom>
+          <a:noFill/>
+        </p:spPr>
+        <p:txBody>
+          <a:bodyPr wrap="none" rtlCol="0">
+            <a:spAutoFit/>
+          </a:bodyPr>
+          <a:lstStyle/>
+          <a:p>
+            <a:r>
+              <a:rPr lang="en-US" sz="1200" dirty="0"/>
+              <a:t>Databricks</a:t>
+            </a:r>
+          </a:p>
+        </p:txBody>
+      </p:sp>
+      <p:sp>
+        <p:nvSpPr>
+          <p:cNvPr id="58" name="Rectangle 57">
+            <a:extLst>
+              <a:ext uri="{FF2B5EF4-FFF2-40B4-BE49-F238E27FC236}">
+                <a16:creationId xmlns:a16="http://schemas.microsoft.com/office/drawing/2014/main" id="{2906452B-FF1E-C520-9103-76D639BA62F9}"/>
+              </a:ext>
+            </a:extLst>
+          </p:cNvPr>
+          <p:cNvSpPr/>
+          <p:nvPr/>
+        </p:nvSpPr>
+        <p:spPr>
+          <a:xfrm>
+            <a:off x="10182367" y="2433716"/>
+            <a:ext cx="939438" cy="355468"/>
+          </a:xfrm>
+          <a:prstGeom prst="rect">
+            <a:avLst/>
+          </a:prstGeom>
+          <a:solidFill>
+            <a:schemeClr val="bg1"/>
+          </a:solidFill>
+          <a:ln w="19050">
+            <a:solidFill>
+              <a:srgbClr val="00B050"/>
+            </a:solidFill>
+          </a:ln>
+        </p:spPr>
+        <p:style>
+          <a:lnRef idx="2">
+            <a:schemeClr val="accent1">
+              <a:shade val="15000"/>
+            </a:schemeClr>
+          </a:lnRef>
+          <a:fillRef idx="1">
+            <a:schemeClr val="accent1"/>
+          </a:fillRef>
+          <a:effectRef idx="0">
+            <a:schemeClr val="accent1"/>
+          </a:effectRef>
+          <a:fontRef idx="minor">
+            <a:schemeClr val="lt1"/>
+          </a:fontRef>
+        </p:style>
+        <p:txBody>
+          <a:bodyPr rtlCol="0" anchor="ctr"/>
+          <a:lstStyle/>
+          <a:p>
+            <a:pPr algn="ctr"/>
+            <a:r>
+              <a:rPr lang="en-US" sz="1000" dirty="0">
+                <a:solidFill>
+                  <a:schemeClr val="tx1"/>
+                </a:solidFill>
+              </a:rPr>
+              <a:t>Credit risk</a:t>
+            </a:r>
+          </a:p>
+        </p:txBody>
+      </p:sp>
+      <p:sp>
+        <p:nvSpPr>
+          <p:cNvPr id="62" name="Rectangle 61">
+            <a:extLst>
+              <a:ext uri="{FF2B5EF4-FFF2-40B4-BE49-F238E27FC236}">
+                <a16:creationId xmlns:a16="http://schemas.microsoft.com/office/drawing/2014/main" id="{755EF20C-0771-B32B-E39D-421ABA681BA0}"/>
+              </a:ext>
+            </a:extLst>
+          </p:cNvPr>
+          <p:cNvSpPr/>
+          <p:nvPr/>
+        </p:nvSpPr>
+        <p:spPr>
+          <a:xfrm>
+            <a:off x="8714284" y="2437463"/>
+            <a:ext cx="557390" cy="299078"/>
+          </a:xfrm>
+          <a:prstGeom prst="rect">
+            <a:avLst/>
+          </a:prstGeom>
+          <a:solidFill>
+            <a:schemeClr val="bg1"/>
+          </a:solidFill>
+          <a:ln w="9525">
+            <a:solidFill>
+              <a:srgbClr val="00B050"/>
+            </a:solidFill>
+          </a:ln>
+        </p:spPr>
+        <p:style>
+          <a:lnRef idx="2">
+            <a:schemeClr val="accent1">
+              <a:shade val="15000"/>
+            </a:schemeClr>
+          </a:lnRef>
+          <a:fillRef idx="1">
+            <a:schemeClr val="accent1"/>
+          </a:fillRef>
+          <a:effectRef idx="0">
+            <a:schemeClr val="accent1"/>
+          </a:effectRef>
+          <a:fontRef idx="minor">
+            <a:schemeClr val="lt1"/>
+          </a:fontRef>
+        </p:style>
+        <p:txBody>
+          <a:bodyPr rtlCol="0" anchor="ctr"/>
+          <a:lstStyle/>
+          <a:p>
+            <a:pPr algn="ctr"/>
+            <a:r>
+              <a:rPr lang="en-US" sz="1000" dirty="0" err="1">
+                <a:solidFill>
+                  <a:schemeClr val="tx1"/>
+                </a:solidFill>
+              </a:rPr>
+              <a:t>xvala</a:t>
+            </a:r>
+            <a:endParaRPr lang="en-US" sz="1000" dirty="0">
+              <a:solidFill>
+                <a:schemeClr val="tx1"/>
+              </a:solidFill>
+            </a:endParaRPr>
+          </a:p>
+        </p:txBody>
+      </p:sp>
+      <p:sp>
+        <p:nvSpPr>
+          <p:cNvPr id="63" name="Rectangle 62">
+            <a:extLst>
+              <a:ext uri="{FF2B5EF4-FFF2-40B4-BE49-F238E27FC236}">
+                <a16:creationId xmlns:a16="http://schemas.microsoft.com/office/drawing/2014/main" id="{78BCAF12-8D34-B27E-ABDC-A607BD1AE545}"/>
+              </a:ext>
+            </a:extLst>
+          </p:cNvPr>
+          <p:cNvSpPr/>
+          <p:nvPr/>
+        </p:nvSpPr>
+        <p:spPr>
+          <a:xfrm>
+            <a:off x="9340052" y="2442315"/>
+            <a:ext cx="557390" cy="299078"/>
+          </a:xfrm>
+          <a:prstGeom prst="rect">
+            <a:avLst/>
+          </a:prstGeom>
+          <a:solidFill>
+            <a:schemeClr val="bg1"/>
+          </a:solidFill>
+          <a:ln w="9525">
+            <a:solidFill>
+              <a:srgbClr val="00B050"/>
+            </a:solidFill>
+          </a:ln>
+        </p:spPr>
+        <p:style>
+          <a:lnRef idx="2">
+            <a:schemeClr val="accent1">
+              <a:shade val="15000"/>
+            </a:schemeClr>
+          </a:lnRef>
+          <a:fillRef idx="1">
+            <a:schemeClr val="accent1"/>
+          </a:fillRef>
+          <a:effectRef idx="0">
+            <a:schemeClr val="accent1"/>
+          </a:effectRef>
+          <a:fontRef idx="minor">
+            <a:schemeClr val="lt1"/>
+          </a:fontRef>
+        </p:style>
+        <p:txBody>
+          <a:bodyPr rtlCol="0" anchor="ctr"/>
+          <a:lstStyle/>
+          <a:p>
+            <a:pPr algn="ctr"/>
+            <a:r>
+              <a:rPr lang="en-US" sz="1000" dirty="0">
+                <a:solidFill>
+                  <a:schemeClr val="tx1"/>
+                </a:solidFill>
+              </a:rPr>
+              <a:t>CMOS</a:t>
+            </a:r>
+          </a:p>
+        </p:txBody>
+      </p:sp>
+      <p:sp>
+        <p:nvSpPr>
+          <p:cNvPr id="64" name="Rectangle 63">
+            <a:extLst>
+              <a:ext uri="{FF2B5EF4-FFF2-40B4-BE49-F238E27FC236}">
+                <a16:creationId xmlns:a16="http://schemas.microsoft.com/office/drawing/2014/main" id="{218379A6-0132-DA12-C4FF-4F47CE9E0206}"/>
+              </a:ext>
+            </a:extLst>
+          </p:cNvPr>
+          <p:cNvSpPr/>
+          <p:nvPr/>
+        </p:nvSpPr>
+        <p:spPr>
+          <a:xfrm>
+            <a:off x="8714284" y="2758795"/>
+            <a:ext cx="557390" cy="299078"/>
+          </a:xfrm>
+          <a:prstGeom prst="rect">
+            <a:avLst/>
+          </a:prstGeom>
+          <a:solidFill>
+            <a:schemeClr val="bg1"/>
+          </a:solidFill>
+          <a:ln w="9525">
+            <a:solidFill>
+              <a:srgbClr val="00B050"/>
+            </a:solidFill>
+          </a:ln>
+        </p:spPr>
+        <p:style>
+          <a:lnRef idx="2">
+            <a:schemeClr val="accent1">
+              <a:shade val="15000"/>
+            </a:schemeClr>
+          </a:lnRef>
+          <a:fillRef idx="1">
+            <a:schemeClr val="accent1"/>
+          </a:fillRef>
+          <a:effectRef idx="0">
+            <a:schemeClr val="accent1"/>
+          </a:effectRef>
+          <a:fontRef idx="minor">
+            <a:schemeClr val="lt1"/>
+          </a:fontRef>
+        </p:style>
+        <p:txBody>
+          <a:bodyPr rtlCol="0" anchor="ctr"/>
+          <a:lstStyle/>
+          <a:p>
+            <a:pPr algn="ctr"/>
+            <a:r>
+              <a:rPr lang="en-US" sz="1000" dirty="0">
+                <a:solidFill>
+                  <a:schemeClr val="tx1"/>
+                </a:solidFill>
+              </a:rPr>
+              <a:t>TAMS</a:t>
+            </a:r>
+          </a:p>
+        </p:txBody>
+      </p:sp>
+      <p:sp>
+        <p:nvSpPr>
+          <p:cNvPr id="65" name="Rectangle 64">
+            <a:extLst>
+              <a:ext uri="{FF2B5EF4-FFF2-40B4-BE49-F238E27FC236}">
+                <a16:creationId xmlns:a16="http://schemas.microsoft.com/office/drawing/2014/main" id="{CE5BF259-45A2-24D4-A188-B02E7F8FC803}"/>
+              </a:ext>
+            </a:extLst>
+          </p:cNvPr>
+          <p:cNvSpPr/>
+          <p:nvPr/>
+        </p:nvSpPr>
+        <p:spPr>
+          <a:xfrm>
+            <a:off x="8723210" y="3104169"/>
+            <a:ext cx="557390" cy="215911"/>
+          </a:xfrm>
+          <a:prstGeom prst="rect">
+            <a:avLst/>
+          </a:prstGeom>
+          <a:solidFill>
+            <a:schemeClr val="bg1"/>
+          </a:solidFill>
+          <a:ln w="9525">
+            <a:solidFill>
+              <a:srgbClr val="00B050"/>
+            </a:solidFill>
+          </a:ln>
+        </p:spPr>
+        <p:style>
+          <a:lnRef idx="2">
+            <a:schemeClr val="accent1">
+              <a:shade val="15000"/>
+            </a:schemeClr>
+          </a:lnRef>
+          <a:fillRef idx="1">
+            <a:schemeClr val="accent1"/>
+          </a:fillRef>
+          <a:effectRef idx="0">
+            <a:schemeClr val="accent1"/>
+          </a:effectRef>
+          <a:fontRef idx="minor">
+            <a:schemeClr val="lt1"/>
+          </a:fontRef>
+        </p:style>
+        <p:txBody>
+          <a:bodyPr rtlCol="0" anchor="ctr"/>
+          <a:lstStyle/>
+          <a:p>
+            <a:pPr algn="ctr"/>
+            <a:r>
+              <a:rPr lang="en-US" sz="1000" dirty="0">
+                <a:solidFill>
+                  <a:schemeClr val="tx1"/>
+                </a:solidFill>
+              </a:rPr>
+              <a:t>ALFA</a:t>
+            </a:r>
+          </a:p>
+        </p:txBody>
+      </p:sp>
+      <p:sp>
+        <p:nvSpPr>
+          <p:cNvPr id="66" name="Rectangle 65">
+            <a:extLst>
+              <a:ext uri="{FF2B5EF4-FFF2-40B4-BE49-F238E27FC236}">
+                <a16:creationId xmlns:a16="http://schemas.microsoft.com/office/drawing/2014/main" id="{D29A550E-2288-75BF-3071-DC7A8D55AE96}"/>
+              </a:ext>
+            </a:extLst>
+          </p:cNvPr>
+          <p:cNvSpPr/>
+          <p:nvPr/>
+        </p:nvSpPr>
+        <p:spPr>
+          <a:xfrm>
+            <a:off x="10213238" y="2827752"/>
+            <a:ext cx="939439" cy="355468"/>
+          </a:xfrm>
+          <a:prstGeom prst="rect">
+            <a:avLst/>
+          </a:prstGeom>
+          <a:solidFill>
+            <a:schemeClr val="bg1"/>
+          </a:solidFill>
+          <a:ln w="19050">
+            <a:solidFill>
+              <a:srgbClr val="00B050"/>
+            </a:solidFill>
+          </a:ln>
+        </p:spPr>
+        <p:style>
+          <a:lnRef idx="2">
+            <a:schemeClr val="accent1">
+              <a:shade val="15000"/>
+            </a:schemeClr>
+          </a:lnRef>
+          <a:fillRef idx="1">
+            <a:schemeClr val="accent1"/>
+          </a:fillRef>
+          <a:effectRef idx="0">
+            <a:schemeClr val="accent1"/>
+          </a:effectRef>
+          <a:fontRef idx="minor">
+            <a:schemeClr val="lt1"/>
+          </a:fontRef>
+        </p:style>
+        <p:txBody>
+          <a:bodyPr rtlCol="0" anchor="ctr"/>
+          <a:lstStyle/>
+          <a:p>
+            <a:pPr algn="ctr"/>
+            <a:r>
+              <a:rPr lang="en-US" sz="1000" dirty="0">
+                <a:solidFill>
+                  <a:schemeClr val="tx1"/>
+                </a:solidFill>
+              </a:rPr>
+              <a:t>Liquidity</a:t>
+            </a:r>
+          </a:p>
+        </p:txBody>
+      </p:sp>
+      <p:sp>
+        <p:nvSpPr>
+          <p:cNvPr id="67" name="Rectangle 66">
+            <a:extLst>
+              <a:ext uri="{FF2B5EF4-FFF2-40B4-BE49-F238E27FC236}">
+                <a16:creationId xmlns:a16="http://schemas.microsoft.com/office/drawing/2014/main" id="{BB04E07B-1137-5E4E-DBBA-F8D98F80F4E3}"/>
+              </a:ext>
+            </a:extLst>
+          </p:cNvPr>
+          <p:cNvSpPr/>
+          <p:nvPr/>
+        </p:nvSpPr>
+        <p:spPr>
+          <a:xfrm>
+            <a:off x="10213238" y="3243881"/>
+            <a:ext cx="939439" cy="355468"/>
+          </a:xfrm>
+          <a:prstGeom prst="rect">
+            <a:avLst/>
+          </a:prstGeom>
+          <a:solidFill>
+            <a:schemeClr val="bg1"/>
+          </a:solidFill>
+          <a:ln w="19050">
+            <a:solidFill>
+              <a:srgbClr val="00B050"/>
+            </a:solidFill>
+          </a:ln>
+        </p:spPr>
+        <p:style>
+          <a:lnRef idx="2">
+            <a:schemeClr val="accent1">
+              <a:shade val="15000"/>
+            </a:schemeClr>
+          </a:lnRef>
+          <a:fillRef idx="1">
+            <a:schemeClr val="accent1"/>
+          </a:fillRef>
+          <a:effectRef idx="0">
+            <a:schemeClr val="accent1"/>
+          </a:effectRef>
+          <a:fontRef idx="minor">
+            <a:schemeClr val="lt1"/>
+          </a:fontRef>
+        </p:style>
+        <p:txBody>
+          <a:bodyPr rtlCol="0" anchor="ctr"/>
+          <a:lstStyle/>
+          <a:p>
+            <a:pPr algn="ctr"/>
+            <a:r>
+              <a:rPr lang="en-US" sz="1000" dirty="0">
+                <a:solidFill>
+                  <a:schemeClr val="tx1"/>
+                </a:solidFill>
+              </a:rPr>
+              <a:t>Market Risk</a:t>
+            </a:r>
+          </a:p>
+        </p:txBody>
+      </p:sp>
+      <p:sp>
+        <p:nvSpPr>
+          <p:cNvPr id="68" name="TextBox 67">
+            <a:extLst>
+              <a:ext uri="{FF2B5EF4-FFF2-40B4-BE49-F238E27FC236}">
+                <a16:creationId xmlns:a16="http://schemas.microsoft.com/office/drawing/2014/main" id="{58D7D14B-362D-6783-AC4B-AD2A86BB133F}"/>
+              </a:ext>
+            </a:extLst>
+          </p:cNvPr>
+          <p:cNvSpPr txBox="1"/>
+          <p:nvPr/>
+        </p:nvSpPr>
+        <p:spPr>
+          <a:xfrm>
+            <a:off x="8600116" y="4410563"/>
+            <a:ext cx="2361544" cy="553998"/>
+          </a:xfrm>
+          <a:prstGeom prst="rect">
+            <a:avLst/>
+          </a:prstGeom>
+          <a:noFill/>
+        </p:spPr>
+        <p:txBody>
+          <a:bodyPr wrap="none" rtlCol="0">
+            <a:spAutoFit/>
+          </a:bodyPr>
+          <a:lstStyle/>
+          <a:p>
+            <a:r>
+              <a:rPr lang="en-US" sz="1000" dirty="0"/>
+              <a:t>Databricks Workspace -&gt; risk Domain</a:t>
+            </a:r>
+          </a:p>
+          <a:p>
+            <a:r>
+              <a:rPr lang="en-US" sz="1000" dirty="0"/>
+              <a:t>Databricks Catalog -&gt; Risk Product Groups</a:t>
+            </a:r>
+          </a:p>
+          <a:p>
+            <a:r>
+              <a:rPr lang="en-US" sz="1000" dirty="0"/>
+              <a:t>Databricks Schemas -&gt; Risk Apps</a:t>
+            </a:r>
+          </a:p>
+        </p:txBody>
+      </p:sp>
+      <p:cxnSp>
+        <p:nvCxnSpPr>
+          <p:cNvPr id="70" name="Straight Arrow Connector 69">
+            <a:extLst>
+              <a:ext uri="{FF2B5EF4-FFF2-40B4-BE49-F238E27FC236}">
+                <a16:creationId xmlns:a16="http://schemas.microsoft.com/office/drawing/2014/main" id="{2B59E02C-41B3-44DC-4AD2-26D4FED20D3E}"/>
+              </a:ext>
+            </a:extLst>
+          </p:cNvPr>
+          <p:cNvCxnSpPr>
+            <a:cxnSpLocks/>
+          </p:cNvCxnSpPr>
+          <p:nvPr/>
+        </p:nvCxnSpPr>
+        <p:spPr>
+          <a:xfrm>
+            <a:off x="5420509" y="2360428"/>
+            <a:ext cx="3043007" cy="0"/>
+          </a:xfrm>
+          <a:prstGeom prst="straightConnector1">
+            <a:avLst/>
+          </a:prstGeom>
+          <a:ln w="12700">
+            <a:solidFill>
+              <a:srgbClr val="00B050"/>
+            </a:solidFill>
+            <a:tailEnd type="triangle"/>
+          </a:ln>
+        </p:spPr>
+        <p:style>
+          <a:lnRef idx="1">
+            <a:schemeClr val="accent1"/>
+          </a:lnRef>
+          <a:fillRef idx="0">
+            <a:schemeClr val="accent1"/>
+          </a:fillRef>
+          <a:effectRef idx="0">
+            <a:schemeClr val="accent1"/>
+          </a:effectRef>
+          <a:fontRef idx="minor">
+            <a:schemeClr val="tx1"/>
+          </a:fontRef>
+        </p:style>
+      </p:cxnSp>
+      <p:sp>
+        <p:nvSpPr>
+          <p:cNvPr id="83" name="Rectangle 82">
+            <a:extLst>
+              <a:ext uri="{FF2B5EF4-FFF2-40B4-BE49-F238E27FC236}">
+                <a16:creationId xmlns:a16="http://schemas.microsoft.com/office/drawing/2014/main" id="{55005585-00DD-DE9F-D26D-4BA71C94CE3E}"/>
+              </a:ext>
+            </a:extLst>
+          </p:cNvPr>
+          <p:cNvSpPr/>
+          <p:nvPr/>
+        </p:nvSpPr>
+        <p:spPr>
+          <a:xfrm>
+            <a:off x="6290431" y="3286837"/>
+            <a:ext cx="1152630" cy="570482"/>
+          </a:xfrm>
+          <a:prstGeom prst="rect">
+            <a:avLst/>
+          </a:prstGeom>
+          <a:solidFill>
+            <a:schemeClr val="bg1"/>
+          </a:solidFill>
+          <a:ln w="19050">
+            <a:solidFill>
+              <a:srgbClr val="00B050"/>
+            </a:solidFill>
+          </a:ln>
+        </p:spPr>
+        <p:style>
+          <a:lnRef idx="2">
+            <a:schemeClr val="accent1">
+              <a:shade val="15000"/>
+            </a:schemeClr>
+          </a:lnRef>
+          <a:fillRef idx="1">
+            <a:schemeClr val="accent1"/>
+          </a:fillRef>
+          <a:effectRef idx="0">
+            <a:schemeClr val="accent1"/>
+          </a:effectRef>
+          <a:fontRef idx="minor">
+            <a:schemeClr val="lt1"/>
+          </a:fontRef>
+        </p:style>
+        <p:txBody>
+          <a:bodyPr rtlCol="0" anchor="ctr"/>
+          <a:lstStyle/>
+          <a:p>
+            <a:pPr algn="ctr"/>
+            <a:r>
+              <a:rPr lang="en-US" sz="1200" dirty="0">
+                <a:solidFill>
+                  <a:schemeClr val="tx1"/>
+                </a:solidFill>
+              </a:rPr>
+              <a:t>Others</a:t>
+            </a:r>
+          </a:p>
+          <a:p>
+            <a:pPr algn="ctr"/>
+            <a:r>
+              <a:rPr lang="en-US" sz="1200" dirty="0">
+                <a:solidFill>
+                  <a:schemeClr val="tx1"/>
+                </a:solidFill>
+              </a:rPr>
+              <a:t>(Apps) </a:t>
+            </a:r>
+          </a:p>
+        </p:txBody>
+      </p:sp>
+      <p:cxnSp>
+        <p:nvCxnSpPr>
+          <p:cNvPr id="85" name="Straight Arrow Connector 84">
+            <a:extLst>
+              <a:ext uri="{FF2B5EF4-FFF2-40B4-BE49-F238E27FC236}">
+                <a16:creationId xmlns:a16="http://schemas.microsoft.com/office/drawing/2014/main" id="{3DF204BB-E42B-B0E5-A86F-F3F64A4015F9}"/>
+              </a:ext>
+            </a:extLst>
+          </p:cNvPr>
+          <p:cNvCxnSpPr>
+            <a:cxnSpLocks/>
+          </p:cNvCxnSpPr>
+          <p:nvPr/>
+        </p:nvCxnSpPr>
+        <p:spPr>
+          <a:xfrm>
+            <a:off x="5754938" y="2883337"/>
+            <a:ext cx="454476" cy="0"/>
+          </a:xfrm>
+          <a:prstGeom prst="straightConnector1">
+            <a:avLst/>
+          </a:prstGeom>
+          <a:ln>
+            <a:tailEnd type="triangle"/>
+          </a:ln>
+        </p:spPr>
+        <p:style>
+          <a:lnRef idx="1">
+            <a:schemeClr val="accent1"/>
+          </a:lnRef>
+          <a:fillRef idx="0">
+            <a:schemeClr val="accent1"/>
+          </a:fillRef>
+          <a:effectRef idx="0">
+            <a:schemeClr val="accent1"/>
+          </a:effectRef>
+          <a:fontRef idx="minor">
+            <a:schemeClr val="tx1"/>
+          </a:fontRef>
+        </p:style>
+      </p:cxnSp>
+      <p:cxnSp>
+        <p:nvCxnSpPr>
+          <p:cNvPr id="87" name="Straight Arrow Connector 86">
+            <a:extLst>
+              <a:ext uri="{FF2B5EF4-FFF2-40B4-BE49-F238E27FC236}">
+                <a16:creationId xmlns:a16="http://schemas.microsoft.com/office/drawing/2014/main" id="{4AF4D3D1-DA11-71EA-F9B7-730F589F710B}"/>
+              </a:ext>
+            </a:extLst>
+          </p:cNvPr>
+          <p:cNvCxnSpPr>
+            <a:cxnSpLocks/>
+          </p:cNvCxnSpPr>
+          <p:nvPr/>
+        </p:nvCxnSpPr>
+        <p:spPr>
+          <a:xfrm>
+            <a:off x="5754938" y="3536955"/>
+            <a:ext cx="454476" cy="0"/>
+          </a:xfrm>
+          <a:prstGeom prst="straightConnector1">
+            <a:avLst/>
+          </a:prstGeom>
+          <a:ln>
+            <a:tailEnd type="triangle"/>
+          </a:ln>
+        </p:spPr>
+        <p:style>
+          <a:lnRef idx="1">
+            <a:schemeClr val="accent1"/>
+          </a:lnRef>
+          <a:fillRef idx="0">
+            <a:schemeClr val="accent1"/>
+          </a:fillRef>
+          <a:effectRef idx="0">
+            <a:schemeClr val="accent1"/>
+          </a:effectRef>
+          <a:fontRef idx="minor">
+            <a:schemeClr val="tx1"/>
+          </a:fontRef>
+        </p:style>
+      </p:cxnSp>
+      <p:sp>
+        <p:nvSpPr>
+          <p:cNvPr id="89" name="TextBox 88">
+            <a:extLst>
+              <a:ext uri="{FF2B5EF4-FFF2-40B4-BE49-F238E27FC236}">
+                <a16:creationId xmlns:a16="http://schemas.microsoft.com/office/drawing/2014/main" id="{F05E4DE3-76F3-3174-9EEE-E82D5CF3F1A1}"/>
+              </a:ext>
+            </a:extLst>
+          </p:cNvPr>
+          <p:cNvSpPr txBox="1"/>
+          <p:nvPr/>
+        </p:nvSpPr>
+        <p:spPr>
+          <a:xfrm>
+            <a:off x="7040892" y="2252706"/>
+            <a:ext cx="1077539" cy="215444"/>
+          </a:xfrm>
+          <a:prstGeom prst="rect">
+            <a:avLst/>
+          </a:prstGeom>
+          <a:solidFill>
+            <a:schemeClr val="bg1"/>
+          </a:solidFill>
+        </p:spPr>
+        <p:txBody>
+          <a:bodyPr wrap="none" rtlCol="0">
+            <a:spAutoFit/>
+          </a:bodyPr>
+          <a:lstStyle/>
+          <a:p>
+            <a:r>
+              <a:rPr lang="en-US" sz="800" dirty="0"/>
+              <a:t>App specific Schemas</a:t>
+            </a:r>
+          </a:p>
+        </p:txBody>
+      </p:sp>
+      <p:sp>
+        <p:nvSpPr>
+          <p:cNvPr id="90" name="TextBox 89">
+            <a:extLst>
+              <a:ext uri="{FF2B5EF4-FFF2-40B4-BE49-F238E27FC236}">
+                <a16:creationId xmlns:a16="http://schemas.microsoft.com/office/drawing/2014/main" id="{FF1D2623-A13B-3CD0-7744-01E5823A00B4}"/>
+              </a:ext>
+            </a:extLst>
+          </p:cNvPr>
+          <p:cNvSpPr txBox="1"/>
+          <p:nvPr/>
+        </p:nvSpPr>
+        <p:spPr>
+          <a:xfrm>
+            <a:off x="8642053" y="5181759"/>
+            <a:ext cx="2510624" cy="861774"/>
+          </a:xfrm>
+          <a:prstGeom prst="rect">
+            <a:avLst/>
+          </a:prstGeom>
+          <a:noFill/>
+        </p:spPr>
+        <p:txBody>
+          <a:bodyPr wrap="none" rtlCol="0">
+            <a:spAutoFit/>
+          </a:bodyPr>
+          <a:lstStyle/>
+          <a:p>
+            <a:r>
+              <a:rPr lang="en-US" sz="1200" b="1" dirty="0"/>
+              <a:t>Outcome</a:t>
+            </a:r>
+          </a:p>
+          <a:p>
+            <a:pPr marL="342900" indent="-342900">
+              <a:buAutoNum type="arabicPeriod"/>
+            </a:pPr>
+            <a:r>
+              <a:rPr lang="en-US" sz="1000" dirty="0"/>
+              <a:t>Schema for Risk produced Data added</a:t>
+            </a:r>
+          </a:p>
+          <a:p>
+            <a:pPr marL="342900" indent="-342900">
+              <a:buAutoNum type="arabicPeriod"/>
+            </a:pPr>
+            <a:r>
+              <a:rPr lang="en-US" sz="1000" dirty="0"/>
+              <a:t>Exploration / Dashboards</a:t>
+            </a:r>
+          </a:p>
+          <a:p>
+            <a:endParaRPr lang="en-US" dirty="0"/>
+          </a:p>
+        </p:txBody>
+      </p:sp>
+      <p:cxnSp>
+        <p:nvCxnSpPr>
+          <p:cNvPr id="95" name="Straight Arrow Connector 94">
+            <a:extLst>
+              <a:ext uri="{FF2B5EF4-FFF2-40B4-BE49-F238E27FC236}">
+                <a16:creationId xmlns:a16="http://schemas.microsoft.com/office/drawing/2014/main" id="{695ACA22-B2E4-D439-8C7A-B91D6EECFD79}"/>
+              </a:ext>
+            </a:extLst>
+          </p:cNvPr>
+          <p:cNvCxnSpPr>
+            <a:cxnSpLocks/>
+          </p:cNvCxnSpPr>
+          <p:nvPr/>
+        </p:nvCxnSpPr>
+        <p:spPr>
+          <a:xfrm flipH="1">
+            <a:off x="7963786" y="2883337"/>
+            <a:ext cx="499730" cy="0"/>
+          </a:xfrm>
+          <a:prstGeom prst="straightConnector1">
+            <a:avLst/>
+          </a:prstGeom>
+          <a:ln>
+            <a:tailEnd type="triangle"/>
+          </a:ln>
+        </p:spPr>
+        <p:style>
+          <a:lnRef idx="1">
+            <a:schemeClr val="accent1"/>
+          </a:lnRef>
+          <a:fillRef idx="0">
+            <a:schemeClr val="accent1"/>
+          </a:fillRef>
+          <a:effectRef idx="0">
+            <a:schemeClr val="accent1"/>
+          </a:effectRef>
+          <a:fontRef idx="minor">
+            <a:schemeClr val="tx1"/>
+          </a:fontRef>
+        </p:style>
+      </p:cxnSp>
+      <p:cxnSp>
+        <p:nvCxnSpPr>
+          <p:cNvPr id="97" name="Elbow Connector 96">
+            <a:extLst>
+              <a:ext uri="{FF2B5EF4-FFF2-40B4-BE49-F238E27FC236}">
+                <a16:creationId xmlns:a16="http://schemas.microsoft.com/office/drawing/2014/main" id="{4EA5D5B3-9501-E239-1C9D-1B3612861322}"/>
+              </a:ext>
+            </a:extLst>
+          </p:cNvPr>
+          <p:cNvCxnSpPr>
+            <a:cxnSpLocks/>
+            <a:stCxn id="4" idx="0"/>
+            <a:endCxn id="57" idx="0"/>
+          </p:cNvCxnSpPr>
+          <p:nvPr/>
+        </p:nvCxnSpPr>
+        <p:spPr>
+          <a:xfrm rot="5400000" flipH="1" flipV="1">
+            <a:off x="4851458" y="-1890766"/>
+            <a:ext cx="1534074" cy="8238609"/>
+          </a:xfrm>
+          <a:prstGeom prst="bentConnector3">
+            <a:avLst>
+              <a:gd name="adj1" fmla="val 114901"/>
+            </a:avLst>
+          </a:prstGeom>
+          <a:ln>
+            <a:tailEnd type="triangle"/>
+          </a:ln>
+        </p:spPr>
+        <p:style>
+          <a:lnRef idx="1">
+            <a:schemeClr val="accent1"/>
+          </a:lnRef>
+          <a:fillRef idx="0">
+            <a:schemeClr val="accent1"/>
+          </a:fillRef>
+          <a:effectRef idx="0">
+            <a:schemeClr val="accent1"/>
+          </a:effectRef>
+          <a:fontRef idx="minor">
+            <a:schemeClr val="tx1"/>
+          </a:fontRef>
+        </p:style>
+      </p:cxnSp>
+      <p:sp>
+        <p:nvSpPr>
+          <p:cNvPr id="106" name="TextBox 105">
+            <a:extLst>
+              <a:ext uri="{FF2B5EF4-FFF2-40B4-BE49-F238E27FC236}">
+                <a16:creationId xmlns:a16="http://schemas.microsoft.com/office/drawing/2014/main" id="{C47E9E19-6FAC-3CA2-199F-6F70BA02929F}"/>
+              </a:ext>
+            </a:extLst>
+          </p:cNvPr>
+          <p:cNvSpPr txBox="1"/>
+          <p:nvPr/>
+        </p:nvSpPr>
+        <p:spPr>
+          <a:xfrm>
+            <a:off x="6243057" y="1130797"/>
+            <a:ext cx="2728632" cy="246221"/>
+          </a:xfrm>
+          <a:prstGeom prst="rect">
+            <a:avLst/>
+          </a:prstGeom>
+          <a:solidFill>
+            <a:schemeClr val="bg1"/>
+          </a:solidFill>
+        </p:spPr>
+        <p:txBody>
+          <a:bodyPr wrap="none" rtlCol="0">
+            <a:spAutoFit/>
+          </a:bodyPr>
+          <a:lstStyle/>
+          <a:p>
+            <a:r>
+              <a:rPr lang="en-US" sz="1000" dirty="0"/>
+              <a:t>Data loaded into app specific schemas as needed</a:t>
+            </a:r>
+          </a:p>
+        </p:txBody>
+      </p:sp>
+    </p:spTree>
+    <p:extLst>
+      <p:ext uri="{BB962C8B-B14F-4D97-AF65-F5344CB8AC3E}">
+        <p14:creationId xmlns:p14="http://schemas.microsoft.com/office/powerpoint/2010/main" val="2675158991"/>
+      </p:ext>
+    </p:extLst>
+  </p:cSld>
+  <p:clrMapOvr>
+    <a:masterClrMapping/>
+  </p:clrMapOvr>
+</p:sld>
+</file>
+
+<file path=ppt/slides/slide13.xml><?xml version="1.0" encoding="utf-8"?>
+<p:sld xmlns:a="http://schemas.openxmlformats.org/drawingml/2006/main" xmlns:r="http://schemas.openxmlformats.org/officeDocument/2006/relationships" xmlns:p="http://schemas.openxmlformats.org/presentationml/2006/main">
+  <p:cSld>
+    <p:spTree>
+      <p:nvGrpSpPr>
+        <p:cNvPr id="1" name=""/>
+        <p:cNvGrpSpPr/>
+        <p:nvPr/>
+      </p:nvGrpSpPr>
+      <p:grpSpPr>
+        <a:xfrm>
+          <a:off x="0" y="0"/>
+          <a:ext cx="0" cy="0"/>
+          <a:chOff x="0" y="0"/>
+          <a:chExt cx="0" cy="0"/>
+        </a:xfrm>
+      </p:grpSpPr>
+      <p:sp>
+        <p:nvSpPr>
+          <p:cNvPr id="2" name="TextBox 1">
+            <a:extLst>
+              <a:ext uri="{FF2B5EF4-FFF2-40B4-BE49-F238E27FC236}">
+                <a16:creationId xmlns:a16="http://schemas.microsoft.com/office/drawing/2014/main" id="{7E57A923-9687-72ED-BD33-4EDEC33579DA}"/>
+              </a:ext>
+            </a:extLst>
+          </p:cNvPr>
+          <p:cNvSpPr txBox="1"/>
+          <p:nvPr/>
+        </p:nvSpPr>
+        <p:spPr>
+          <a:xfrm>
+            <a:off x="4976037" y="212651"/>
+            <a:ext cx="1692130" cy="369332"/>
+          </a:xfrm>
+          <a:prstGeom prst="rect">
+            <a:avLst/>
+          </a:prstGeom>
+          <a:noFill/>
+        </p:spPr>
+        <p:txBody>
+          <a:bodyPr wrap="none" rtlCol="0">
+            <a:spAutoFit/>
+          </a:bodyPr>
+          <a:lstStyle/>
+          <a:p>
+            <a:r>
+              <a:rPr lang="en-US" dirty="0"/>
+              <a:t>Open Questions</a:t>
+            </a:r>
+          </a:p>
+        </p:txBody>
+      </p:sp>
+      <p:sp>
+        <p:nvSpPr>
+          <p:cNvPr id="3" name="TextBox 2">
+            <a:extLst>
+              <a:ext uri="{FF2B5EF4-FFF2-40B4-BE49-F238E27FC236}">
+                <a16:creationId xmlns:a16="http://schemas.microsoft.com/office/drawing/2014/main" id="{0F247D7B-AA02-4FC1-D935-6A1EEB4F6710}"/>
+              </a:ext>
+            </a:extLst>
+          </p:cNvPr>
+          <p:cNvSpPr txBox="1"/>
+          <p:nvPr/>
+        </p:nvSpPr>
+        <p:spPr>
+          <a:xfrm>
+            <a:off x="531628" y="1499191"/>
+            <a:ext cx="3978974" cy="3447098"/>
+          </a:xfrm>
+          <a:prstGeom prst="rect">
+            <a:avLst/>
+          </a:prstGeom>
+          <a:noFill/>
+        </p:spPr>
+        <p:txBody>
+          <a:bodyPr wrap="none" rtlCol="0">
+            <a:spAutoFit/>
+          </a:bodyPr>
+          <a:lstStyle/>
+          <a:p>
+            <a:pPr marL="171450" indent="-171450">
+              <a:buFont typeface="Arial" panose="020B0604020202020204" pitchFamily="34" charset="0"/>
+              <a:buChar char="•"/>
+            </a:pPr>
+            <a:r>
+              <a:rPr lang="en-US" sz="1000" dirty="0"/>
+              <a:t>Ontology and how it maps to the CDM</a:t>
+            </a:r>
+          </a:p>
+          <a:p>
+            <a:pPr marL="171450" indent="-171450">
+              <a:buFont typeface="Arial" panose="020B0604020202020204" pitchFamily="34" charset="0"/>
+              <a:buChar char="•"/>
+            </a:pPr>
+            <a:r>
+              <a:rPr lang="en-US" sz="1000" dirty="0"/>
+              <a:t>Upstream Domains</a:t>
+            </a:r>
+          </a:p>
+          <a:p>
+            <a:pPr marL="628650" lvl="1" indent="-171450">
+              <a:buFont typeface="Arial" panose="020B0604020202020204" pitchFamily="34" charset="0"/>
+              <a:buChar char="•"/>
+            </a:pPr>
+            <a:r>
+              <a:rPr lang="en-US" sz="1000" dirty="0"/>
+              <a:t>Ontology</a:t>
+            </a:r>
+          </a:p>
+          <a:p>
+            <a:pPr marL="628650" lvl="1" indent="-171450">
+              <a:buFont typeface="Arial" panose="020B0604020202020204" pitchFamily="34" charset="0"/>
+              <a:buChar char="•"/>
+            </a:pPr>
+            <a:r>
+              <a:rPr lang="en-US" sz="1000" dirty="0"/>
+              <a:t>Governance</a:t>
+            </a:r>
+          </a:p>
+          <a:p>
+            <a:pPr marL="171450" indent="-171450">
+              <a:buFont typeface="Arial" panose="020B0604020202020204" pitchFamily="34" charset="0"/>
+              <a:buChar char="•"/>
+            </a:pPr>
+            <a:r>
+              <a:rPr lang="en-US" sz="1000" dirty="0"/>
+              <a:t>Architecture</a:t>
+            </a:r>
+          </a:p>
+          <a:p>
+            <a:pPr marL="628650" lvl="1" indent="-171450">
+              <a:buFont typeface="Arial" panose="020B0604020202020204" pitchFamily="34" charset="0"/>
+              <a:buChar char="•"/>
+            </a:pPr>
+            <a:r>
+              <a:rPr lang="en-US" sz="1000" dirty="0"/>
+              <a:t>Centralized or Domain Driven / Data Mesh</a:t>
+            </a:r>
+          </a:p>
+          <a:p>
+            <a:pPr marL="171450" indent="-171450">
+              <a:buFont typeface="Arial" panose="020B0604020202020204" pitchFamily="34" charset="0"/>
+              <a:buChar char="•"/>
+            </a:pPr>
+            <a:r>
+              <a:rPr lang="en-US" sz="1000" dirty="0"/>
+              <a:t>Role of a custodian</a:t>
+            </a:r>
+          </a:p>
+          <a:p>
+            <a:pPr marL="628650" lvl="1" indent="-171450">
+              <a:buFont typeface="Arial" panose="020B0604020202020204" pitchFamily="34" charset="0"/>
+              <a:buChar char="•"/>
+            </a:pPr>
+            <a:r>
+              <a:rPr lang="en-US" sz="1000" dirty="0"/>
+              <a:t>Domain authored Rules</a:t>
+            </a:r>
+          </a:p>
+          <a:p>
+            <a:pPr marL="628650" lvl="1" indent="-171450">
+              <a:buFont typeface="Arial" panose="020B0604020202020204" pitchFamily="34" charset="0"/>
+              <a:buChar char="•"/>
+            </a:pPr>
+            <a:r>
+              <a:rPr lang="en-US" sz="1000" dirty="0"/>
+              <a:t>Transforms</a:t>
+            </a:r>
+          </a:p>
+          <a:p>
+            <a:pPr marL="171450" indent="-171450">
+              <a:buFont typeface="Arial" panose="020B0604020202020204" pitchFamily="34" charset="0"/>
+              <a:buChar char="•"/>
+            </a:pPr>
+            <a:r>
+              <a:rPr lang="en-US" sz="1000" dirty="0" err="1"/>
+              <a:t>Datalake</a:t>
+            </a:r>
+            <a:r>
+              <a:rPr lang="en-US" sz="1000" dirty="0"/>
+              <a:t> Tenant</a:t>
+            </a:r>
+          </a:p>
+          <a:p>
+            <a:pPr marL="628650" lvl="1" indent="-171450">
+              <a:buFont typeface="Arial" panose="020B0604020202020204" pitchFamily="34" charset="0"/>
+              <a:buChar char="•"/>
+            </a:pPr>
+            <a:r>
+              <a:rPr lang="en-US" sz="1000" dirty="0"/>
+              <a:t>Domain</a:t>
+            </a:r>
+          </a:p>
+          <a:p>
+            <a:pPr marL="1085850" lvl="2" indent="-171450">
+              <a:buFont typeface="Arial" panose="020B0604020202020204" pitchFamily="34" charset="0"/>
+              <a:buChar char="•"/>
+            </a:pPr>
+            <a:r>
+              <a:rPr lang="en-US" sz="1000" dirty="0"/>
+              <a:t>Domain specific / custodian managed</a:t>
+            </a:r>
+          </a:p>
+          <a:p>
+            <a:pPr marL="1085850" lvl="2" indent="-171450">
+              <a:buFont typeface="Arial" panose="020B0604020202020204" pitchFamily="34" charset="0"/>
+              <a:buChar char="•"/>
+            </a:pPr>
+            <a:r>
+              <a:rPr lang="en-US" sz="1000" dirty="0"/>
+              <a:t>All Business Domain  Data or specific</a:t>
+            </a:r>
+          </a:p>
+          <a:p>
+            <a:pPr marL="1085850" lvl="2" indent="-171450">
+              <a:buFont typeface="Arial" panose="020B0604020202020204" pitchFamily="34" charset="0"/>
+              <a:buChar char="•"/>
+            </a:pPr>
+            <a:r>
+              <a:rPr lang="en-US" sz="1000" dirty="0"/>
+              <a:t>External data needs</a:t>
+            </a:r>
+          </a:p>
+          <a:p>
+            <a:pPr marL="1543050" lvl="3" indent="-171450">
+              <a:buFont typeface="Arial" panose="020B0604020202020204" pitchFamily="34" charset="0"/>
+              <a:buChar char="•"/>
+            </a:pPr>
+            <a:r>
+              <a:rPr lang="en-US" sz="1000" dirty="0"/>
+              <a:t>Schema/App  level storage or Domain level</a:t>
+            </a:r>
+          </a:p>
+          <a:p>
+            <a:pPr marL="171450" indent="-171450">
+              <a:buFont typeface="Arial" panose="020B0604020202020204" pitchFamily="34" charset="0"/>
+              <a:buChar char="•"/>
+            </a:pPr>
+            <a:r>
+              <a:rPr lang="en-US" sz="1000" dirty="0"/>
+              <a:t>Role of CDM / EDW</a:t>
+            </a:r>
+          </a:p>
+          <a:p>
+            <a:pPr marL="171450" indent="-171450">
+              <a:buFont typeface="Arial" panose="020B0604020202020204" pitchFamily="34" charset="0"/>
+              <a:buChar char="•"/>
+            </a:pPr>
+            <a:r>
+              <a:rPr lang="en-US" sz="1000" dirty="0"/>
+              <a:t>Data Discovery</a:t>
+            </a:r>
+          </a:p>
+          <a:p>
+            <a:pPr marL="628650" lvl="1" indent="-171450">
+              <a:buFont typeface="Arial" panose="020B0604020202020204" pitchFamily="34" charset="0"/>
+              <a:buChar char="•"/>
+            </a:pPr>
+            <a:r>
+              <a:rPr lang="en-US" sz="1000" dirty="0"/>
+              <a:t>What is starting point</a:t>
+            </a:r>
+          </a:p>
+          <a:p>
+            <a:pPr marL="628650" lvl="1" indent="-171450">
+              <a:buFont typeface="Arial" panose="020B0604020202020204" pitchFamily="34" charset="0"/>
+              <a:buChar char="•"/>
+            </a:pPr>
+            <a:r>
+              <a:rPr lang="en-US" sz="1000" dirty="0"/>
+              <a:t>Where should it be logged</a:t>
+            </a:r>
+          </a:p>
+          <a:p>
+            <a:pPr marL="628650" lvl="1" indent="-171450">
+              <a:buFont typeface="Arial" panose="020B0604020202020204" pitchFamily="34" charset="0"/>
+              <a:buChar char="•"/>
+            </a:pPr>
+            <a:r>
+              <a:rPr lang="en-US" sz="1000" dirty="0"/>
+              <a:t>Template</a:t>
+            </a:r>
+          </a:p>
+          <a:p>
+            <a:endParaRPr lang="en-US" dirty="0"/>
+          </a:p>
+        </p:txBody>
+      </p:sp>
+    </p:spTree>
+    <p:extLst>
+      <p:ext uri="{BB962C8B-B14F-4D97-AF65-F5344CB8AC3E}">
+        <p14:creationId xmlns:p14="http://schemas.microsoft.com/office/powerpoint/2010/main" val="303742037"/>
       </p:ext>
     </p:extLst>
   </p:cSld>
@@ -25294,7 +28674,46 @@
       </a:bgFillStyleLst>
     </a:fmtScheme>
   </a:themeElements>
-  <a:objectDefaults/>
+  <a:objectDefaults>
+    <a:spDef>
+      <a:spPr>
+        <a:solidFill>
+          <a:schemeClr val="bg1"/>
+        </a:solidFill>
+        <a:ln w="19050">
+          <a:solidFill>
+            <a:srgbClr val="00B050"/>
+          </a:solidFill>
+        </a:ln>
+      </a:spPr>
+      <a:bodyPr rtlCol="0" anchor="ctr"/>
+      <a:lstStyle>
+        <a:defPPr algn="ctr">
+          <a:defRPr sz="1000" dirty="0" smtClean="0">
+            <a:solidFill>
+              <a:schemeClr val="tx1"/>
+            </a:solidFill>
+          </a:defRPr>
+        </a:defPPr>
+      </a:lstStyle>
+      <a:style>
+        <a:lnRef idx="2">
+          <a:schemeClr val="accent1">
+            <a:shade val="15000"/>
+          </a:schemeClr>
+        </a:lnRef>
+        <a:fillRef idx="1">
+          <a:schemeClr val="accent1"/>
+        </a:fillRef>
+        <a:effectRef idx="0">
+          <a:schemeClr val="accent1"/>
+        </a:effectRef>
+        <a:fontRef idx="minor">
+          <a:schemeClr val="lt1"/>
+        </a:fontRef>
+      </a:style>
+    </a:spDef>
+  </a:objectDefaults>
   <a:extraClrSchemeLst/>
   <a:extLst>
     <a:ext uri="{05A4C25C-085E-4340-85A3-A5531E510DB2}">
